--- a/Web Engineering/CSE 413_ Lec01.pptx
+++ b/Web Engineering/CSE 413_ Lec01.pptx
@@ -3,22 +3,24 @@
 <p:presentation xmlns:a="http://schemas.openxmlformats.org/drawingml/2006/main" xmlns:r="http://schemas.openxmlformats.org/officeDocument/2006/relationships" xmlns:p="http://schemas.openxmlformats.org/presentationml/2006/main" saveSubsetFonts="1">
   <p:sldMasterIdLst>
     <p:sldMasterId id="2147483648" r:id="rId1"/>
+    <p:sldMasterId id="2147483660" r:id="rId2"/>
   </p:sldMasterIdLst>
   <p:sldIdLst>
-    <p:sldId id="256" r:id="rId2"/>
-    <p:sldId id="257" r:id="rId3"/>
-    <p:sldId id="258" r:id="rId4"/>
-    <p:sldId id="267" r:id="rId5"/>
-    <p:sldId id="268" r:id="rId6"/>
-    <p:sldId id="269" r:id="rId7"/>
-    <p:sldId id="259" r:id="rId8"/>
-    <p:sldId id="260" r:id="rId9"/>
-    <p:sldId id="261" r:id="rId10"/>
-    <p:sldId id="262" r:id="rId11"/>
-    <p:sldId id="263" r:id="rId12"/>
-    <p:sldId id="264" r:id="rId13"/>
-    <p:sldId id="265" r:id="rId14"/>
-    <p:sldId id="266" r:id="rId15"/>
+    <p:sldId id="256" r:id="rId3"/>
+    <p:sldId id="257" r:id="rId4"/>
+    <p:sldId id="258" r:id="rId5"/>
+    <p:sldId id="267" r:id="rId6"/>
+    <p:sldId id="268" r:id="rId7"/>
+    <p:sldId id="269" r:id="rId8"/>
+    <p:sldId id="270" r:id="rId9"/>
+    <p:sldId id="259" r:id="rId10"/>
+    <p:sldId id="260" r:id="rId11"/>
+    <p:sldId id="261" r:id="rId12"/>
+    <p:sldId id="262" r:id="rId13"/>
+    <p:sldId id="263" r:id="rId14"/>
+    <p:sldId id="264" r:id="rId15"/>
+    <p:sldId id="265" r:id="rId16"/>
+    <p:sldId id="266" r:id="rId17"/>
   </p:sldIdLst>
   <p:sldSz cx="9144000" cy="6858000" type="screen4x3"/>
   <p:notesSz cx="6858000" cy="9144000"/>
@@ -117,6 +119,22 @@
       </a:defRPr>
     </a:lvl9pPr>
   </p:defaultTextStyle>
+  <p:extLst>
+    <p:ext uri="{EFAFB233-063F-42B5-8137-9DF3F51BA10A}">
+      <p15:sldGuideLst xmlns:p15="http://schemas.microsoft.com/office/powerpoint/2012/main">
+        <p15:guide id="1" orient="horz" pos="2160">
+          <p15:clr>
+            <a:srgbClr val="A4A3A4"/>
+          </p15:clr>
+        </p15:guide>
+        <p15:guide id="2" pos="2880">
+          <p15:clr>
+            <a:srgbClr val="A4A3A4"/>
+          </p15:clr>
+        </p15:guide>
+      </p15:sldGuideLst>
+    </p:ext>
+  </p:extLst>
 </p:presentation>
 </file>
 
@@ -302,7 +320,7 @@
             <a:fld id="{1D8BD707-D9CF-40AE-B4C6-C98DA3205C09}" type="datetimeFigureOut">
               <a:rPr lang="en-US" smtClean="0"/>
               <a:pPr/>
-              <a:t>7/2/2025</a:t>
+              <a:t>7/30/2025</a:t>
             </a:fld>
             <a:endParaRPr lang="en-US"/>
           </a:p>
@@ -469,7 +487,7 @@
             <a:fld id="{1D8BD707-D9CF-40AE-B4C6-C98DA3205C09}" type="datetimeFigureOut">
               <a:rPr lang="en-US" smtClean="0"/>
               <a:pPr/>
-              <a:t>7/2/2025</a:t>
+              <a:t>7/30/2025</a:t>
             </a:fld>
             <a:endParaRPr lang="en-US"/>
           </a:p>
@@ -646,7 +664,7 @@
             <a:fld id="{1D8BD707-D9CF-40AE-B4C6-C98DA3205C09}" type="datetimeFigureOut">
               <a:rPr lang="en-US" smtClean="0"/>
               <a:pPr/>
-              <a:t>7/2/2025</a:t>
+              <a:t>7/30/2025</a:t>
             </a:fld>
             <a:endParaRPr lang="en-US"/>
           </a:p>
@@ -696,6 +714,1914 @@
         </p:txBody>
       </p:sp>
     </p:spTree>
+  </p:cSld>
+  <p:clrMapOvr>
+    <a:masterClrMapping/>
+  </p:clrMapOvr>
+</p:sldLayout>
+</file>
+
+<file path=ppt/slideLayouts/slideLayout12.xml><?xml version="1.0" encoding="utf-8"?>
+<p:sldLayout xmlns:a="http://schemas.openxmlformats.org/drawingml/2006/main" xmlns:r="http://schemas.openxmlformats.org/officeDocument/2006/relationships" xmlns:p="http://schemas.openxmlformats.org/presentationml/2006/main" type="title" preserve="1">
+  <p:cSld name="Title Slide">
+    <p:spTree>
+      <p:nvGrpSpPr>
+        <p:cNvPr id="1" name=""/>
+        <p:cNvGrpSpPr/>
+        <p:nvPr/>
+      </p:nvGrpSpPr>
+      <p:grpSpPr>
+        <a:xfrm>
+          <a:off x="0" y="0"/>
+          <a:ext cx="0" cy="0"/>
+          <a:chOff x="0" y="0"/>
+          <a:chExt cx="0" cy="0"/>
+        </a:xfrm>
+      </p:grpSpPr>
+      <p:sp>
+        <p:nvSpPr>
+          <p:cNvPr id="2" name="Title 1"/>
+          <p:cNvSpPr>
+            <a:spLocks noGrp="1"/>
+          </p:cNvSpPr>
+          <p:nvPr>
+            <p:ph type="ctrTitle"/>
+          </p:nvPr>
+        </p:nvSpPr>
+        <p:spPr>
+          <a:xfrm>
+            <a:off x="866442" y="1447801"/>
+            <a:ext cx="6620968" cy="3329581"/>
+          </a:xfrm>
+        </p:spPr>
+        <p:txBody>
+          <a:bodyPr anchor="b"/>
+          <a:lstStyle>
+            <a:lvl1pPr>
+              <a:defRPr sz="7200"/>
+            </a:lvl1pPr>
+          </a:lstStyle>
+          <a:p>
+            <a:r>
+              <a:rPr lang="en-US" smtClean="0"/>
+              <a:t>Click to edit Master title style</a:t>
+            </a:r>
+            <a:endParaRPr lang="en-US" dirty="0"/>
+          </a:p>
+        </p:txBody>
+      </p:sp>
+      <p:sp>
+        <p:nvSpPr>
+          <p:cNvPr id="3" name="Subtitle 2"/>
+          <p:cNvSpPr>
+            <a:spLocks noGrp="1"/>
+          </p:cNvSpPr>
+          <p:nvPr>
+            <p:ph type="subTitle" idx="1"/>
+          </p:nvPr>
+        </p:nvSpPr>
+        <p:spPr>
+          <a:xfrm>
+            <a:off x="866442" y="4777380"/>
+            <a:ext cx="6620968" cy="861420"/>
+          </a:xfrm>
+        </p:spPr>
+        <p:txBody>
+          <a:bodyPr anchor="t"/>
+          <a:lstStyle>
+            <a:lvl1pPr marL="0" indent="0" algn="l">
+              <a:buNone/>
+              <a:defRPr cap="all">
+                <a:solidFill>
+                  <a:schemeClr val="bg2">
+                    <a:lumMod val="40000"/>
+                    <a:lumOff val="60000"/>
+                  </a:schemeClr>
+                </a:solidFill>
+              </a:defRPr>
+            </a:lvl1pPr>
+            <a:lvl2pPr marL="457200" indent="0" algn="ctr">
+              <a:buNone/>
+              <a:defRPr>
+                <a:solidFill>
+                  <a:schemeClr val="tx1">
+                    <a:tint val="75000"/>
+                  </a:schemeClr>
+                </a:solidFill>
+              </a:defRPr>
+            </a:lvl2pPr>
+            <a:lvl3pPr marL="914400" indent="0" algn="ctr">
+              <a:buNone/>
+              <a:defRPr>
+                <a:solidFill>
+                  <a:schemeClr val="tx1">
+                    <a:tint val="75000"/>
+                  </a:schemeClr>
+                </a:solidFill>
+              </a:defRPr>
+            </a:lvl3pPr>
+            <a:lvl4pPr marL="1371600" indent="0" algn="ctr">
+              <a:buNone/>
+              <a:defRPr>
+                <a:solidFill>
+                  <a:schemeClr val="tx1">
+                    <a:tint val="75000"/>
+                  </a:schemeClr>
+                </a:solidFill>
+              </a:defRPr>
+            </a:lvl4pPr>
+            <a:lvl5pPr marL="1828800" indent="0" algn="ctr">
+              <a:buNone/>
+              <a:defRPr>
+                <a:solidFill>
+                  <a:schemeClr val="tx1">
+                    <a:tint val="75000"/>
+                  </a:schemeClr>
+                </a:solidFill>
+              </a:defRPr>
+            </a:lvl5pPr>
+            <a:lvl6pPr marL="2286000" indent="0" algn="ctr">
+              <a:buNone/>
+              <a:defRPr>
+                <a:solidFill>
+                  <a:schemeClr val="tx1">
+                    <a:tint val="75000"/>
+                  </a:schemeClr>
+                </a:solidFill>
+              </a:defRPr>
+            </a:lvl6pPr>
+            <a:lvl7pPr marL="2743200" indent="0" algn="ctr">
+              <a:buNone/>
+              <a:defRPr>
+                <a:solidFill>
+                  <a:schemeClr val="tx1">
+                    <a:tint val="75000"/>
+                  </a:schemeClr>
+                </a:solidFill>
+              </a:defRPr>
+            </a:lvl7pPr>
+            <a:lvl8pPr marL="3200400" indent="0" algn="ctr">
+              <a:buNone/>
+              <a:defRPr>
+                <a:solidFill>
+                  <a:schemeClr val="tx1">
+                    <a:tint val="75000"/>
+                  </a:schemeClr>
+                </a:solidFill>
+              </a:defRPr>
+            </a:lvl8pPr>
+            <a:lvl9pPr marL="3657600" indent="0" algn="ctr">
+              <a:buNone/>
+              <a:defRPr>
+                <a:solidFill>
+                  <a:schemeClr val="tx1">
+                    <a:tint val="75000"/>
+                  </a:schemeClr>
+                </a:solidFill>
+              </a:defRPr>
+            </a:lvl9pPr>
+          </a:lstStyle>
+          <a:p>
+            <a:r>
+              <a:rPr lang="en-US" smtClean="0"/>
+              <a:t>Click to edit Master subtitle style</a:t>
+            </a:r>
+            <a:endParaRPr lang="en-US" dirty="0"/>
+          </a:p>
+        </p:txBody>
+      </p:sp>
+      <p:sp>
+        <p:nvSpPr>
+          <p:cNvPr id="4" name="Date Placeholder 3"/>
+          <p:cNvSpPr>
+            <a:spLocks noGrp="1"/>
+          </p:cNvSpPr>
+          <p:nvPr>
+            <p:ph type="dt" sz="half" idx="10"/>
+          </p:nvPr>
+        </p:nvSpPr>
+        <p:spPr/>
+        <p:txBody>
+          <a:bodyPr/>
+          <a:lstStyle/>
+          <a:p>
+            <a:fld id="{1D8BD707-D9CF-40AE-B4C6-C98DA3205C09}" type="datetimeFigureOut">
+              <a:rPr lang="en-US" smtClean="0"/>
+              <a:pPr/>
+              <a:t>7/30/2025</a:t>
+            </a:fld>
+            <a:endParaRPr lang="en-US"/>
+          </a:p>
+        </p:txBody>
+      </p:sp>
+      <p:sp>
+        <p:nvSpPr>
+          <p:cNvPr id="5" name="Footer Placeholder 4"/>
+          <p:cNvSpPr>
+            <a:spLocks noGrp="1"/>
+          </p:cNvSpPr>
+          <p:nvPr>
+            <p:ph type="ftr" sz="quarter" idx="11"/>
+          </p:nvPr>
+        </p:nvSpPr>
+        <p:spPr/>
+        <p:txBody>
+          <a:bodyPr/>
+          <a:lstStyle/>
+          <a:p>
+            <a:endParaRPr lang="en-US"/>
+          </a:p>
+        </p:txBody>
+      </p:sp>
+      <p:sp>
+        <p:nvSpPr>
+          <p:cNvPr id="6" name="Slide Number Placeholder 5"/>
+          <p:cNvSpPr>
+            <a:spLocks noGrp="1"/>
+          </p:cNvSpPr>
+          <p:nvPr>
+            <p:ph type="sldNum" sz="quarter" idx="12"/>
+          </p:nvPr>
+        </p:nvSpPr>
+        <p:spPr/>
+        <p:txBody>
+          <a:bodyPr/>
+          <a:lstStyle/>
+          <a:p>
+            <a:fld id="{B6F15528-21DE-4FAA-801E-634DDDAF4B2B}" type="slidenum">
+              <a:rPr lang="en-US" smtClean="0"/>
+              <a:pPr/>
+              <a:t>‹#›</a:t>
+            </a:fld>
+            <a:endParaRPr lang="en-US"/>
+          </a:p>
+        </p:txBody>
+      </p:sp>
+    </p:spTree>
+    <p:extLst>
+      <p:ext uri="{BB962C8B-B14F-4D97-AF65-F5344CB8AC3E}">
+        <p14:creationId xmlns:p14="http://schemas.microsoft.com/office/powerpoint/2010/main" val="1793877613"/>
+      </p:ext>
+    </p:extLst>
+  </p:cSld>
+  <p:clrMapOvr>
+    <a:masterClrMapping/>
+  </p:clrMapOvr>
+</p:sldLayout>
+</file>
+
+<file path=ppt/slideLayouts/slideLayout13.xml><?xml version="1.0" encoding="utf-8"?>
+<p:sldLayout xmlns:a="http://schemas.openxmlformats.org/drawingml/2006/main" xmlns:r="http://schemas.openxmlformats.org/officeDocument/2006/relationships" xmlns:p="http://schemas.openxmlformats.org/presentationml/2006/main" type="obj" preserve="1">
+  <p:cSld name="Title and Content">
+    <p:spTree>
+      <p:nvGrpSpPr>
+        <p:cNvPr id="1" name=""/>
+        <p:cNvGrpSpPr/>
+        <p:nvPr/>
+      </p:nvGrpSpPr>
+      <p:grpSpPr>
+        <a:xfrm>
+          <a:off x="0" y="0"/>
+          <a:ext cx="0" cy="0"/>
+          <a:chOff x="0" y="0"/>
+          <a:chExt cx="0" cy="0"/>
+        </a:xfrm>
+      </p:grpSpPr>
+      <p:sp>
+        <p:nvSpPr>
+          <p:cNvPr id="2" name="Title 1"/>
+          <p:cNvSpPr>
+            <a:spLocks noGrp="1"/>
+          </p:cNvSpPr>
+          <p:nvPr>
+            <p:ph type="title"/>
+          </p:nvPr>
+        </p:nvSpPr>
+        <p:spPr/>
+        <p:txBody>
+          <a:bodyPr/>
+          <a:lstStyle/>
+          <a:p>
+            <a:r>
+              <a:rPr lang="en-US" smtClean="0"/>
+              <a:t>Click to edit Master title style</a:t>
+            </a:r>
+            <a:endParaRPr lang="en-US" dirty="0"/>
+          </a:p>
+        </p:txBody>
+      </p:sp>
+      <p:sp>
+        <p:nvSpPr>
+          <p:cNvPr id="3" name="Content Placeholder 2"/>
+          <p:cNvSpPr>
+            <a:spLocks noGrp="1"/>
+          </p:cNvSpPr>
+          <p:nvPr>
+            <p:ph idx="1"/>
+          </p:nvPr>
+        </p:nvSpPr>
+        <p:spPr/>
+        <p:txBody>
+          <a:bodyPr/>
+          <a:lstStyle/>
+          <a:p>
+            <a:pPr lvl="0"/>
+            <a:r>
+              <a:rPr lang="en-US" smtClean="0"/>
+              <a:t>Click to edit Master text styles</a:t>
+            </a:r>
+          </a:p>
+          <a:p>
+            <a:pPr lvl="1"/>
+            <a:r>
+              <a:rPr lang="en-US" smtClean="0"/>
+              <a:t>Second level</a:t>
+            </a:r>
+          </a:p>
+          <a:p>
+            <a:pPr lvl="2"/>
+            <a:r>
+              <a:rPr lang="en-US" smtClean="0"/>
+              <a:t>Third level</a:t>
+            </a:r>
+          </a:p>
+          <a:p>
+            <a:pPr lvl="3"/>
+            <a:r>
+              <a:rPr lang="en-US" smtClean="0"/>
+              <a:t>Fourth level</a:t>
+            </a:r>
+          </a:p>
+          <a:p>
+            <a:pPr lvl="4"/>
+            <a:r>
+              <a:rPr lang="en-US" smtClean="0"/>
+              <a:t>Fifth level</a:t>
+            </a:r>
+            <a:endParaRPr lang="en-US" dirty="0"/>
+          </a:p>
+        </p:txBody>
+      </p:sp>
+      <p:sp>
+        <p:nvSpPr>
+          <p:cNvPr id="7" name="Date Placeholder 3"/>
+          <p:cNvSpPr>
+            <a:spLocks noGrp="1"/>
+          </p:cNvSpPr>
+          <p:nvPr>
+            <p:ph type="dt" sz="half" idx="10"/>
+          </p:nvPr>
+        </p:nvSpPr>
+        <p:spPr/>
+        <p:txBody>
+          <a:bodyPr/>
+          <a:lstStyle/>
+          <a:p>
+            <a:fld id="{1D8BD707-D9CF-40AE-B4C6-C98DA3205C09}" type="datetimeFigureOut">
+              <a:rPr lang="en-US" smtClean="0"/>
+              <a:pPr/>
+              <a:t>7/30/2025</a:t>
+            </a:fld>
+            <a:endParaRPr lang="en-US"/>
+          </a:p>
+        </p:txBody>
+      </p:sp>
+      <p:sp>
+        <p:nvSpPr>
+          <p:cNvPr id="5" name="Footer Placeholder 4"/>
+          <p:cNvSpPr>
+            <a:spLocks noGrp="1"/>
+          </p:cNvSpPr>
+          <p:nvPr>
+            <p:ph type="ftr" sz="quarter" idx="11"/>
+          </p:nvPr>
+        </p:nvSpPr>
+        <p:spPr/>
+        <p:txBody>
+          <a:bodyPr/>
+          <a:lstStyle/>
+          <a:p>
+            <a:endParaRPr lang="en-US"/>
+          </a:p>
+        </p:txBody>
+      </p:sp>
+      <p:sp>
+        <p:nvSpPr>
+          <p:cNvPr id="6" name="Slide Number Placeholder 5"/>
+          <p:cNvSpPr>
+            <a:spLocks noGrp="1"/>
+          </p:cNvSpPr>
+          <p:nvPr>
+            <p:ph type="sldNum" sz="quarter" idx="12"/>
+          </p:nvPr>
+        </p:nvSpPr>
+        <p:spPr/>
+        <p:txBody>
+          <a:bodyPr/>
+          <a:lstStyle/>
+          <a:p>
+            <a:fld id="{B6F15528-21DE-4FAA-801E-634DDDAF4B2B}" type="slidenum">
+              <a:rPr lang="en-US" smtClean="0"/>
+              <a:pPr/>
+              <a:t>‹#›</a:t>
+            </a:fld>
+            <a:endParaRPr lang="en-US"/>
+          </a:p>
+        </p:txBody>
+      </p:sp>
+    </p:spTree>
+    <p:extLst>
+      <p:ext uri="{BB962C8B-B14F-4D97-AF65-F5344CB8AC3E}">
+        <p14:creationId xmlns:p14="http://schemas.microsoft.com/office/powerpoint/2010/main" val="1222496709"/>
+      </p:ext>
+    </p:extLst>
+  </p:cSld>
+  <p:clrMapOvr>
+    <a:masterClrMapping/>
+  </p:clrMapOvr>
+</p:sldLayout>
+</file>
+
+<file path=ppt/slideLayouts/slideLayout14.xml><?xml version="1.0" encoding="utf-8"?>
+<p:sldLayout xmlns:a="http://schemas.openxmlformats.org/drawingml/2006/main" xmlns:r="http://schemas.openxmlformats.org/officeDocument/2006/relationships" xmlns:p="http://schemas.openxmlformats.org/presentationml/2006/main" type="secHead" preserve="1">
+  <p:cSld name="Section Header">
+    <p:spTree>
+      <p:nvGrpSpPr>
+        <p:cNvPr id="1" name=""/>
+        <p:cNvGrpSpPr/>
+        <p:nvPr/>
+      </p:nvGrpSpPr>
+      <p:grpSpPr>
+        <a:xfrm>
+          <a:off x="0" y="0"/>
+          <a:ext cx="0" cy="0"/>
+          <a:chOff x="0" y="0"/>
+          <a:chExt cx="0" cy="0"/>
+        </a:xfrm>
+      </p:grpSpPr>
+      <p:sp>
+        <p:nvSpPr>
+          <p:cNvPr id="2" name="Title 1"/>
+          <p:cNvSpPr>
+            <a:spLocks noGrp="1"/>
+          </p:cNvSpPr>
+          <p:nvPr>
+            <p:ph type="title"/>
+          </p:nvPr>
+        </p:nvSpPr>
+        <p:spPr>
+          <a:xfrm>
+            <a:off x="866443" y="2861734"/>
+            <a:ext cx="6620967" cy="1915647"/>
+          </a:xfrm>
+        </p:spPr>
+        <p:txBody>
+          <a:bodyPr anchor="b"/>
+          <a:lstStyle>
+            <a:lvl1pPr algn="l">
+              <a:defRPr sz="4000" b="0" cap="none"/>
+            </a:lvl1pPr>
+          </a:lstStyle>
+          <a:p>
+            <a:r>
+              <a:rPr lang="en-US" smtClean="0"/>
+              <a:t>Click to edit Master title style</a:t>
+            </a:r>
+            <a:endParaRPr lang="en-US" dirty="0"/>
+          </a:p>
+        </p:txBody>
+      </p:sp>
+      <p:sp>
+        <p:nvSpPr>
+          <p:cNvPr id="3" name="Text Placeholder 2"/>
+          <p:cNvSpPr>
+            <a:spLocks noGrp="1"/>
+          </p:cNvSpPr>
+          <p:nvPr>
+            <p:ph type="body" idx="1"/>
+          </p:nvPr>
+        </p:nvSpPr>
+        <p:spPr>
+          <a:xfrm>
+            <a:off x="866442" y="4777381"/>
+            <a:ext cx="6620968" cy="860400"/>
+          </a:xfrm>
+        </p:spPr>
+        <p:txBody>
+          <a:bodyPr anchor="t"/>
+          <a:lstStyle>
+            <a:lvl1pPr marL="0" indent="0" algn="l">
+              <a:buNone/>
+              <a:defRPr sz="2000" cap="all">
+                <a:solidFill>
+                  <a:schemeClr val="bg2">
+                    <a:lumMod val="40000"/>
+                    <a:lumOff val="60000"/>
+                  </a:schemeClr>
+                </a:solidFill>
+              </a:defRPr>
+            </a:lvl1pPr>
+            <a:lvl2pPr marL="457200" indent="0">
+              <a:buNone/>
+              <a:defRPr sz="1800">
+                <a:solidFill>
+                  <a:schemeClr val="tx1">
+                    <a:tint val="75000"/>
+                  </a:schemeClr>
+                </a:solidFill>
+              </a:defRPr>
+            </a:lvl2pPr>
+            <a:lvl3pPr marL="914400" indent="0">
+              <a:buNone/>
+              <a:defRPr sz="1600">
+                <a:solidFill>
+                  <a:schemeClr val="tx1">
+                    <a:tint val="75000"/>
+                  </a:schemeClr>
+                </a:solidFill>
+              </a:defRPr>
+            </a:lvl3pPr>
+            <a:lvl4pPr marL="1371600" indent="0">
+              <a:buNone/>
+              <a:defRPr sz="1400">
+                <a:solidFill>
+                  <a:schemeClr val="tx1">
+                    <a:tint val="75000"/>
+                  </a:schemeClr>
+                </a:solidFill>
+              </a:defRPr>
+            </a:lvl4pPr>
+            <a:lvl5pPr marL="1828800" indent="0">
+              <a:buNone/>
+              <a:defRPr sz="1400">
+                <a:solidFill>
+                  <a:schemeClr val="tx1">
+                    <a:tint val="75000"/>
+                  </a:schemeClr>
+                </a:solidFill>
+              </a:defRPr>
+            </a:lvl5pPr>
+            <a:lvl6pPr marL="2286000" indent="0">
+              <a:buNone/>
+              <a:defRPr sz="1400">
+                <a:solidFill>
+                  <a:schemeClr val="tx1">
+                    <a:tint val="75000"/>
+                  </a:schemeClr>
+                </a:solidFill>
+              </a:defRPr>
+            </a:lvl6pPr>
+            <a:lvl7pPr marL="2743200" indent="0">
+              <a:buNone/>
+              <a:defRPr sz="1400">
+                <a:solidFill>
+                  <a:schemeClr val="tx1">
+                    <a:tint val="75000"/>
+                  </a:schemeClr>
+                </a:solidFill>
+              </a:defRPr>
+            </a:lvl7pPr>
+            <a:lvl8pPr marL="3200400" indent="0">
+              <a:buNone/>
+              <a:defRPr sz="1400">
+                <a:solidFill>
+                  <a:schemeClr val="tx1">
+                    <a:tint val="75000"/>
+                  </a:schemeClr>
+                </a:solidFill>
+              </a:defRPr>
+            </a:lvl8pPr>
+            <a:lvl9pPr marL="3657600" indent="0">
+              <a:buNone/>
+              <a:defRPr sz="1400">
+                <a:solidFill>
+                  <a:schemeClr val="tx1">
+                    <a:tint val="75000"/>
+                  </a:schemeClr>
+                </a:solidFill>
+              </a:defRPr>
+            </a:lvl9pPr>
+          </a:lstStyle>
+          <a:p>
+            <a:pPr lvl="0"/>
+            <a:r>
+              <a:rPr lang="en-US" smtClean="0"/>
+              <a:t>Click to edit Master text styles</a:t>
+            </a:r>
+          </a:p>
+        </p:txBody>
+      </p:sp>
+      <p:sp>
+        <p:nvSpPr>
+          <p:cNvPr id="4" name="Date Placeholder 3"/>
+          <p:cNvSpPr>
+            <a:spLocks noGrp="1"/>
+          </p:cNvSpPr>
+          <p:nvPr>
+            <p:ph type="dt" sz="half" idx="10"/>
+          </p:nvPr>
+        </p:nvSpPr>
+        <p:spPr/>
+        <p:txBody>
+          <a:bodyPr/>
+          <a:lstStyle/>
+          <a:p>
+            <a:fld id="{1D8BD707-D9CF-40AE-B4C6-C98DA3205C09}" type="datetimeFigureOut">
+              <a:rPr lang="en-US" smtClean="0"/>
+              <a:pPr/>
+              <a:t>7/30/2025</a:t>
+            </a:fld>
+            <a:endParaRPr lang="en-US"/>
+          </a:p>
+        </p:txBody>
+      </p:sp>
+      <p:sp>
+        <p:nvSpPr>
+          <p:cNvPr id="5" name="Footer Placeholder 4"/>
+          <p:cNvSpPr>
+            <a:spLocks noGrp="1"/>
+          </p:cNvSpPr>
+          <p:nvPr>
+            <p:ph type="ftr" sz="quarter" idx="11"/>
+          </p:nvPr>
+        </p:nvSpPr>
+        <p:spPr/>
+        <p:txBody>
+          <a:bodyPr/>
+          <a:lstStyle/>
+          <a:p>
+            <a:endParaRPr lang="en-US"/>
+          </a:p>
+        </p:txBody>
+      </p:sp>
+      <p:sp>
+        <p:nvSpPr>
+          <p:cNvPr id="6" name="Slide Number Placeholder 5"/>
+          <p:cNvSpPr>
+            <a:spLocks noGrp="1"/>
+          </p:cNvSpPr>
+          <p:nvPr>
+            <p:ph type="sldNum" sz="quarter" idx="12"/>
+          </p:nvPr>
+        </p:nvSpPr>
+        <p:spPr/>
+        <p:txBody>
+          <a:bodyPr/>
+          <a:lstStyle/>
+          <a:p>
+            <a:fld id="{B6F15528-21DE-4FAA-801E-634DDDAF4B2B}" type="slidenum">
+              <a:rPr lang="en-US" smtClean="0"/>
+              <a:pPr/>
+              <a:t>‹#›</a:t>
+            </a:fld>
+            <a:endParaRPr lang="en-US"/>
+          </a:p>
+        </p:txBody>
+      </p:sp>
+    </p:spTree>
+    <p:extLst>
+      <p:ext uri="{BB962C8B-B14F-4D97-AF65-F5344CB8AC3E}">
+        <p14:creationId xmlns:p14="http://schemas.microsoft.com/office/powerpoint/2010/main" val="2120150768"/>
+      </p:ext>
+    </p:extLst>
+  </p:cSld>
+  <p:clrMapOvr>
+    <a:masterClrMapping/>
+  </p:clrMapOvr>
+</p:sldLayout>
+</file>
+
+<file path=ppt/slideLayouts/slideLayout15.xml><?xml version="1.0" encoding="utf-8"?>
+<p:sldLayout xmlns:a="http://schemas.openxmlformats.org/drawingml/2006/main" xmlns:r="http://schemas.openxmlformats.org/officeDocument/2006/relationships" xmlns:p="http://schemas.openxmlformats.org/presentationml/2006/main" type="twoObj" preserve="1">
+  <p:cSld name="Two Content">
+    <p:spTree>
+      <p:nvGrpSpPr>
+        <p:cNvPr id="1" name=""/>
+        <p:cNvGrpSpPr/>
+        <p:nvPr/>
+      </p:nvGrpSpPr>
+      <p:grpSpPr>
+        <a:xfrm>
+          <a:off x="0" y="0"/>
+          <a:ext cx="0" cy="0"/>
+          <a:chOff x="0" y="0"/>
+          <a:chExt cx="0" cy="0"/>
+        </a:xfrm>
+      </p:grpSpPr>
+      <p:sp>
+        <p:nvSpPr>
+          <p:cNvPr id="2" name="Title 1"/>
+          <p:cNvSpPr>
+            <a:spLocks noGrp="1"/>
+          </p:cNvSpPr>
+          <p:nvPr>
+            <p:ph type="title"/>
+          </p:nvPr>
+        </p:nvSpPr>
+        <p:spPr/>
+        <p:txBody>
+          <a:bodyPr/>
+          <a:lstStyle/>
+          <a:p>
+            <a:r>
+              <a:rPr lang="en-US" smtClean="0"/>
+              <a:t>Click to edit Master title style</a:t>
+            </a:r>
+            <a:endParaRPr lang="en-US" dirty="0"/>
+          </a:p>
+        </p:txBody>
+      </p:sp>
+      <p:sp>
+        <p:nvSpPr>
+          <p:cNvPr id="3" name="Content Placeholder 2"/>
+          <p:cNvSpPr>
+            <a:spLocks noGrp="1"/>
+          </p:cNvSpPr>
+          <p:nvPr>
+            <p:ph sz="half" idx="1"/>
+          </p:nvPr>
+        </p:nvSpPr>
+        <p:spPr>
+          <a:xfrm>
+            <a:off x="827700" y="2060576"/>
+            <a:ext cx="3298113" cy="4195763"/>
+          </a:xfrm>
+        </p:spPr>
+        <p:txBody>
+          <a:bodyPr>
+            <a:normAutofit/>
+          </a:bodyPr>
+          <a:lstStyle>
+            <a:lvl1pPr>
+              <a:defRPr sz="1800"/>
+            </a:lvl1pPr>
+            <a:lvl2pPr>
+              <a:defRPr sz="1600"/>
+            </a:lvl2pPr>
+            <a:lvl3pPr>
+              <a:defRPr sz="1400"/>
+            </a:lvl3pPr>
+            <a:lvl4pPr>
+              <a:defRPr sz="1200"/>
+            </a:lvl4pPr>
+            <a:lvl5pPr>
+              <a:defRPr sz="1200"/>
+            </a:lvl5pPr>
+            <a:lvl6pPr>
+              <a:defRPr sz="1200"/>
+            </a:lvl6pPr>
+            <a:lvl7pPr>
+              <a:defRPr sz="1200"/>
+            </a:lvl7pPr>
+            <a:lvl8pPr>
+              <a:defRPr sz="1200"/>
+            </a:lvl8pPr>
+            <a:lvl9pPr>
+              <a:defRPr sz="1200"/>
+            </a:lvl9pPr>
+          </a:lstStyle>
+          <a:p>
+            <a:pPr lvl="0"/>
+            <a:r>
+              <a:rPr lang="en-US" smtClean="0"/>
+              <a:t>Click to edit Master text styles</a:t>
+            </a:r>
+          </a:p>
+          <a:p>
+            <a:pPr lvl="1"/>
+            <a:r>
+              <a:rPr lang="en-US" smtClean="0"/>
+              <a:t>Second level</a:t>
+            </a:r>
+          </a:p>
+          <a:p>
+            <a:pPr lvl="2"/>
+            <a:r>
+              <a:rPr lang="en-US" smtClean="0"/>
+              <a:t>Third level</a:t>
+            </a:r>
+          </a:p>
+          <a:p>
+            <a:pPr lvl="3"/>
+            <a:r>
+              <a:rPr lang="en-US" smtClean="0"/>
+              <a:t>Fourth level</a:t>
+            </a:r>
+          </a:p>
+          <a:p>
+            <a:pPr lvl="4"/>
+            <a:r>
+              <a:rPr lang="en-US" smtClean="0"/>
+              <a:t>Fifth level</a:t>
+            </a:r>
+            <a:endParaRPr lang="en-US" dirty="0"/>
+          </a:p>
+        </p:txBody>
+      </p:sp>
+      <p:sp>
+        <p:nvSpPr>
+          <p:cNvPr id="4" name="Content Placeholder 3"/>
+          <p:cNvSpPr>
+            <a:spLocks noGrp="1"/>
+          </p:cNvSpPr>
+          <p:nvPr>
+            <p:ph sz="half" idx="2"/>
+          </p:nvPr>
+        </p:nvSpPr>
+        <p:spPr>
+          <a:xfrm>
+            <a:off x="4241975" y="2056093"/>
+            <a:ext cx="3298115" cy="4200245"/>
+          </a:xfrm>
+        </p:spPr>
+        <p:txBody>
+          <a:bodyPr>
+            <a:normAutofit/>
+          </a:bodyPr>
+          <a:lstStyle>
+            <a:lvl1pPr>
+              <a:defRPr sz="1800"/>
+            </a:lvl1pPr>
+            <a:lvl2pPr>
+              <a:defRPr sz="1600"/>
+            </a:lvl2pPr>
+            <a:lvl3pPr>
+              <a:defRPr sz="1400"/>
+            </a:lvl3pPr>
+            <a:lvl4pPr>
+              <a:defRPr sz="1200"/>
+            </a:lvl4pPr>
+            <a:lvl5pPr>
+              <a:defRPr sz="1200"/>
+            </a:lvl5pPr>
+            <a:lvl6pPr>
+              <a:defRPr sz="1200"/>
+            </a:lvl6pPr>
+            <a:lvl7pPr>
+              <a:defRPr sz="1200"/>
+            </a:lvl7pPr>
+            <a:lvl8pPr>
+              <a:defRPr sz="1200"/>
+            </a:lvl8pPr>
+            <a:lvl9pPr>
+              <a:defRPr sz="1200"/>
+            </a:lvl9pPr>
+          </a:lstStyle>
+          <a:p>
+            <a:pPr lvl="0"/>
+            <a:r>
+              <a:rPr lang="en-US" smtClean="0"/>
+              <a:t>Click to edit Master text styles</a:t>
+            </a:r>
+          </a:p>
+          <a:p>
+            <a:pPr lvl="1"/>
+            <a:r>
+              <a:rPr lang="en-US" smtClean="0"/>
+              <a:t>Second level</a:t>
+            </a:r>
+          </a:p>
+          <a:p>
+            <a:pPr lvl="2"/>
+            <a:r>
+              <a:rPr lang="en-US" smtClean="0"/>
+              <a:t>Third level</a:t>
+            </a:r>
+          </a:p>
+          <a:p>
+            <a:pPr lvl="3"/>
+            <a:r>
+              <a:rPr lang="en-US" smtClean="0"/>
+              <a:t>Fourth level</a:t>
+            </a:r>
+          </a:p>
+          <a:p>
+            <a:pPr lvl="4"/>
+            <a:r>
+              <a:rPr lang="en-US" smtClean="0"/>
+              <a:t>Fifth level</a:t>
+            </a:r>
+            <a:endParaRPr lang="en-US" dirty="0"/>
+          </a:p>
+        </p:txBody>
+      </p:sp>
+      <p:sp>
+        <p:nvSpPr>
+          <p:cNvPr id="5" name="Date Placeholder 4"/>
+          <p:cNvSpPr>
+            <a:spLocks noGrp="1"/>
+          </p:cNvSpPr>
+          <p:nvPr>
+            <p:ph type="dt" sz="half" idx="10"/>
+          </p:nvPr>
+        </p:nvSpPr>
+        <p:spPr/>
+        <p:txBody>
+          <a:bodyPr/>
+          <a:lstStyle/>
+          <a:p>
+            <a:fld id="{1D8BD707-D9CF-40AE-B4C6-C98DA3205C09}" type="datetimeFigureOut">
+              <a:rPr lang="en-US" smtClean="0"/>
+              <a:pPr/>
+              <a:t>7/30/2025</a:t>
+            </a:fld>
+            <a:endParaRPr lang="en-US"/>
+          </a:p>
+        </p:txBody>
+      </p:sp>
+      <p:sp>
+        <p:nvSpPr>
+          <p:cNvPr id="6" name="Footer Placeholder 5"/>
+          <p:cNvSpPr>
+            <a:spLocks noGrp="1"/>
+          </p:cNvSpPr>
+          <p:nvPr>
+            <p:ph type="ftr" sz="quarter" idx="11"/>
+          </p:nvPr>
+        </p:nvSpPr>
+        <p:spPr/>
+        <p:txBody>
+          <a:bodyPr/>
+          <a:lstStyle/>
+          <a:p>
+            <a:endParaRPr lang="en-US"/>
+          </a:p>
+        </p:txBody>
+      </p:sp>
+      <p:sp>
+        <p:nvSpPr>
+          <p:cNvPr id="7" name="Slide Number Placeholder 6"/>
+          <p:cNvSpPr>
+            <a:spLocks noGrp="1"/>
+          </p:cNvSpPr>
+          <p:nvPr>
+            <p:ph type="sldNum" sz="quarter" idx="12"/>
+          </p:nvPr>
+        </p:nvSpPr>
+        <p:spPr/>
+        <p:txBody>
+          <a:bodyPr/>
+          <a:lstStyle/>
+          <a:p>
+            <a:fld id="{B6F15528-21DE-4FAA-801E-634DDDAF4B2B}" type="slidenum">
+              <a:rPr lang="en-US" smtClean="0"/>
+              <a:pPr/>
+              <a:t>‹#›</a:t>
+            </a:fld>
+            <a:endParaRPr lang="en-US"/>
+          </a:p>
+        </p:txBody>
+      </p:sp>
+    </p:spTree>
+    <p:extLst>
+      <p:ext uri="{BB962C8B-B14F-4D97-AF65-F5344CB8AC3E}">
+        <p14:creationId xmlns:p14="http://schemas.microsoft.com/office/powerpoint/2010/main" val="3512479233"/>
+      </p:ext>
+    </p:extLst>
+  </p:cSld>
+  <p:clrMapOvr>
+    <a:masterClrMapping/>
+  </p:clrMapOvr>
+</p:sldLayout>
+</file>
+
+<file path=ppt/slideLayouts/slideLayout16.xml><?xml version="1.0" encoding="utf-8"?>
+<p:sldLayout xmlns:a="http://schemas.openxmlformats.org/drawingml/2006/main" xmlns:r="http://schemas.openxmlformats.org/officeDocument/2006/relationships" xmlns:p="http://schemas.openxmlformats.org/presentationml/2006/main" type="twoTxTwoObj" preserve="1">
+  <p:cSld name="Comparison">
+    <p:spTree>
+      <p:nvGrpSpPr>
+        <p:cNvPr id="1" name=""/>
+        <p:cNvGrpSpPr/>
+        <p:nvPr/>
+      </p:nvGrpSpPr>
+      <p:grpSpPr>
+        <a:xfrm>
+          <a:off x="0" y="0"/>
+          <a:ext cx="0" cy="0"/>
+          <a:chOff x="0" y="0"/>
+          <a:chExt cx="0" cy="0"/>
+        </a:xfrm>
+      </p:grpSpPr>
+      <p:sp>
+        <p:nvSpPr>
+          <p:cNvPr id="2" name="Title 1"/>
+          <p:cNvSpPr>
+            <a:spLocks noGrp="1"/>
+          </p:cNvSpPr>
+          <p:nvPr>
+            <p:ph type="title"/>
+          </p:nvPr>
+        </p:nvSpPr>
+        <p:spPr/>
+        <p:txBody>
+          <a:bodyPr/>
+          <a:lstStyle>
+            <a:lvl1pPr>
+              <a:defRPr/>
+            </a:lvl1pPr>
+          </a:lstStyle>
+          <a:p>
+            <a:r>
+              <a:rPr lang="en-US" smtClean="0"/>
+              <a:t>Click to edit Master title style</a:t>
+            </a:r>
+            <a:endParaRPr lang="en-US" dirty="0"/>
+          </a:p>
+        </p:txBody>
+      </p:sp>
+      <p:sp>
+        <p:nvSpPr>
+          <p:cNvPr id="3" name="Text Placeholder 2"/>
+          <p:cNvSpPr>
+            <a:spLocks noGrp="1"/>
+          </p:cNvSpPr>
+          <p:nvPr>
+            <p:ph type="body" idx="1"/>
+          </p:nvPr>
+        </p:nvSpPr>
+        <p:spPr>
+          <a:xfrm>
+            <a:off x="827700" y="1905000"/>
+            <a:ext cx="3298112" cy="576262"/>
+          </a:xfrm>
+        </p:spPr>
+        <p:txBody>
+          <a:bodyPr anchor="b">
+            <a:noAutofit/>
+          </a:bodyPr>
+          <a:lstStyle>
+            <a:lvl1pPr marL="0" indent="0">
+              <a:buNone/>
+              <a:defRPr sz="2400" b="0">
+                <a:solidFill>
+                  <a:schemeClr val="bg2">
+                    <a:lumMod val="40000"/>
+                    <a:lumOff val="60000"/>
+                  </a:schemeClr>
+                </a:solidFill>
+              </a:defRPr>
+            </a:lvl1pPr>
+            <a:lvl2pPr marL="457200" indent="0">
+              <a:buNone/>
+              <a:defRPr sz="2000" b="1"/>
+            </a:lvl2pPr>
+            <a:lvl3pPr marL="914400" indent="0">
+              <a:buNone/>
+              <a:defRPr sz="1800" b="1"/>
+            </a:lvl3pPr>
+            <a:lvl4pPr marL="1371600" indent="0">
+              <a:buNone/>
+              <a:defRPr sz="1600" b="1"/>
+            </a:lvl4pPr>
+            <a:lvl5pPr marL="1828800" indent="0">
+              <a:buNone/>
+              <a:defRPr sz="1600" b="1"/>
+            </a:lvl5pPr>
+            <a:lvl6pPr marL="2286000" indent="0">
+              <a:buNone/>
+              <a:defRPr sz="1600" b="1"/>
+            </a:lvl6pPr>
+            <a:lvl7pPr marL="2743200" indent="0">
+              <a:buNone/>
+              <a:defRPr sz="1600" b="1"/>
+            </a:lvl7pPr>
+            <a:lvl8pPr marL="3200400" indent="0">
+              <a:buNone/>
+              <a:defRPr sz="1600" b="1"/>
+            </a:lvl8pPr>
+            <a:lvl9pPr marL="3657600" indent="0">
+              <a:buNone/>
+              <a:defRPr sz="1600" b="1"/>
+            </a:lvl9pPr>
+          </a:lstStyle>
+          <a:p>
+            <a:pPr lvl="0"/>
+            <a:r>
+              <a:rPr lang="en-US" smtClean="0"/>
+              <a:t>Click to edit Master text styles</a:t>
+            </a:r>
+          </a:p>
+        </p:txBody>
+      </p:sp>
+      <p:sp>
+        <p:nvSpPr>
+          <p:cNvPr id="4" name="Content Placeholder 3"/>
+          <p:cNvSpPr>
+            <a:spLocks noGrp="1"/>
+          </p:cNvSpPr>
+          <p:nvPr>
+            <p:ph sz="half" idx="2"/>
+          </p:nvPr>
+        </p:nvSpPr>
+        <p:spPr>
+          <a:xfrm>
+            <a:off x="827700" y="2514600"/>
+            <a:ext cx="3298113" cy="3741738"/>
+          </a:xfrm>
+        </p:spPr>
+        <p:txBody>
+          <a:bodyPr>
+            <a:normAutofit/>
+          </a:bodyPr>
+          <a:lstStyle>
+            <a:lvl1pPr>
+              <a:defRPr sz="1800"/>
+            </a:lvl1pPr>
+            <a:lvl2pPr>
+              <a:defRPr sz="1600"/>
+            </a:lvl2pPr>
+            <a:lvl3pPr>
+              <a:defRPr sz="1400"/>
+            </a:lvl3pPr>
+            <a:lvl4pPr>
+              <a:defRPr sz="1200"/>
+            </a:lvl4pPr>
+            <a:lvl5pPr>
+              <a:defRPr sz="1200"/>
+            </a:lvl5pPr>
+            <a:lvl6pPr>
+              <a:defRPr sz="1200"/>
+            </a:lvl6pPr>
+            <a:lvl7pPr>
+              <a:defRPr sz="1200"/>
+            </a:lvl7pPr>
+            <a:lvl8pPr>
+              <a:defRPr sz="1200"/>
+            </a:lvl8pPr>
+            <a:lvl9pPr>
+              <a:defRPr sz="1200"/>
+            </a:lvl9pPr>
+          </a:lstStyle>
+          <a:p>
+            <a:pPr lvl="0"/>
+            <a:r>
+              <a:rPr lang="en-US" smtClean="0"/>
+              <a:t>Click to edit Master text styles</a:t>
+            </a:r>
+          </a:p>
+          <a:p>
+            <a:pPr lvl="1"/>
+            <a:r>
+              <a:rPr lang="en-US" smtClean="0"/>
+              <a:t>Second level</a:t>
+            </a:r>
+          </a:p>
+          <a:p>
+            <a:pPr lvl="2"/>
+            <a:r>
+              <a:rPr lang="en-US" smtClean="0"/>
+              <a:t>Third level</a:t>
+            </a:r>
+          </a:p>
+          <a:p>
+            <a:pPr lvl="3"/>
+            <a:r>
+              <a:rPr lang="en-US" smtClean="0"/>
+              <a:t>Fourth level</a:t>
+            </a:r>
+          </a:p>
+          <a:p>
+            <a:pPr lvl="4"/>
+            <a:r>
+              <a:rPr lang="en-US" smtClean="0"/>
+              <a:t>Fifth level</a:t>
+            </a:r>
+            <a:endParaRPr lang="en-US" dirty="0"/>
+          </a:p>
+        </p:txBody>
+      </p:sp>
+      <p:sp>
+        <p:nvSpPr>
+          <p:cNvPr id="5" name="Text Placeholder 4"/>
+          <p:cNvSpPr>
+            <a:spLocks noGrp="1"/>
+          </p:cNvSpPr>
+          <p:nvPr>
+            <p:ph type="body" sz="quarter" idx="3"/>
+          </p:nvPr>
+        </p:nvSpPr>
+        <p:spPr>
+          <a:xfrm>
+            <a:off x="4241976" y="1905000"/>
+            <a:ext cx="3298113" cy="576262"/>
+          </a:xfrm>
+        </p:spPr>
+        <p:txBody>
+          <a:bodyPr anchor="b">
+            <a:noAutofit/>
+          </a:bodyPr>
+          <a:lstStyle>
+            <a:lvl1pPr marL="0" indent="0">
+              <a:buNone/>
+              <a:defRPr sz="2400" b="0">
+                <a:solidFill>
+                  <a:schemeClr val="bg2">
+                    <a:lumMod val="40000"/>
+                    <a:lumOff val="60000"/>
+                  </a:schemeClr>
+                </a:solidFill>
+              </a:defRPr>
+            </a:lvl1pPr>
+            <a:lvl2pPr marL="457200" indent="0">
+              <a:buNone/>
+              <a:defRPr sz="2000" b="1"/>
+            </a:lvl2pPr>
+            <a:lvl3pPr marL="914400" indent="0">
+              <a:buNone/>
+              <a:defRPr sz="1800" b="1"/>
+            </a:lvl3pPr>
+            <a:lvl4pPr marL="1371600" indent="0">
+              <a:buNone/>
+              <a:defRPr sz="1600" b="1"/>
+            </a:lvl4pPr>
+            <a:lvl5pPr marL="1828800" indent="0">
+              <a:buNone/>
+              <a:defRPr sz="1600" b="1"/>
+            </a:lvl5pPr>
+            <a:lvl6pPr marL="2286000" indent="0">
+              <a:buNone/>
+              <a:defRPr sz="1600" b="1"/>
+            </a:lvl6pPr>
+            <a:lvl7pPr marL="2743200" indent="0">
+              <a:buNone/>
+              <a:defRPr sz="1600" b="1"/>
+            </a:lvl7pPr>
+            <a:lvl8pPr marL="3200400" indent="0">
+              <a:buNone/>
+              <a:defRPr sz="1600" b="1"/>
+            </a:lvl8pPr>
+            <a:lvl9pPr marL="3657600" indent="0">
+              <a:buNone/>
+              <a:defRPr sz="1600" b="1"/>
+            </a:lvl9pPr>
+          </a:lstStyle>
+          <a:p>
+            <a:pPr lvl="0"/>
+            <a:r>
+              <a:rPr lang="en-US" smtClean="0"/>
+              <a:t>Click to edit Master text styles</a:t>
+            </a:r>
+          </a:p>
+        </p:txBody>
+      </p:sp>
+      <p:sp>
+        <p:nvSpPr>
+          <p:cNvPr id="6" name="Content Placeholder 5"/>
+          <p:cNvSpPr>
+            <a:spLocks noGrp="1"/>
+          </p:cNvSpPr>
+          <p:nvPr>
+            <p:ph sz="quarter" idx="4"/>
+          </p:nvPr>
+        </p:nvSpPr>
+        <p:spPr>
+          <a:xfrm>
+            <a:off x="4241976" y="2514600"/>
+            <a:ext cx="3298113" cy="3741738"/>
+          </a:xfrm>
+        </p:spPr>
+        <p:txBody>
+          <a:bodyPr>
+            <a:normAutofit/>
+          </a:bodyPr>
+          <a:lstStyle>
+            <a:lvl1pPr>
+              <a:defRPr sz="1800"/>
+            </a:lvl1pPr>
+            <a:lvl2pPr>
+              <a:defRPr sz="1600"/>
+            </a:lvl2pPr>
+            <a:lvl3pPr>
+              <a:defRPr sz="1400"/>
+            </a:lvl3pPr>
+            <a:lvl4pPr>
+              <a:defRPr sz="1200"/>
+            </a:lvl4pPr>
+            <a:lvl5pPr>
+              <a:defRPr sz="1200"/>
+            </a:lvl5pPr>
+            <a:lvl6pPr>
+              <a:defRPr sz="1200"/>
+            </a:lvl6pPr>
+            <a:lvl7pPr>
+              <a:defRPr sz="1200"/>
+            </a:lvl7pPr>
+            <a:lvl8pPr>
+              <a:defRPr sz="1200"/>
+            </a:lvl8pPr>
+            <a:lvl9pPr>
+              <a:defRPr sz="1200"/>
+            </a:lvl9pPr>
+          </a:lstStyle>
+          <a:p>
+            <a:pPr lvl="0"/>
+            <a:r>
+              <a:rPr lang="en-US" smtClean="0"/>
+              <a:t>Click to edit Master text styles</a:t>
+            </a:r>
+          </a:p>
+          <a:p>
+            <a:pPr lvl="1"/>
+            <a:r>
+              <a:rPr lang="en-US" smtClean="0"/>
+              <a:t>Second level</a:t>
+            </a:r>
+          </a:p>
+          <a:p>
+            <a:pPr lvl="2"/>
+            <a:r>
+              <a:rPr lang="en-US" smtClean="0"/>
+              <a:t>Third level</a:t>
+            </a:r>
+          </a:p>
+          <a:p>
+            <a:pPr lvl="3"/>
+            <a:r>
+              <a:rPr lang="en-US" smtClean="0"/>
+              <a:t>Fourth level</a:t>
+            </a:r>
+          </a:p>
+          <a:p>
+            <a:pPr lvl="4"/>
+            <a:r>
+              <a:rPr lang="en-US" smtClean="0"/>
+              <a:t>Fifth level</a:t>
+            </a:r>
+            <a:endParaRPr lang="en-US" dirty="0"/>
+          </a:p>
+        </p:txBody>
+      </p:sp>
+      <p:sp>
+        <p:nvSpPr>
+          <p:cNvPr id="7" name="Date Placeholder 6"/>
+          <p:cNvSpPr>
+            <a:spLocks noGrp="1"/>
+          </p:cNvSpPr>
+          <p:nvPr>
+            <p:ph type="dt" sz="half" idx="10"/>
+          </p:nvPr>
+        </p:nvSpPr>
+        <p:spPr/>
+        <p:txBody>
+          <a:bodyPr/>
+          <a:lstStyle/>
+          <a:p>
+            <a:fld id="{1D8BD707-D9CF-40AE-B4C6-C98DA3205C09}" type="datetimeFigureOut">
+              <a:rPr lang="en-US" smtClean="0"/>
+              <a:pPr/>
+              <a:t>7/30/2025</a:t>
+            </a:fld>
+            <a:endParaRPr lang="en-US"/>
+          </a:p>
+        </p:txBody>
+      </p:sp>
+      <p:sp>
+        <p:nvSpPr>
+          <p:cNvPr id="8" name="Footer Placeholder 7"/>
+          <p:cNvSpPr>
+            <a:spLocks noGrp="1"/>
+          </p:cNvSpPr>
+          <p:nvPr>
+            <p:ph type="ftr" sz="quarter" idx="11"/>
+          </p:nvPr>
+        </p:nvSpPr>
+        <p:spPr/>
+        <p:txBody>
+          <a:bodyPr/>
+          <a:lstStyle/>
+          <a:p>
+            <a:endParaRPr lang="en-US"/>
+          </a:p>
+        </p:txBody>
+      </p:sp>
+      <p:sp>
+        <p:nvSpPr>
+          <p:cNvPr id="9" name="Slide Number Placeholder 8"/>
+          <p:cNvSpPr>
+            <a:spLocks noGrp="1"/>
+          </p:cNvSpPr>
+          <p:nvPr>
+            <p:ph type="sldNum" sz="quarter" idx="12"/>
+          </p:nvPr>
+        </p:nvSpPr>
+        <p:spPr/>
+        <p:txBody>
+          <a:bodyPr/>
+          <a:lstStyle/>
+          <a:p>
+            <a:fld id="{B6F15528-21DE-4FAA-801E-634DDDAF4B2B}" type="slidenum">
+              <a:rPr lang="en-US" smtClean="0"/>
+              <a:pPr/>
+              <a:t>‹#›</a:t>
+            </a:fld>
+            <a:endParaRPr lang="en-US"/>
+          </a:p>
+        </p:txBody>
+      </p:sp>
+    </p:spTree>
+    <p:extLst>
+      <p:ext uri="{BB962C8B-B14F-4D97-AF65-F5344CB8AC3E}">
+        <p14:creationId xmlns:p14="http://schemas.microsoft.com/office/powerpoint/2010/main" val="817331282"/>
+      </p:ext>
+    </p:extLst>
+  </p:cSld>
+  <p:clrMapOvr>
+    <a:masterClrMapping/>
+  </p:clrMapOvr>
+</p:sldLayout>
+</file>
+
+<file path=ppt/slideLayouts/slideLayout17.xml><?xml version="1.0" encoding="utf-8"?>
+<p:sldLayout xmlns:a="http://schemas.openxmlformats.org/drawingml/2006/main" xmlns:r="http://schemas.openxmlformats.org/officeDocument/2006/relationships" xmlns:p="http://schemas.openxmlformats.org/presentationml/2006/main" type="titleOnly" preserve="1">
+  <p:cSld name="Title Only">
+    <p:spTree>
+      <p:nvGrpSpPr>
+        <p:cNvPr id="1" name=""/>
+        <p:cNvGrpSpPr/>
+        <p:nvPr/>
+      </p:nvGrpSpPr>
+      <p:grpSpPr>
+        <a:xfrm>
+          <a:off x="0" y="0"/>
+          <a:ext cx="0" cy="0"/>
+          <a:chOff x="0" y="0"/>
+          <a:chExt cx="0" cy="0"/>
+        </a:xfrm>
+      </p:grpSpPr>
+      <p:sp>
+        <p:nvSpPr>
+          <p:cNvPr id="2" name="Title 1"/>
+          <p:cNvSpPr>
+            <a:spLocks noGrp="1"/>
+          </p:cNvSpPr>
+          <p:nvPr>
+            <p:ph type="title"/>
+          </p:nvPr>
+        </p:nvSpPr>
+        <p:spPr/>
+        <p:txBody>
+          <a:bodyPr/>
+          <a:lstStyle/>
+          <a:p>
+            <a:r>
+              <a:rPr lang="en-US" smtClean="0"/>
+              <a:t>Click to edit Master title style</a:t>
+            </a:r>
+            <a:endParaRPr lang="en-US" dirty="0"/>
+          </a:p>
+        </p:txBody>
+      </p:sp>
+      <p:sp>
+        <p:nvSpPr>
+          <p:cNvPr id="7" name="Date Placeholder 2"/>
+          <p:cNvSpPr>
+            <a:spLocks noGrp="1"/>
+          </p:cNvSpPr>
+          <p:nvPr>
+            <p:ph type="dt" sz="half" idx="10"/>
+          </p:nvPr>
+        </p:nvSpPr>
+        <p:spPr/>
+        <p:txBody>
+          <a:bodyPr/>
+          <a:lstStyle/>
+          <a:p>
+            <a:fld id="{1D8BD707-D9CF-40AE-B4C6-C98DA3205C09}" type="datetimeFigureOut">
+              <a:rPr lang="en-US" smtClean="0"/>
+              <a:pPr/>
+              <a:t>7/30/2025</a:t>
+            </a:fld>
+            <a:endParaRPr lang="en-US"/>
+          </a:p>
+        </p:txBody>
+      </p:sp>
+      <p:sp>
+        <p:nvSpPr>
+          <p:cNvPr id="5" name="Footer Placeholder 3"/>
+          <p:cNvSpPr>
+            <a:spLocks noGrp="1"/>
+          </p:cNvSpPr>
+          <p:nvPr>
+            <p:ph type="ftr" sz="quarter" idx="11"/>
+          </p:nvPr>
+        </p:nvSpPr>
+        <p:spPr/>
+        <p:txBody>
+          <a:bodyPr/>
+          <a:lstStyle/>
+          <a:p>
+            <a:endParaRPr lang="en-US"/>
+          </a:p>
+        </p:txBody>
+      </p:sp>
+      <p:sp>
+        <p:nvSpPr>
+          <p:cNvPr id="6" name="Slide Number Placeholder 4"/>
+          <p:cNvSpPr>
+            <a:spLocks noGrp="1"/>
+          </p:cNvSpPr>
+          <p:nvPr>
+            <p:ph type="sldNum" sz="quarter" idx="12"/>
+          </p:nvPr>
+        </p:nvSpPr>
+        <p:spPr/>
+        <p:txBody>
+          <a:bodyPr/>
+          <a:lstStyle/>
+          <a:p>
+            <a:fld id="{B6F15528-21DE-4FAA-801E-634DDDAF4B2B}" type="slidenum">
+              <a:rPr lang="en-US" smtClean="0"/>
+              <a:pPr/>
+              <a:t>‹#›</a:t>
+            </a:fld>
+            <a:endParaRPr lang="en-US"/>
+          </a:p>
+        </p:txBody>
+      </p:sp>
+    </p:spTree>
+    <p:extLst>
+      <p:ext uri="{BB962C8B-B14F-4D97-AF65-F5344CB8AC3E}">
+        <p14:creationId xmlns:p14="http://schemas.microsoft.com/office/powerpoint/2010/main" val="3808116850"/>
+      </p:ext>
+    </p:extLst>
+  </p:cSld>
+  <p:clrMapOvr>
+    <a:masterClrMapping/>
+  </p:clrMapOvr>
+</p:sldLayout>
+</file>
+
+<file path=ppt/slideLayouts/slideLayout18.xml><?xml version="1.0" encoding="utf-8"?>
+<p:sldLayout xmlns:a="http://schemas.openxmlformats.org/drawingml/2006/main" xmlns:r="http://schemas.openxmlformats.org/officeDocument/2006/relationships" xmlns:p="http://schemas.openxmlformats.org/presentationml/2006/main" type="blank" preserve="1">
+  <p:cSld name="Blank">
+    <p:spTree>
+      <p:nvGrpSpPr>
+        <p:cNvPr id="1" name=""/>
+        <p:cNvGrpSpPr/>
+        <p:nvPr/>
+      </p:nvGrpSpPr>
+      <p:grpSpPr>
+        <a:xfrm>
+          <a:off x="0" y="0"/>
+          <a:ext cx="0" cy="0"/>
+          <a:chOff x="0" y="0"/>
+          <a:chExt cx="0" cy="0"/>
+        </a:xfrm>
+      </p:grpSpPr>
+      <p:sp>
+        <p:nvSpPr>
+          <p:cNvPr id="7" name="Date Placeholder 1"/>
+          <p:cNvSpPr>
+            <a:spLocks noGrp="1"/>
+          </p:cNvSpPr>
+          <p:nvPr>
+            <p:ph type="dt" sz="half" idx="10"/>
+          </p:nvPr>
+        </p:nvSpPr>
+        <p:spPr/>
+        <p:txBody>
+          <a:bodyPr/>
+          <a:lstStyle/>
+          <a:p>
+            <a:fld id="{1D8BD707-D9CF-40AE-B4C6-C98DA3205C09}" type="datetimeFigureOut">
+              <a:rPr lang="en-US" smtClean="0"/>
+              <a:pPr/>
+              <a:t>7/30/2025</a:t>
+            </a:fld>
+            <a:endParaRPr lang="en-US"/>
+          </a:p>
+        </p:txBody>
+      </p:sp>
+      <p:sp>
+        <p:nvSpPr>
+          <p:cNvPr id="5" name="Footer Placeholder 2"/>
+          <p:cNvSpPr>
+            <a:spLocks noGrp="1"/>
+          </p:cNvSpPr>
+          <p:nvPr>
+            <p:ph type="ftr" sz="quarter" idx="11"/>
+          </p:nvPr>
+        </p:nvSpPr>
+        <p:spPr/>
+        <p:txBody>
+          <a:bodyPr/>
+          <a:lstStyle/>
+          <a:p>
+            <a:endParaRPr lang="en-US"/>
+          </a:p>
+        </p:txBody>
+      </p:sp>
+      <p:sp>
+        <p:nvSpPr>
+          <p:cNvPr id="6" name="Slide Number Placeholder 3"/>
+          <p:cNvSpPr>
+            <a:spLocks noGrp="1"/>
+          </p:cNvSpPr>
+          <p:nvPr>
+            <p:ph type="sldNum" sz="quarter" idx="12"/>
+          </p:nvPr>
+        </p:nvSpPr>
+        <p:spPr/>
+        <p:txBody>
+          <a:bodyPr/>
+          <a:lstStyle/>
+          <a:p>
+            <a:fld id="{B6F15528-21DE-4FAA-801E-634DDDAF4B2B}" type="slidenum">
+              <a:rPr lang="en-US" smtClean="0"/>
+              <a:pPr/>
+              <a:t>‹#›</a:t>
+            </a:fld>
+            <a:endParaRPr lang="en-US"/>
+          </a:p>
+        </p:txBody>
+      </p:sp>
+    </p:spTree>
+    <p:extLst>
+      <p:ext uri="{BB962C8B-B14F-4D97-AF65-F5344CB8AC3E}">
+        <p14:creationId xmlns:p14="http://schemas.microsoft.com/office/powerpoint/2010/main" val="125316305"/>
+      </p:ext>
+    </p:extLst>
+  </p:cSld>
+  <p:clrMapOvr>
+    <a:masterClrMapping/>
+  </p:clrMapOvr>
+</p:sldLayout>
+</file>
+
+<file path=ppt/slideLayouts/slideLayout19.xml><?xml version="1.0" encoding="utf-8"?>
+<p:sldLayout xmlns:a="http://schemas.openxmlformats.org/drawingml/2006/main" xmlns:r="http://schemas.openxmlformats.org/officeDocument/2006/relationships" xmlns:p="http://schemas.openxmlformats.org/presentationml/2006/main" type="objTx" preserve="1">
+  <p:cSld name="Content with Caption">
+    <p:spTree>
+      <p:nvGrpSpPr>
+        <p:cNvPr id="1" name=""/>
+        <p:cNvGrpSpPr/>
+        <p:nvPr/>
+      </p:nvGrpSpPr>
+      <p:grpSpPr>
+        <a:xfrm>
+          <a:off x="0" y="0"/>
+          <a:ext cx="0" cy="0"/>
+          <a:chOff x="0" y="0"/>
+          <a:chExt cx="0" cy="0"/>
+        </a:xfrm>
+      </p:grpSpPr>
+      <p:sp>
+        <p:nvSpPr>
+          <p:cNvPr id="2" name="Title 1"/>
+          <p:cNvSpPr>
+            <a:spLocks noGrp="1"/>
+          </p:cNvSpPr>
+          <p:nvPr>
+            <p:ph type="title"/>
+          </p:nvPr>
+        </p:nvSpPr>
+        <p:spPr>
+          <a:xfrm>
+            <a:off x="866441" y="1447800"/>
+            <a:ext cx="2551462" cy="1447800"/>
+          </a:xfrm>
+        </p:spPr>
+        <p:txBody>
+          <a:bodyPr anchor="b"/>
+          <a:lstStyle>
+            <a:lvl1pPr algn="l">
+              <a:defRPr sz="2400" b="0"/>
+            </a:lvl1pPr>
+          </a:lstStyle>
+          <a:p>
+            <a:r>
+              <a:rPr lang="en-US" smtClean="0"/>
+              <a:t>Click to edit Master title style</a:t>
+            </a:r>
+            <a:endParaRPr lang="en-US" dirty="0"/>
+          </a:p>
+        </p:txBody>
+      </p:sp>
+      <p:sp>
+        <p:nvSpPr>
+          <p:cNvPr id="3" name="Content Placeholder 2"/>
+          <p:cNvSpPr>
+            <a:spLocks noGrp="1"/>
+          </p:cNvSpPr>
+          <p:nvPr>
+            <p:ph idx="1"/>
+          </p:nvPr>
+        </p:nvSpPr>
+        <p:spPr>
+          <a:xfrm>
+            <a:off x="3589397" y="1447800"/>
+            <a:ext cx="3898013" cy="4572000"/>
+          </a:xfrm>
+        </p:spPr>
+        <p:txBody>
+          <a:bodyPr anchor="ctr">
+            <a:normAutofit/>
+          </a:bodyPr>
+          <a:lstStyle>
+            <a:lvl1pPr>
+              <a:defRPr sz="2000"/>
+            </a:lvl1pPr>
+            <a:lvl2pPr>
+              <a:defRPr sz="1800"/>
+            </a:lvl2pPr>
+            <a:lvl3pPr>
+              <a:defRPr sz="1600"/>
+            </a:lvl3pPr>
+            <a:lvl4pPr>
+              <a:defRPr sz="1400"/>
+            </a:lvl4pPr>
+            <a:lvl5pPr>
+              <a:defRPr sz="1400"/>
+            </a:lvl5pPr>
+            <a:lvl6pPr>
+              <a:defRPr sz="1400"/>
+            </a:lvl6pPr>
+            <a:lvl7pPr>
+              <a:defRPr sz="1400"/>
+            </a:lvl7pPr>
+            <a:lvl8pPr>
+              <a:defRPr sz="1400"/>
+            </a:lvl8pPr>
+            <a:lvl9pPr>
+              <a:defRPr sz="1400"/>
+            </a:lvl9pPr>
+          </a:lstStyle>
+          <a:p>
+            <a:pPr lvl="0"/>
+            <a:r>
+              <a:rPr lang="en-US" smtClean="0"/>
+              <a:t>Click to edit Master text styles</a:t>
+            </a:r>
+          </a:p>
+          <a:p>
+            <a:pPr lvl="1"/>
+            <a:r>
+              <a:rPr lang="en-US" smtClean="0"/>
+              <a:t>Second level</a:t>
+            </a:r>
+          </a:p>
+          <a:p>
+            <a:pPr lvl="2"/>
+            <a:r>
+              <a:rPr lang="en-US" smtClean="0"/>
+              <a:t>Third level</a:t>
+            </a:r>
+          </a:p>
+          <a:p>
+            <a:pPr lvl="3"/>
+            <a:r>
+              <a:rPr lang="en-US" smtClean="0"/>
+              <a:t>Fourth level</a:t>
+            </a:r>
+          </a:p>
+          <a:p>
+            <a:pPr lvl="4"/>
+            <a:r>
+              <a:rPr lang="en-US" smtClean="0"/>
+              <a:t>Fifth level</a:t>
+            </a:r>
+            <a:endParaRPr lang="en-US" dirty="0"/>
+          </a:p>
+        </p:txBody>
+      </p:sp>
+      <p:sp>
+        <p:nvSpPr>
+          <p:cNvPr id="4" name="Text Placeholder 3"/>
+          <p:cNvSpPr>
+            <a:spLocks noGrp="1"/>
+          </p:cNvSpPr>
+          <p:nvPr>
+            <p:ph type="body" sz="half" idx="2"/>
+          </p:nvPr>
+        </p:nvSpPr>
+        <p:spPr>
+          <a:xfrm>
+            <a:off x="866441" y="3129281"/>
+            <a:ext cx="2551462" cy="2895599"/>
+          </a:xfrm>
+        </p:spPr>
+        <p:txBody>
+          <a:bodyPr/>
+          <a:lstStyle>
+            <a:lvl1pPr marL="0" indent="0">
+              <a:buNone/>
+              <a:defRPr sz="1400"/>
+            </a:lvl1pPr>
+            <a:lvl2pPr marL="457200" indent="0">
+              <a:buNone/>
+              <a:defRPr sz="1200"/>
+            </a:lvl2pPr>
+            <a:lvl3pPr marL="914400" indent="0">
+              <a:buNone/>
+              <a:defRPr sz="1000"/>
+            </a:lvl3pPr>
+            <a:lvl4pPr marL="1371600" indent="0">
+              <a:buNone/>
+              <a:defRPr sz="900"/>
+            </a:lvl4pPr>
+            <a:lvl5pPr marL="1828800" indent="0">
+              <a:buNone/>
+              <a:defRPr sz="900"/>
+            </a:lvl5pPr>
+            <a:lvl6pPr marL="2286000" indent="0">
+              <a:buNone/>
+              <a:defRPr sz="900"/>
+            </a:lvl6pPr>
+            <a:lvl7pPr marL="2743200" indent="0">
+              <a:buNone/>
+              <a:defRPr sz="900"/>
+            </a:lvl7pPr>
+            <a:lvl8pPr marL="3200400" indent="0">
+              <a:buNone/>
+              <a:defRPr sz="900"/>
+            </a:lvl8pPr>
+            <a:lvl9pPr marL="3657600" indent="0">
+              <a:buNone/>
+              <a:defRPr sz="900"/>
+            </a:lvl9pPr>
+          </a:lstStyle>
+          <a:p>
+            <a:pPr lvl="0"/>
+            <a:r>
+              <a:rPr lang="en-US" smtClean="0"/>
+              <a:t>Click to edit Master text styles</a:t>
+            </a:r>
+          </a:p>
+        </p:txBody>
+      </p:sp>
+      <p:sp>
+        <p:nvSpPr>
+          <p:cNvPr id="7" name="Date Placeholder 4"/>
+          <p:cNvSpPr>
+            <a:spLocks noGrp="1"/>
+          </p:cNvSpPr>
+          <p:nvPr>
+            <p:ph type="dt" sz="half" idx="10"/>
+          </p:nvPr>
+        </p:nvSpPr>
+        <p:spPr/>
+        <p:txBody>
+          <a:bodyPr/>
+          <a:lstStyle/>
+          <a:p>
+            <a:fld id="{1D8BD707-D9CF-40AE-B4C6-C98DA3205C09}" type="datetimeFigureOut">
+              <a:rPr lang="en-US" smtClean="0"/>
+              <a:pPr/>
+              <a:t>7/30/2025</a:t>
+            </a:fld>
+            <a:endParaRPr lang="en-US"/>
+          </a:p>
+        </p:txBody>
+      </p:sp>
+      <p:sp>
+        <p:nvSpPr>
+          <p:cNvPr id="5" name="Footer Placeholder 5"/>
+          <p:cNvSpPr>
+            <a:spLocks noGrp="1"/>
+          </p:cNvSpPr>
+          <p:nvPr>
+            <p:ph type="ftr" sz="quarter" idx="11"/>
+          </p:nvPr>
+        </p:nvSpPr>
+        <p:spPr/>
+        <p:txBody>
+          <a:bodyPr/>
+          <a:lstStyle/>
+          <a:p>
+            <a:endParaRPr lang="en-US"/>
+          </a:p>
+        </p:txBody>
+      </p:sp>
+      <p:sp>
+        <p:nvSpPr>
+          <p:cNvPr id="6" name="Slide Number Placeholder 6"/>
+          <p:cNvSpPr>
+            <a:spLocks noGrp="1"/>
+          </p:cNvSpPr>
+          <p:nvPr>
+            <p:ph type="sldNum" sz="quarter" idx="12"/>
+          </p:nvPr>
+        </p:nvSpPr>
+        <p:spPr/>
+        <p:txBody>
+          <a:bodyPr/>
+          <a:lstStyle/>
+          <a:p>
+            <a:fld id="{B6F15528-21DE-4FAA-801E-634DDDAF4B2B}" type="slidenum">
+              <a:rPr lang="en-US" smtClean="0"/>
+              <a:pPr/>
+              <a:t>‹#›</a:t>
+            </a:fld>
+            <a:endParaRPr lang="en-US"/>
+          </a:p>
+        </p:txBody>
+      </p:sp>
+    </p:spTree>
+    <p:extLst>
+      <p:ext uri="{BB962C8B-B14F-4D97-AF65-F5344CB8AC3E}">
+        <p14:creationId xmlns:p14="http://schemas.microsoft.com/office/powerpoint/2010/main" val="544377485"/>
+      </p:ext>
+    </p:extLst>
   </p:cSld>
   <p:clrMapOvr>
     <a:masterClrMapping/>
@@ -813,7 +2739,7 @@
             <a:fld id="{1D8BD707-D9CF-40AE-B4C6-C98DA3205C09}" type="datetimeFigureOut">
               <a:rPr lang="en-US" smtClean="0"/>
               <a:pPr/>
-              <a:t>7/2/2025</a:t>
+              <a:t>7/30/2025</a:t>
             </a:fld>
             <a:endParaRPr lang="en-US"/>
           </a:p>
@@ -863,6 +2789,3215 @@
         </p:txBody>
       </p:sp>
     </p:spTree>
+  </p:cSld>
+  <p:clrMapOvr>
+    <a:masterClrMapping/>
+  </p:clrMapOvr>
+</p:sldLayout>
+</file>
+
+<file path=ppt/slideLayouts/slideLayout20.xml><?xml version="1.0" encoding="utf-8"?>
+<p:sldLayout xmlns:a="http://schemas.openxmlformats.org/drawingml/2006/main" xmlns:r="http://schemas.openxmlformats.org/officeDocument/2006/relationships" xmlns:p="http://schemas.openxmlformats.org/presentationml/2006/main" type="picTx" preserve="1">
+  <p:cSld name="Picture with Caption">
+    <p:spTree>
+      <p:nvGrpSpPr>
+        <p:cNvPr id="1" name=""/>
+        <p:cNvGrpSpPr/>
+        <p:nvPr/>
+      </p:nvGrpSpPr>
+      <p:grpSpPr>
+        <a:xfrm>
+          <a:off x="0" y="0"/>
+          <a:ext cx="0" cy="0"/>
+          <a:chOff x="0" y="0"/>
+          <a:chExt cx="0" cy="0"/>
+        </a:xfrm>
+      </p:grpSpPr>
+      <p:sp>
+        <p:nvSpPr>
+          <p:cNvPr id="2" name="Title 1"/>
+          <p:cNvSpPr>
+            <a:spLocks noGrp="1"/>
+          </p:cNvSpPr>
+          <p:nvPr>
+            <p:ph type="title"/>
+          </p:nvPr>
+        </p:nvSpPr>
+        <p:spPr>
+          <a:xfrm>
+            <a:off x="865656" y="1854192"/>
+            <a:ext cx="3820674" cy="1574808"/>
+          </a:xfrm>
+        </p:spPr>
+        <p:txBody>
+          <a:bodyPr anchor="b">
+            <a:normAutofit/>
+          </a:bodyPr>
+          <a:lstStyle>
+            <a:lvl1pPr algn="l">
+              <a:defRPr sz="3600" b="0"/>
+            </a:lvl1pPr>
+          </a:lstStyle>
+          <a:p>
+            <a:r>
+              <a:rPr lang="en-US" smtClean="0"/>
+              <a:t>Click to edit Master title style</a:t>
+            </a:r>
+            <a:endParaRPr lang="en-US" dirty="0"/>
+          </a:p>
+        </p:txBody>
+      </p:sp>
+      <p:sp>
+        <p:nvSpPr>
+          <p:cNvPr id="3" name="Picture Placeholder 2"/>
+          <p:cNvSpPr>
+            <a:spLocks noGrp="1" noChangeAspect="1"/>
+          </p:cNvSpPr>
+          <p:nvPr>
+            <p:ph type="pic" idx="1"/>
+          </p:nvPr>
+        </p:nvSpPr>
+        <p:spPr>
+          <a:xfrm>
+            <a:off x="5213517" y="1143000"/>
+            <a:ext cx="2400925" cy="4572000"/>
+          </a:xfrm>
+          <a:prstGeom prst="roundRect">
+            <a:avLst>
+              <a:gd name="adj" fmla="val 1858"/>
+            </a:avLst>
+          </a:prstGeom>
+          <a:effectLst>
+            <a:outerShdw blurRad="50800" dist="50800" dir="5400000" algn="tl" rotWithShape="0">
+              <a:srgbClr val="000000">
+                <a:alpha val="43000"/>
+              </a:srgbClr>
+            </a:outerShdw>
+          </a:effectLst>
+        </p:spPr>
+        <p:txBody>
+          <a:bodyPr anchor="t">
+            <a:normAutofit/>
+          </a:bodyPr>
+          <a:lstStyle>
+            <a:lvl1pPr marL="0" indent="0" algn="ctr">
+              <a:buNone/>
+              <a:defRPr sz="1600"/>
+            </a:lvl1pPr>
+            <a:lvl2pPr marL="457200" indent="0">
+              <a:buNone/>
+              <a:defRPr sz="1600"/>
+            </a:lvl2pPr>
+            <a:lvl3pPr marL="914400" indent="0">
+              <a:buNone/>
+              <a:defRPr sz="1600"/>
+            </a:lvl3pPr>
+            <a:lvl4pPr marL="1371600" indent="0">
+              <a:buNone/>
+              <a:defRPr sz="1600"/>
+            </a:lvl4pPr>
+            <a:lvl5pPr marL="1828800" indent="0">
+              <a:buNone/>
+              <a:defRPr sz="1600"/>
+            </a:lvl5pPr>
+            <a:lvl6pPr marL="2286000" indent="0">
+              <a:buNone/>
+              <a:defRPr sz="1600"/>
+            </a:lvl6pPr>
+            <a:lvl7pPr marL="2743200" indent="0">
+              <a:buNone/>
+              <a:defRPr sz="1600"/>
+            </a:lvl7pPr>
+            <a:lvl8pPr marL="3200400" indent="0">
+              <a:buNone/>
+              <a:defRPr sz="1600"/>
+            </a:lvl8pPr>
+            <a:lvl9pPr marL="3657600" indent="0">
+              <a:buNone/>
+              <a:defRPr sz="1600"/>
+            </a:lvl9pPr>
+          </a:lstStyle>
+          <a:p>
+            <a:r>
+              <a:rPr lang="en-US" smtClean="0"/>
+              <a:t>Click icon to add picture</a:t>
+            </a:r>
+            <a:endParaRPr lang="en-US" dirty="0"/>
+          </a:p>
+        </p:txBody>
+      </p:sp>
+      <p:sp>
+        <p:nvSpPr>
+          <p:cNvPr id="4" name="Text Placeholder 3"/>
+          <p:cNvSpPr>
+            <a:spLocks noGrp="1"/>
+          </p:cNvSpPr>
+          <p:nvPr>
+            <p:ph type="body" sz="half" idx="2"/>
+          </p:nvPr>
+        </p:nvSpPr>
+        <p:spPr>
+          <a:xfrm>
+            <a:off x="866441" y="3657600"/>
+            <a:ext cx="3814728" cy="1371600"/>
+          </a:xfrm>
+        </p:spPr>
+        <p:txBody>
+          <a:bodyPr>
+            <a:normAutofit/>
+          </a:bodyPr>
+          <a:lstStyle>
+            <a:lvl1pPr marL="0" indent="0">
+              <a:buNone/>
+              <a:defRPr sz="1400"/>
+            </a:lvl1pPr>
+            <a:lvl2pPr marL="457200" indent="0">
+              <a:buNone/>
+              <a:defRPr sz="1200"/>
+            </a:lvl2pPr>
+            <a:lvl3pPr marL="914400" indent="0">
+              <a:buNone/>
+              <a:defRPr sz="1000"/>
+            </a:lvl3pPr>
+            <a:lvl4pPr marL="1371600" indent="0">
+              <a:buNone/>
+              <a:defRPr sz="900"/>
+            </a:lvl4pPr>
+            <a:lvl5pPr marL="1828800" indent="0">
+              <a:buNone/>
+              <a:defRPr sz="900"/>
+            </a:lvl5pPr>
+            <a:lvl6pPr marL="2286000" indent="0">
+              <a:buNone/>
+              <a:defRPr sz="900"/>
+            </a:lvl6pPr>
+            <a:lvl7pPr marL="2743200" indent="0">
+              <a:buNone/>
+              <a:defRPr sz="900"/>
+            </a:lvl7pPr>
+            <a:lvl8pPr marL="3200400" indent="0">
+              <a:buNone/>
+              <a:defRPr sz="900"/>
+            </a:lvl8pPr>
+            <a:lvl9pPr marL="3657600" indent="0">
+              <a:buNone/>
+              <a:defRPr sz="900"/>
+            </a:lvl9pPr>
+          </a:lstStyle>
+          <a:p>
+            <a:pPr lvl="0"/>
+            <a:r>
+              <a:rPr lang="en-US" smtClean="0"/>
+              <a:t>Click to edit Master text styles</a:t>
+            </a:r>
+          </a:p>
+        </p:txBody>
+      </p:sp>
+      <p:sp>
+        <p:nvSpPr>
+          <p:cNvPr id="5" name="Date Placeholder 4"/>
+          <p:cNvSpPr>
+            <a:spLocks noGrp="1"/>
+          </p:cNvSpPr>
+          <p:nvPr>
+            <p:ph type="dt" sz="half" idx="10"/>
+          </p:nvPr>
+        </p:nvSpPr>
+        <p:spPr/>
+        <p:txBody>
+          <a:bodyPr/>
+          <a:lstStyle/>
+          <a:p>
+            <a:fld id="{1D8BD707-D9CF-40AE-B4C6-C98DA3205C09}" type="datetimeFigureOut">
+              <a:rPr lang="en-US" smtClean="0"/>
+              <a:pPr/>
+              <a:t>7/30/2025</a:t>
+            </a:fld>
+            <a:endParaRPr lang="en-US"/>
+          </a:p>
+        </p:txBody>
+      </p:sp>
+      <p:sp>
+        <p:nvSpPr>
+          <p:cNvPr id="6" name="Footer Placeholder 5"/>
+          <p:cNvSpPr>
+            <a:spLocks noGrp="1"/>
+          </p:cNvSpPr>
+          <p:nvPr>
+            <p:ph type="ftr" sz="quarter" idx="11"/>
+          </p:nvPr>
+        </p:nvSpPr>
+        <p:spPr/>
+        <p:txBody>
+          <a:bodyPr/>
+          <a:lstStyle/>
+          <a:p>
+            <a:endParaRPr lang="en-US"/>
+          </a:p>
+        </p:txBody>
+      </p:sp>
+      <p:sp>
+        <p:nvSpPr>
+          <p:cNvPr id="7" name="Slide Number Placeholder 6"/>
+          <p:cNvSpPr>
+            <a:spLocks noGrp="1"/>
+          </p:cNvSpPr>
+          <p:nvPr>
+            <p:ph type="sldNum" sz="quarter" idx="12"/>
+          </p:nvPr>
+        </p:nvSpPr>
+        <p:spPr/>
+        <p:txBody>
+          <a:bodyPr/>
+          <a:lstStyle/>
+          <a:p>
+            <a:fld id="{B6F15528-21DE-4FAA-801E-634DDDAF4B2B}" type="slidenum">
+              <a:rPr lang="en-US" smtClean="0"/>
+              <a:pPr/>
+              <a:t>‹#›</a:t>
+            </a:fld>
+            <a:endParaRPr lang="en-US"/>
+          </a:p>
+        </p:txBody>
+      </p:sp>
+    </p:spTree>
+    <p:extLst>
+      <p:ext uri="{BB962C8B-B14F-4D97-AF65-F5344CB8AC3E}">
+        <p14:creationId xmlns:p14="http://schemas.microsoft.com/office/powerpoint/2010/main" val="2075752284"/>
+      </p:ext>
+    </p:extLst>
+  </p:cSld>
+  <p:clrMapOvr>
+    <a:masterClrMapping/>
+  </p:clrMapOvr>
+</p:sldLayout>
+</file>
+
+<file path=ppt/slideLayouts/slideLayout21.xml><?xml version="1.0" encoding="utf-8"?>
+<p:sldLayout xmlns:a="http://schemas.openxmlformats.org/drawingml/2006/main" xmlns:r="http://schemas.openxmlformats.org/officeDocument/2006/relationships" xmlns:p="http://schemas.openxmlformats.org/presentationml/2006/main" preserve="1">
+  <p:cSld name="Panoramic Picture with Caption">
+    <p:spTree>
+      <p:nvGrpSpPr>
+        <p:cNvPr id="1" name=""/>
+        <p:cNvGrpSpPr/>
+        <p:nvPr/>
+      </p:nvGrpSpPr>
+      <p:grpSpPr>
+        <a:xfrm>
+          <a:off x="0" y="0"/>
+          <a:ext cx="0" cy="0"/>
+          <a:chOff x="0" y="0"/>
+          <a:chExt cx="0" cy="0"/>
+        </a:xfrm>
+      </p:grpSpPr>
+      <p:sp>
+        <p:nvSpPr>
+          <p:cNvPr id="2" name="Title 1"/>
+          <p:cNvSpPr>
+            <a:spLocks noGrp="1"/>
+          </p:cNvSpPr>
+          <p:nvPr>
+            <p:ph type="title"/>
+          </p:nvPr>
+        </p:nvSpPr>
+        <p:spPr>
+          <a:xfrm>
+            <a:off x="866443" y="4800587"/>
+            <a:ext cx="6620967" cy="566738"/>
+          </a:xfrm>
+        </p:spPr>
+        <p:txBody>
+          <a:bodyPr anchor="b">
+            <a:normAutofit/>
+          </a:bodyPr>
+          <a:lstStyle>
+            <a:lvl1pPr algn="l">
+              <a:defRPr sz="2400" b="0"/>
+            </a:lvl1pPr>
+          </a:lstStyle>
+          <a:p>
+            <a:r>
+              <a:rPr lang="en-US" smtClean="0"/>
+              <a:t>Click to edit Master title style</a:t>
+            </a:r>
+            <a:endParaRPr lang="en-US" dirty="0"/>
+          </a:p>
+        </p:txBody>
+      </p:sp>
+      <p:sp>
+        <p:nvSpPr>
+          <p:cNvPr id="3" name="Picture Placeholder 2"/>
+          <p:cNvSpPr>
+            <a:spLocks noGrp="1" noChangeAspect="1"/>
+          </p:cNvSpPr>
+          <p:nvPr>
+            <p:ph type="pic" idx="1"/>
+          </p:nvPr>
+        </p:nvSpPr>
+        <p:spPr>
+          <a:xfrm>
+            <a:off x="866442" y="685800"/>
+            <a:ext cx="6620968" cy="3640666"/>
+          </a:xfrm>
+          <a:prstGeom prst="roundRect">
+            <a:avLst>
+              <a:gd name="adj" fmla="val 1858"/>
+            </a:avLst>
+          </a:prstGeom>
+          <a:effectLst>
+            <a:outerShdw blurRad="50800" dist="50800" dir="5400000" algn="tl" rotWithShape="0">
+              <a:srgbClr val="000000">
+                <a:alpha val="43000"/>
+              </a:srgbClr>
+            </a:outerShdw>
+          </a:effectLst>
+        </p:spPr>
+        <p:txBody>
+          <a:bodyPr anchor="t">
+            <a:normAutofit/>
+          </a:bodyPr>
+          <a:lstStyle>
+            <a:lvl1pPr marL="0" indent="0" algn="ctr">
+              <a:buNone/>
+              <a:defRPr sz="1600"/>
+            </a:lvl1pPr>
+            <a:lvl2pPr marL="457200" indent="0">
+              <a:buNone/>
+              <a:defRPr sz="1600"/>
+            </a:lvl2pPr>
+            <a:lvl3pPr marL="914400" indent="0">
+              <a:buNone/>
+              <a:defRPr sz="1600"/>
+            </a:lvl3pPr>
+            <a:lvl4pPr marL="1371600" indent="0">
+              <a:buNone/>
+              <a:defRPr sz="1600"/>
+            </a:lvl4pPr>
+            <a:lvl5pPr marL="1828800" indent="0">
+              <a:buNone/>
+              <a:defRPr sz="1600"/>
+            </a:lvl5pPr>
+            <a:lvl6pPr marL="2286000" indent="0">
+              <a:buNone/>
+              <a:defRPr sz="1600"/>
+            </a:lvl6pPr>
+            <a:lvl7pPr marL="2743200" indent="0">
+              <a:buNone/>
+              <a:defRPr sz="1600"/>
+            </a:lvl7pPr>
+            <a:lvl8pPr marL="3200400" indent="0">
+              <a:buNone/>
+              <a:defRPr sz="1600"/>
+            </a:lvl8pPr>
+            <a:lvl9pPr marL="3657600" indent="0">
+              <a:buNone/>
+              <a:defRPr sz="1600"/>
+            </a:lvl9pPr>
+          </a:lstStyle>
+          <a:p>
+            <a:r>
+              <a:rPr lang="en-US" smtClean="0"/>
+              <a:t>Click icon to add picture</a:t>
+            </a:r>
+            <a:endParaRPr lang="en-US" dirty="0"/>
+          </a:p>
+        </p:txBody>
+      </p:sp>
+      <p:sp>
+        <p:nvSpPr>
+          <p:cNvPr id="4" name="Text Placeholder 3"/>
+          <p:cNvSpPr>
+            <a:spLocks noGrp="1"/>
+          </p:cNvSpPr>
+          <p:nvPr>
+            <p:ph type="body" sz="half" idx="2"/>
+          </p:nvPr>
+        </p:nvSpPr>
+        <p:spPr>
+          <a:xfrm>
+            <a:off x="866443" y="5367325"/>
+            <a:ext cx="6620966" cy="493712"/>
+          </a:xfrm>
+        </p:spPr>
+        <p:txBody>
+          <a:bodyPr>
+            <a:normAutofit/>
+          </a:bodyPr>
+          <a:lstStyle>
+            <a:lvl1pPr marL="0" indent="0">
+              <a:buNone/>
+              <a:defRPr sz="1200"/>
+            </a:lvl1pPr>
+            <a:lvl2pPr marL="457200" indent="0">
+              <a:buNone/>
+              <a:defRPr sz="1200"/>
+            </a:lvl2pPr>
+            <a:lvl3pPr marL="914400" indent="0">
+              <a:buNone/>
+              <a:defRPr sz="1000"/>
+            </a:lvl3pPr>
+            <a:lvl4pPr marL="1371600" indent="0">
+              <a:buNone/>
+              <a:defRPr sz="900"/>
+            </a:lvl4pPr>
+            <a:lvl5pPr marL="1828800" indent="0">
+              <a:buNone/>
+              <a:defRPr sz="900"/>
+            </a:lvl5pPr>
+            <a:lvl6pPr marL="2286000" indent="0">
+              <a:buNone/>
+              <a:defRPr sz="900"/>
+            </a:lvl6pPr>
+            <a:lvl7pPr marL="2743200" indent="0">
+              <a:buNone/>
+              <a:defRPr sz="900"/>
+            </a:lvl7pPr>
+            <a:lvl8pPr marL="3200400" indent="0">
+              <a:buNone/>
+              <a:defRPr sz="900"/>
+            </a:lvl8pPr>
+            <a:lvl9pPr marL="3657600" indent="0">
+              <a:buNone/>
+              <a:defRPr sz="900"/>
+            </a:lvl9pPr>
+          </a:lstStyle>
+          <a:p>
+            <a:pPr lvl="0"/>
+            <a:r>
+              <a:rPr lang="en-US" smtClean="0"/>
+              <a:t>Click to edit Master text styles</a:t>
+            </a:r>
+          </a:p>
+        </p:txBody>
+      </p:sp>
+      <p:sp>
+        <p:nvSpPr>
+          <p:cNvPr id="5" name="Date Placeholder 4"/>
+          <p:cNvSpPr>
+            <a:spLocks noGrp="1"/>
+          </p:cNvSpPr>
+          <p:nvPr>
+            <p:ph type="dt" sz="half" idx="10"/>
+          </p:nvPr>
+        </p:nvSpPr>
+        <p:spPr/>
+        <p:txBody>
+          <a:bodyPr/>
+          <a:lstStyle/>
+          <a:p>
+            <a:fld id="{1D8BD707-D9CF-40AE-B4C6-C98DA3205C09}" type="datetimeFigureOut">
+              <a:rPr lang="en-US" smtClean="0"/>
+              <a:pPr/>
+              <a:t>7/30/2025</a:t>
+            </a:fld>
+            <a:endParaRPr lang="en-US"/>
+          </a:p>
+        </p:txBody>
+      </p:sp>
+      <p:sp>
+        <p:nvSpPr>
+          <p:cNvPr id="6" name="Footer Placeholder 5"/>
+          <p:cNvSpPr>
+            <a:spLocks noGrp="1"/>
+          </p:cNvSpPr>
+          <p:nvPr>
+            <p:ph type="ftr" sz="quarter" idx="11"/>
+          </p:nvPr>
+        </p:nvSpPr>
+        <p:spPr/>
+        <p:txBody>
+          <a:bodyPr/>
+          <a:lstStyle/>
+          <a:p>
+            <a:endParaRPr lang="en-US"/>
+          </a:p>
+        </p:txBody>
+      </p:sp>
+      <p:sp>
+        <p:nvSpPr>
+          <p:cNvPr id="7" name="Slide Number Placeholder 6"/>
+          <p:cNvSpPr>
+            <a:spLocks noGrp="1"/>
+          </p:cNvSpPr>
+          <p:nvPr>
+            <p:ph type="sldNum" sz="quarter" idx="12"/>
+          </p:nvPr>
+        </p:nvSpPr>
+        <p:spPr/>
+        <p:txBody>
+          <a:bodyPr/>
+          <a:lstStyle/>
+          <a:p>
+            <a:fld id="{B6F15528-21DE-4FAA-801E-634DDDAF4B2B}" type="slidenum">
+              <a:rPr lang="en-US" smtClean="0"/>
+              <a:pPr/>
+              <a:t>‹#›</a:t>
+            </a:fld>
+            <a:endParaRPr lang="en-US"/>
+          </a:p>
+        </p:txBody>
+      </p:sp>
+    </p:spTree>
+    <p:extLst>
+      <p:ext uri="{BB962C8B-B14F-4D97-AF65-F5344CB8AC3E}">
+        <p14:creationId xmlns:p14="http://schemas.microsoft.com/office/powerpoint/2010/main" val="666125297"/>
+      </p:ext>
+    </p:extLst>
+  </p:cSld>
+  <p:clrMapOvr>
+    <a:masterClrMapping/>
+  </p:clrMapOvr>
+</p:sldLayout>
+</file>
+
+<file path=ppt/slideLayouts/slideLayout22.xml><?xml version="1.0" encoding="utf-8"?>
+<p:sldLayout xmlns:a="http://schemas.openxmlformats.org/drawingml/2006/main" xmlns:r="http://schemas.openxmlformats.org/officeDocument/2006/relationships" xmlns:p="http://schemas.openxmlformats.org/presentationml/2006/main" preserve="1">
+  <p:cSld name="Title and Caption">
+    <p:spTree>
+      <p:nvGrpSpPr>
+        <p:cNvPr id="1" name=""/>
+        <p:cNvGrpSpPr/>
+        <p:nvPr/>
+      </p:nvGrpSpPr>
+      <p:grpSpPr>
+        <a:xfrm>
+          <a:off x="0" y="0"/>
+          <a:ext cx="0" cy="0"/>
+          <a:chOff x="0" y="0"/>
+          <a:chExt cx="0" cy="0"/>
+        </a:xfrm>
+      </p:grpSpPr>
+      <p:sp>
+        <p:nvSpPr>
+          <p:cNvPr id="2" name="Title 1"/>
+          <p:cNvSpPr>
+            <a:spLocks noGrp="1"/>
+          </p:cNvSpPr>
+          <p:nvPr>
+            <p:ph type="title"/>
+          </p:nvPr>
+        </p:nvSpPr>
+        <p:spPr>
+          <a:xfrm>
+            <a:off x="866442" y="1447800"/>
+            <a:ext cx="6620968" cy="1981200"/>
+          </a:xfrm>
+        </p:spPr>
+        <p:txBody>
+          <a:bodyPr/>
+          <a:lstStyle>
+            <a:lvl1pPr>
+              <a:defRPr sz="4800"/>
+            </a:lvl1pPr>
+          </a:lstStyle>
+          <a:p>
+            <a:r>
+              <a:rPr lang="en-US" smtClean="0"/>
+              <a:t>Click to edit Master title style</a:t>
+            </a:r>
+            <a:endParaRPr lang="en-US" dirty="0"/>
+          </a:p>
+        </p:txBody>
+      </p:sp>
+      <p:sp>
+        <p:nvSpPr>
+          <p:cNvPr id="8" name="Text Placeholder 3"/>
+          <p:cNvSpPr>
+            <a:spLocks noGrp="1"/>
+          </p:cNvSpPr>
+          <p:nvPr>
+            <p:ph type="body" sz="half" idx="2"/>
+          </p:nvPr>
+        </p:nvSpPr>
+        <p:spPr>
+          <a:xfrm>
+            <a:off x="866442" y="3657600"/>
+            <a:ext cx="6620968" cy="2362200"/>
+          </a:xfrm>
+        </p:spPr>
+        <p:txBody>
+          <a:bodyPr anchor="ctr">
+            <a:normAutofit/>
+          </a:bodyPr>
+          <a:lstStyle>
+            <a:lvl1pPr marL="0" indent="0">
+              <a:buNone/>
+              <a:defRPr sz="1800"/>
+            </a:lvl1pPr>
+            <a:lvl2pPr marL="457200" indent="0">
+              <a:buNone/>
+              <a:defRPr sz="1200"/>
+            </a:lvl2pPr>
+            <a:lvl3pPr marL="914400" indent="0">
+              <a:buNone/>
+              <a:defRPr sz="1000"/>
+            </a:lvl3pPr>
+            <a:lvl4pPr marL="1371600" indent="0">
+              <a:buNone/>
+              <a:defRPr sz="900"/>
+            </a:lvl4pPr>
+            <a:lvl5pPr marL="1828800" indent="0">
+              <a:buNone/>
+              <a:defRPr sz="900"/>
+            </a:lvl5pPr>
+            <a:lvl6pPr marL="2286000" indent="0">
+              <a:buNone/>
+              <a:defRPr sz="900"/>
+            </a:lvl6pPr>
+            <a:lvl7pPr marL="2743200" indent="0">
+              <a:buNone/>
+              <a:defRPr sz="900"/>
+            </a:lvl7pPr>
+            <a:lvl8pPr marL="3200400" indent="0">
+              <a:buNone/>
+              <a:defRPr sz="900"/>
+            </a:lvl8pPr>
+            <a:lvl9pPr marL="3657600" indent="0">
+              <a:buNone/>
+              <a:defRPr sz="900"/>
+            </a:lvl9pPr>
+          </a:lstStyle>
+          <a:p>
+            <a:pPr lvl="0"/>
+            <a:r>
+              <a:rPr lang="en-US" smtClean="0"/>
+              <a:t>Click to edit Master text styles</a:t>
+            </a:r>
+          </a:p>
+        </p:txBody>
+      </p:sp>
+      <p:sp>
+        <p:nvSpPr>
+          <p:cNvPr id="4" name="Date Placeholder 3"/>
+          <p:cNvSpPr>
+            <a:spLocks noGrp="1"/>
+          </p:cNvSpPr>
+          <p:nvPr>
+            <p:ph type="dt" sz="half" idx="10"/>
+          </p:nvPr>
+        </p:nvSpPr>
+        <p:spPr/>
+        <p:txBody>
+          <a:bodyPr/>
+          <a:lstStyle/>
+          <a:p>
+            <a:fld id="{1D8BD707-D9CF-40AE-B4C6-C98DA3205C09}" type="datetimeFigureOut">
+              <a:rPr lang="en-US" smtClean="0"/>
+              <a:pPr/>
+              <a:t>7/30/2025</a:t>
+            </a:fld>
+            <a:endParaRPr lang="en-US"/>
+          </a:p>
+        </p:txBody>
+      </p:sp>
+      <p:sp>
+        <p:nvSpPr>
+          <p:cNvPr id="5" name="Footer Placeholder 4"/>
+          <p:cNvSpPr>
+            <a:spLocks noGrp="1"/>
+          </p:cNvSpPr>
+          <p:nvPr>
+            <p:ph type="ftr" sz="quarter" idx="11"/>
+          </p:nvPr>
+        </p:nvSpPr>
+        <p:spPr/>
+        <p:txBody>
+          <a:bodyPr/>
+          <a:lstStyle/>
+          <a:p>
+            <a:endParaRPr lang="en-US"/>
+          </a:p>
+        </p:txBody>
+      </p:sp>
+      <p:sp>
+        <p:nvSpPr>
+          <p:cNvPr id="6" name="Slide Number Placeholder 5"/>
+          <p:cNvSpPr>
+            <a:spLocks noGrp="1"/>
+          </p:cNvSpPr>
+          <p:nvPr>
+            <p:ph type="sldNum" sz="quarter" idx="12"/>
+          </p:nvPr>
+        </p:nvSpPr>
+        <p:spPr/>
+        <p:txBody>
+          <a:bodyPr/>
+          <a:lstStyle/>
+          <a:p>
+            <a:fld id="{B6F15528-21DE-4FAA-801E-634DDDAF4B2B}" type="slidenum">
+              <a:rPr lang="en-US" smtClean="0"/>
+              <a:pPr/>
+              <a:t>‹#›</a:t>
+            </a:fld>
+            <a:endParaRPr lang="en-US"/>
+          </a:p>
+        </p:txBody>
+      </p:sp>
+    </p:spTree>
+    <p:extLst>
+      <p:ext uri="{BB962C8B-B14F-4D97-AF65-F5344CB8AC3E}">
+        <p14:creationId xmlns:p14="http://schemas.microsoft.com/office/powerpoint/2010/main" val="1389884995"/>
+      </p:ext>
+    </p:extLst>
+  </p:cSld>
+  <p:clrMapOvr>
+    <a:masterClrMapping/>
+  </p:clrMapOvr>
+</p:sldLayout>
+</file>
+
+<file path=ppt/slideLayouts/slideLayout23.xml><?xml version="1.0" encoding="utf-8"?>
+<p:sldLayout xmlns:a="http://schemas.openxmlformats.org/drawingml/2006/main" xmlns:r="http://schemas.openxmlformats.org/officeDocument/2006/relationships" xmlns:p="http://schemas.openxmlformats.org/presentationml/2006/main" preserve="1">
+  <p:cSld name="Quote with Caption">
+    <p:spTree>
+      <p:nvGrpSpPr>
+        <p:cNvPr id="1" name=""/>
+        <p:cNvGrpSpPr/>
+        <p:nvPr/>
+      </p:nvGrpSpPr>
+      <p:grpSpPr>
+        <a:xfrm>
+          <a:off x="0" y="0"/>
+          <a:ext cx="0" cy="0"/>
+          <a:chOff x="0" y="0"/>
+          <a:chExt cx="0" cy="0"/>
+        </a:xfrm>
+      </p:grpSpPr>
+      <p:sp>
+        <p:nvSpPr>
+          <p:cNvPr id="2" name="Title 1"/>
+          <p:cNvSpPr>
+            <a:spLocks noGrp="1"/>
+          </p:cNvSpPr>
+          <p:nvPr>
+            <p:ph type="title"/>
+          </p:nvPr>
+        </p:nvSpPr>
+        <p:spPr>
+          <a:xfrm>
+            <a:off x="1181409" y="1447800"/>
+            <a:ext cx="6001049" cy="2323374"/>
+          </a:xfrm>
+        </p:spPr>
+        <p:txBody>
+          <a:bodyPr/>
+          <a:lstStyle>
+            <a:lvl1pPr>
+              <a:defRPr sz="4800"/>
+            </a:lvl1pPr>
+          </a:lstStyle>
+          <a:p>
+            <a:r>
+              <a:rPr lang="en-US" smtClean="0"/>
+              <a:t>Click to edit Master title style</a:t>
+            </a:r>
+            <a:endParaRPr lang="en-US" dirty="0"/>
+          </a:p>
+        </p:txBody>
+      </p:sp>
+      <p:sp>
+        <p:nvSpPr>
+          <p:cNvPr id="11" name="Text Placeholder 3"/>
+          <p:cNvSpPr>
+            <a:spLocks noGrp="1"/>
+          </p:cNvSpPr>
+          <p:nvPr>
+            <p:ph type="body" sz="half" idx="14"/>
+          </p:nvPr>
+        </p:nvSpPr>
+        <p:spPr>
+          <a:xfrm>
+            <a:off x="1448177" y="3771174"/>
+            <a:ext cx="5461159" cy="342174"/>
+          </a:xfrm>
+        </p:spPr>
+        <p:txBody>
+          <a:bodyPr vert="horz" lIns="91440" tIns="45720" rIns="91440" bIns="45720" rtlCol="0" anchor="t">
+            <a:normAutofit/>
+          </a:bodyPr>
+          <a:lstStyle>
+            <a:lvl1pPr marL="0" indent="0">
+              <a:buNone/>
+              <a:defRPr lang="en-US" sz="1400" b="0" i="0" kern="1200" cap="small" dirty="0">
+                <a:solidFill>
+                  <a:schemeClr val="bg2">
+                    <a:lumMod val="40000"/>
+                    <a:lumOff val="60000"/>
+                  </a:schemeClr>
+                </a:solidFill>
+                <a:latin typeface="+mj-lt"/>
+                <a:ea typeface="+mj-ea"/>
+                <a:cs typeface="+mj-cs"/>
+              </a:defRPr>
+            </a:lvl1pPr>
+            <a:lvl2pPr marL="457200" indent="0">
+              <a:buNone/>
+              <a:defRPr sz="1200"/>
+            </a:lvl2pPr>
+            <a:lvl3pPr marL="914400" indent="0">
+              <a:buNone/>
+              <a:defRPr sz="1000"/>
+            </a:lvl3pPr>
+            <a:lvl4pPr marL="1371600" indent="0">
+              <a:buNone/>
+              <a:defRPr sz="900"/>
+            </a:lvl4pPr>
+            <a:lvl5pPr marL="1828800" indent="0">
+              <a:buNone/>
+              <a:defRPr sz="900"/>
+            </a:lvl5pPr>
+            <a:lvl6pPr marL="2286000" indent="0">
+              <a:buNone/>
+              <a:defRPr sz="900"/>
+            </a:lvl6pPr>
+            <a:lvl7pPr marL="2743200" indent="0">
+              <a:buNone/>
+              <a:defRPr sz="900"/>
+            </a:lvl7pPr>
+            <a:lvl8pPr marL="3200400" indent="0">
+              <a:buNone/>
+              <a:defRPr sz="900"/>
+            </a:lvl8pPr>
+            <a:lvl9pPr marL="3657600" indent="0">
+              <a:buNone/>
+              <a:defRPr sz="900"/>
+            </a:lvl9pPr>
+          </a:lstStyle>
+          <a:p>
+            <a:pPr marL="0" lvl="0" indent="0">
+              <a:buNone/>
+            </a:pPr>
+            <a:r>
+              <a:rPr lang="en-US" smtClean="0"/>
+              <a:t>Click to edit Master text styles</a:t>
+            </a:r>
+          </a:p>
+        </p:txBody>
+      </p:sp>
+      <p:sp>
+        <p:nvSpPr>
+          <p:cNvPr id="10" name="Text Placeholder 3"/>
+          <p:cNvSpPr>
+            <a:spLocks noGrp="1"/>
+          </p:cNvSpPr>
+          <p:nvPr>
+            <p:ph type="body" sz="half" idx="2"/>
+          </p:nvPr>
+        </p:nvSpPr>
+        <p:spPr>
+          <a:xfrm>
+            <a:off x="866442" y="4350657"/>
+            <a:ext cx="6620968" cy="1676400"/>
+          </a:xfrm>
+        </p:spPr>
+        <p:txBody>
+          <a:bodyPr anchor="ctr">
+            <a:normAutofit/>
+          </a:bodyPr>
+          <a:lstStyle>
+            <a:lvl1pPr marL="0" indent="0">
+              <a:buNone/>
+              <a:defRPr sz="1800"/>
+            </a:lvl1pPr>
+            <a:lvl2pPr marL="457200" indent="0">
+              <a:buNone/>
+              <a:defRPr sz="1200"/>
+            </a:lvl2pPr>
+            <a:lvl3pPr marL="914400" indent="0">
+              <a:buNone/>
+              <a:defRPr sz="1000"/>
+            </a:lvl3pPr>
+            <a:lvl4pPr marL="1371600" indent="0">
+              <a:buNone/>
+              <a:defRPr sz="900"/>
+            </a:lvl4pPr>
+            <a:lvl5pPr marL="1828800" indent="0">
+              <a:buNone/>
+              <a:defRPr sz="900"/>
+            </a:lvl5pPr>
+            <a:lvl6pPr marL="2286000" indent="0">
+              <a:buNone/>
+              <a:defRPr sz="900"/>
+            </a:lvl6pPr>
+            <a:lvl7pPr marL="2743200" indent="0">
+              <a:buNone/>
+              <a:defRPr sz="900"/>
+            </a:lvl7pPr>
+            <a:lvl8pPr marL="3200400" indent="0">
+              <a:buNone/>
+              <a:defRPr sz="900"/>
+            </a:lvl8pPr>
+            <a:lvl9pPr marL="3657600" indent="0">
+              <a:buNone/>
+              <a:defRPr sz="900"/>
+            </a:lvl9pPr>
+          </a:lstStyle>
+          <a:p>
+            <a:pPr lvl="0"/>
+            <a:r>
+              <a:rPr lang="en-US" smtClean="0"/>
+              <a:t>Click to edit Master text styles</a:t>
+            </a:r>
+          </a:p>
+        </p:txBody>
+      </p:sp>
+      <p:sp>
+        <p:nvSpPr>
+          <p:cNvPr id="4" name="Date Placeholder 3"/>
+          <p:cNvSpPr>
+            <a:spLocks noGrp="1"/>
+          </p:cNvSpPr>
+          <p:nvPr>
+            <p:ph type="dt" sz="half" idx="10"/>
+          </p:nvPr>
+        </p:nvSpPr>
+        <p:spPr/>
+        <p:txBody>
+          <a:bodyPr/>
+          <a:lstStyle/>
+          <a:p>
+            <a:fld id="{1D8BD707-D9CF-40AE-B4C6-C98DA3205C09}" type="datetimeFigureOut">
+              <a:rPr lang="en-US" smtClean="0"/>
+              <a:pPr/>
+              <a:t>7/30/2025</a:t>
+            </a:fld>
+            <a:endParaRPr lang="en-US"/>
+          </a:p>
+        </p:txBody>
+      </p:sp>
+      <p:sp>
+        <p:nvSpPr>
+          <p:cNvPr id="5" name="Footer Placeholder 4"/>
+          <p:cNvSpPr>
+            <a:spLocks noGrp="1"/>
+          </p:cNvSpPr>
+          <p:nvPr>
+            <p:ph type="ftr" sz="quarter" idx="11"/>
+          </p:nvPr>
+        </p:nvSpPr>
+        <p:spPr/>
+        <p:txBody>
+          <a:bodyPr/>
+          <a:lstStyle/>
+          <a:p>
+            <a:endParaRPr lang="en-US"/>
+          </a:p>
+        </p:txBody>
+      </p:sp>
+      <p:sp>
+        <p:nvSpPr>
+          <p:cNvPr id="6" name="Slide Number Placeholder 5"/>
+          <p:cNvSpPr>
+            <a:spLocks noGrp="1"/>
+          </p:cNvSpPr>
+          <p:nvPr>
+            <p:ph type="sldNum" sz="quarter" idx="12"/>
+          </p:nvPr>
+        </p:nvSpPr>
+        <p:spPr/>
+        <p:txBody>
+          <a:bodyPr/>
+          <a:lstStyle/>
+          <a:p>
+            <a:fld id="{B6F15528-21DE-4FAA-801E-634DDDAF4B2B}" type="slidenum">
+              <a:rPr lang="en-US" smtClean="0"/>
+              <a:pPr/>
+              <a:t>‹#›</a:t>
+            </a:fld>
+            <a:endParaRPr lang="en-US"/>
+          </a:p>
+        </p:txBody>
+      </p:sp>
+      <p:sp>
+        <p:nvSpPr>
+          <p:cNvPr id="12" name="TextBox 11"/>
+          <p:cNvSpPr txBox="1"/>
+          <p:nvPr/>
+        </p:nvSpPr>
+        <p:spPr>
+          <a:xfrm>
+            <a:off x="673897" y="971253"/>
+            <a:ext cx="601591" cy="1969770"/>
+          </a:xfrm>
+          <a:prstGeom prst="rect">
+            <a:avLst/>
+          </a:prstGeom>
+          <a:noFill/>
+        </p:spPr>
+        <p:txBody>
+          <a:bodyPr wrap="square" rtlCol="0">
+            <a:spAutoFit/>
+          </a:bodyPr>
+          <a:lstStyle>
+            <a:defPPr>
+              <a:defRPr lang="en-US"/>
+            </a:defPPr>
+            <a:lvl1pPr algn="r">
+              <a:defRPr sz="12200" b="0" i="0">
+                <a:solidFill>
+                  <a:schemeClr val="bg2">
+                    <a:lumMod val="40000"/>
+                    <a:lumOff val="60000"/>
+                  </a:schemeClr>
+                </a:solidFill>
+                <a:latin typeface="Arial"/>
+                <a:ea typeface="+mj-ea"/>
+                <a:cs typeface="+mj-cs"/>
+              </a:defRPr>
+            </a:lvl1pPr>
+          </a:lstStyle>
+          <a:p>
+            <a:pPr lvl="0"/>
+            <a:r>
+              <a:rPr lang="en-US" sz="12200" dirty="0"/>
+              <a:t>“</a:t>
+            </a:r>
+          </a:p>
+        </p:txBody>
+      </p:sp>
+      <p:sp>
+        <p:nvSpPr>
+          <p:cNvPr id="15" name="TextBox 14"/>
+          <p:cNvSpPr txBox="1"/>
+          <p:nvPr/>
+        </p:nvSpPr>
+        <p:spPr>
+          <a:xfrm>
+            <a:off x="6999690" y="2613787"/>
+            <a:ext cx="601591" cy="1969770"/>
+          </a:xfrm>
+          <a:prstGeom prst="rect">
+            <a:avLst/>
+          </a:prstGeom>
+          <a:noFill/>
+        </p:spPr>
+        <p:txBody>
+          <a:bodyPr wrap="square" rtlCol="0">
+            <a:spAutoFit/>
+          </a:bodyPr>
+          <a:lstStyle>
+            <a:defPPr>
+              <a:defRPr lang="en-US"/>
+            </a:defPPr>
+            <a:lvl1pPr algn="r">
+              <a:defRPr sz="12200" b="0" i="0">
+                <a:solidFill>
+                  <a:schemeClr val="bg2">
+                    <a:lumMod val="40000"/>
+                    <a:lumOff val="60000"/>
+                  </a:schemeClr>
+                </a:solidFill>
+                <a:latin typeface="Arial"/>
+                <a:ea typeface="+mj-ea"/>
+                <a:cs typeface="+mj-cs"/>
+              </a:defRPr>
+            </a:lvl1pPr>
+          </a:lstStyle>
+          <a:p>
+            <a:pPr lvl="0"/>
+            <a:r>
+              <a:rPr lang="en-US" sz="12200" dirty="0"/>
+              <a:t>”</a:t>
+            </a:r>
+          </a:p>
+        </p:txBody>
+      </p:sp>
+    </p:spTree>
+    <p:extLst>
+      <p:ext uri="{BB962C8B-B14F-4D97-AF65-F5344CB8AC3E}">
+        <p14:creationId xmlns:p14="http://schemas.microsoft.com/office/powerpoint/2010/main" val="321779992"/>
+      </p:ext>
+    </p:extLst>
+  </p:cSld>
+  <p:clrMapOvr>
+    <a:masterClrMapping/>
+  </p:clrMapOvr>
+</p:sldLayout>
+</file>
+
+<file path=ppt/slideLayouts/slideLayout24.xml><?xml version="1.0" encoding="utf-8"?>
+<p:sldLayout xmlns:a="http://schemas.openxmlformats.org/drawingml/2006/main" xmlns:r="http://schemas.openxmlformats.org/officeDocument/2006/relationships" xmlns:p="http://schemas.openxmlformats.org/presentationml/2006/main" preserve="1">
+  <p:cSld name="Name Card">
+    <p:spTree>
+      <p:nvGrpSpPr>
+        <p:cNvPr id="1" name=""/>
+        <p:cNvGrpSpPr/>
+        <p:nvPr/>
+      </p:nvGrpSpPr>
+      <p:grpSpPr>
+        <a:xfrm>
+          <a:off x="0" y="0"/>
+          <a:ext cx="0" cy="0"/>
+          <a:chOff x="0" y="0"/>
+          <a:chExt cx="0" cy="0"/>
+        </a:xfrm>
+      </p:grpSpPr>
+      <p:sp>
+        <p:nvSpPr>
+          <p:cNvPr id="2" name="Title 1"/>
+          <p:cNvSpPr>
+            <a:spLocks noGrp="1"/>
+          </p:cNvSpPr>
+          <p:nvPr>
+            <p:ph type="title"/>
+          </p:nvPr>
+        </p:nvSpPr>
+        <p:spPr>
+          <a:xfrm>
+            <a:off x="866441" y="3124201"/>
+            <a:ext cx="6620969" cy="1653180"/>
+          </a:xfrm>
+        </p:spPr>
+        <p:txBody>
+          <a:bodyPr anchor="b"/>
+          <a:lstStyle>
+            <a:lvl1pPr algn="l">
+              <a:defRPr sz="4000" b="0" cap="none"/>
+            </a:lvl1pPr>
+          </a:lstStyle>
+          <a:p>
+            <a:r>
+              <a:rPr lang="en-US" smtClean="0"/>
+              <a:t>Click to edit Master title style</a:t>
+            </a:r>
+            <a:endParaRPr lang="en-US" dirty="0"/>
+          </a:p>
+        </p:txBody>
+      </p:sp>
+      <p:sp>
+        <p:nvSpPr>
+          <p:cNvPr id="3" name="Text Placeholder 2"/>
+          <p:cNvSpPr>
+            <a:spLocks noGrp="1"/>
+          </p:cNvSpPr>
+          <p:nvPr>
+            <p:ph type="body" idx="1"/>
+          </p:nvPr>
+        </p:nvSpPr>
+        <p:spPr>
+          <a:xfrm>
+            <a:off x="866442" y="4777381"/>
+            <a:ext cx="6620968" cy="860400"/>
+          </a:xfrm>
+        </p:spPr>
+        <p:txBody>
+          <a:bodyPr anchor="t"/>
+          <a:lstStyle>
+            <a:lvl1pPr marL="0" indent="0" algn="l">
+              <a:buNone/>
+              <a:defRPr sz="2000" cap="none">
+                <a:solidFill>
+                  <a:schemeClr val="bg2">
+                    <a:lumMod val="40000"/>
+                    <a:lumOff val="60000"/>
+                  </a:schemeClr>
+                </a:solidFill>
+              </a:defRPr>
+            </a:lvl1pPr>
+            <a:lvl2pPr marL="457200" indent="0">
+              <a:buNone/>
+              <a:defRPr sz="1800">
+                <a:solidFill>
+                  <a:schemeClr val="tx1">
+                    <a:tint val="75000"/>
+                  </a:schemeClr>
+                </a:solidFill>
+              </a:defRPr>
+            </a:lvl2pPr>
+            <a:lvl3pPr marL="914400" indent="0">
+              <a:buNone/>
+              <a:defRPr sz="1600">
+                <a:solidFill>
+                  <a:schemeClr val="tx1">
+                    <a:tint val="75000"/>
+                  </a:schemeClr>
+                </a:solidFill>
+              </a:defRPr>
+            </a:lvl3pPr>
+            <a:lvl4pPr marL="1371600" indent="0">
+              <a:buNone/>
+              <a:defRPr sz="1400">
+                <a:solidFill>
+                  <a:schemeClr val="tx1">
+                    <a:tint val="75000"/>
+                  </a:schemeClr>
+                </a:solidFill>
+              </a:defRPr>
+            </a:lvl4pPr>
+            <a:lvl5pPr marL="1828800" indent="0">
+              <a:buNone/>
+              <a:defRPr sz="1400">
+                <a:solidFill>
+                  <a:schemeClr val="tx1">
+                    <a:tint val="75000"/>
+                  </a:schemeClr>
+                </a:solidFill>
+              </a:defRPr>
+            </a:lvl5pPr>
+            <a:lvl6pPr marL="2286000" indent="0">
+              <a:buNone/>
+              <a:defRPr sz="1400">
+                <a:solidFill>
+                  <a:schemeClr val="tx1">
+                    <a:tint val="75000"/>
+                  </a:schemeClr>
+                </a:solidFill>
+              </a:defRPr>
+            </a:lvl6pPr>
+            <a:lvl7pPr marL="2743200" indent="0">
+              <a:buNone/>
+              <a:defRPr sz="1400">
+                <a:solidFill>
+                  <a:schemeClr val="tx1">
+                    <a:tint val="75000"/>
+                  </a:schemeClr>
+                </a:solidFill>
+              </a:defRPr>
+            </a:lvl7pPr>
+            <a:lvl8pPr marL="3200400" indent="0">
+              <a:buNone/>
+              <a:defRPr sz="1400">
+                <a:solidFill>
+                  <a:schemeClr val="tx1">
+                    <a:tint val="75000"/>
+                  </a:schemeClr>
+                </a:solidFill>
+              </a:defRPr>
+            </a:lvl8pPr>
+            <a:lvl9pPr marL="3657600" indent="0">
+              <a:buNone/>
+              <a:defRPr sz="1400">
+                <a:solidFill>
+                  <a:schemeClr val="tx1">
+                    <a:tint val="75000"/>
+                  </a:schemeClr>
+                </a:solidFill>
+              </a:defRPr>
+            </a:lvl9pPr>
+          </a:lstStyle>
+          <a:p>
+            <a:pPr lvl="0"/>
+            <a:r>
+              <a:rPr lang="en-US" smtClean="0"/>
+              <a:t>Click to edit Master text styles</a:t>
+            </a:r>
+          </a:p>
+        </p:txBody>
+      </p:sp>
+      <p:sp>
+        <p:nvSpPr>
+          <p:cNvPr id="4" name="Date Placeholder 3"/>
+          <p:cNvSpPr>
+            <a:spLocks noGrp="1"/>
+          </p:cNvSpPr>
+          <p:nvPr>
+            <p:ph type="dt" sz="half" idx="10"/>
+          </p:nvPr>
+        </p:nvSpPr>
+        <p:spPr/>
+        <p:txBody>
+          <a:bodyPr/>
+          <a:lstStyle/>
+          <a:p>
+            <a:fld id="{1D8BD707-D9CF-40AE-B4C6-C98DA3205C09}" type="datetimeFigureOut">
+              <a:rPr lang="en-US" smtClean="0"/>
+              <a:pPr/>
+              <a:t>7/30/2025</a:t>
+            </a:fld>
+            <a:endParaRPr lang="en-US"/>
+          </a:p>
+        </p:txBody>
+      </p:sp>
+      <p:sp>
+        <p:nvSpPr>
+          <p:cNvPr id="5" name="Footer Placeholder 4"/>
+          <p:cNvSpPr>
+            <a:spLocks noGrp="1"/>
+          </p:cNvSpPr>
+          <p:nvPr>
+            <p:ph type="ftr" sz="quarter" idx="11"/>
+          </p:nvPr>
+        </p:nvSpPr>
+        <p:spPr/>
+        <p:txBody>
+          <a:bodyPr/>
+          <a:lstStyle/>
+          <a:p>
+            <a:endParaRPr lang="en-US"/>
+          </a:p>
+        </p:txBody>
+      </p:sp>
+      <p:sp>
+        <p:nvSpPr>
+          <p:cNvPr id="6" name="Slide Number Placeholder 5"/>
+          <p:cNvSpPr>
+            <a:spLocks noGrp="1"/>
+          </p:cNvSpPr>
+          <p:nvPr>
+            <p:ph type="sldNum" sz="quarter" idx="12"/>
+          </p:nvPr>
+        </p:nvSpPr>
+        <p:spPr/>
+        <p:txBody>
+          <a:bodyPr/>
+          <a:lstStyle/>
+          <a:p>
+            <a:fld id="{B6F15528-21DE-4FAA-801E-634DDDAF4B2B}" type="slidenum">
+              <a:rPr lang="en-US" smtClean="0"/>
+              <a:pPr/>
+              <a:t>‹#›</a:t>
+            </a:fld>
+            <a:endParaRPr lang="en-US"/>
+          </a:p>
+        </p:txBody>
+      </p:sp>
+    </p:spTree>
+    <p:extLst>
+      <p:ext uri="{BB962C8B-B14F-4D97-AF65-F5344CB8AC3E}">
+        <p14:creationId xmlns:p14="http://schemas.microsoft.com/office/powerpoint/2010/main" val="1065552485"/>
+      </p:ext>
+    </p:extLst>
+  </p:cSld>
+  <p:clrMapOvr>
+    <a:masterClrMapping/>
+  </p:clrMapOvr>
+</p:sldLayout>
+</file>
+
+<file path=ppt/slideLayouts/slideLayout25.xml><?xml version="1.0" encoding="utf-8"?>
+<p:sldLayout xmlns:a="http://schemas.openxmlformats.org/drawingml/2006/main" xmlns:r="http://schemas.openxmlformats.org/officeDocument/2006/relationships" xmlns:p="http://schemas.openxmlformats.org/presentationml/2006/main" preserve="1">
+  <p:cSld name="3 Column">
+    <p:spTree>
+      <p:nvGrpSpPr>
+        <p:cNvPr id="1" name=""/>
+        <p:cNvGrpSpPr/>
+        <p:nvPr/>
+      </p:nvGrpSpPr>
+      <p:grpSpPr>
+        <a:xfrm>
+          <a:off x="0" y="0"/>
+          <a:ext cx="0" cy="0"/>
+          <a:chOff x="0" y="0"/>
+          <a:chExt cx="0" cy="0"/>
+        </a:xfrm>
+      </p:grpSpPr>
+      <p:sp>
+        <p:nvSpPr>
+          <p:cNvPr id="2" name="Title 1"/>
+          <p:cNvSpPr>
+            <a:spLocks noGrp="1"/>
+          </p:cNvSpPr>
+          <p:nvPr>
+            <p:ph type="title"/>
+          </p:nvPr>
+        </p:nvSpPr>
+        <p:spPr/>
+        <p:txBody>
+          <a:bodyPr/>
+          <a:lstStyle>
+            <a:lvl1pPr>
+              <a:defRPr sz="4200"/>
+            </a:lvl1pPr>
+          </a:lstStyle>
+          <a:p>
+            <a:r>
+              <a:rPr lang="en-US" smtClean="0"/>
+              <a:t>Click to edit Master title style</a:t>
+            </a:r>
+            <a:endParaRPr lang="en-US" dirty="0"/>
+          </a:p>
+        </p:txBody>
+      </p:sp>
+      <p:sp>
+        <p:nvSpPr>
+          <p:cNvPr id="3" name="Text Placeholder 2"/>
+          <p:cNvSpPr>
+            <a:spLocks noGrp="1"/>
+          </p:cNvSpPr>
+          <p:nvPr>
+            <p:ph type="body" idx="1"/>
+          </p:nvPr>
+        </p:nvSpPr>
+        <p:spPr>
+          <a:xfrm>
+            <a:off x="474834" y="1981200"/>
+            <a:ext cx="2210725" cy="576262"/>
+          </a:xfrm>
+        </p:spPr>
+        <p:txBody>
+          <a:bodyPr anchor="b">
+            <a:noAutofit/>
+          </a:bodyPr>
+          <a:lstStyle>
+            <a:lvl1pPr marL="0" indent="0">
+              <a:buNone/>
+              <a:defRPr sz="2400" b="0">
+                <a:solidFill>
+                  <a:schemeClr val="bg2">
+                    <a:lumMod val="40000"/>
+                    <a:lumOff val="60000"/>
+                  </a:schemeClr>
+                </a:solidFill>
+              </a:defRPr>
+            </a:lvl1pPr>
+            <a:lvl2pPr marL="457200" indent="0">
+              <a:buNone/>
+              <a:defRPr sz="2000" b="1"/>
+            </a:lvl2pPr>
+            <a:lvl3pPr marL="914400" indent="0">
+              <a:buNone/>
+              <a:defRPr sz="1800" b="1"/>
+            </a:lvl3pPr>
+            <a:lvl4pPr marL="1371600" indent="0">
+              <a:buNone/>
+              <a:defRPr sz="1600" b="1"/>
+            </a:lvl4pPr>
+            <a:lvl5pPr marL="1828800" indent="0">
+              <a:buNone/>
+              <a:defRPr sz="1600" b="1"/>
+            </a:lvl5pPr>
+            <a:lvl6pPr marL="2286000" indent="0">
+              <a:buNone/>
+              <a:defRPr sz="1600" b="1"/>
+            </a:lvl6pPr>
+            <a:lvl7pPr marL="2743200" indent="0">
+              <a:buNone/>
+              <a:defRPr sz="1600" b="1"/>
+            </a:lvl7pPr>
+            <a:lvl8pPr marL="3200400" indent="0">
+              <a:buNone/>
+              <a:defRPr sz="1600" b="1"/>
+            </a:lvl8pPr>
+            <a:lvl9pPr marL="3657600" indent="0">
+              <a:buNone/>
+              <a:defRPr sz="1600" b="1"/>
+            </a:lvl9pPr>
+          </a:lstStyle>
+          <a:p>
+            <a:pPr lvl="0"/>
+            <a:r>
+              <a:rPr lang="en-US" smtClean="0"/>
+              <a:t>Click to edit Master text styles</a:t>
+            </a:r>
+          </a:p>
+        </p:txBody>
+      </p:sp>
+      <p:sp>
+        <p:nvSpPr>
+          <p:cNvPr id="16" name="Text Placeholder 3"/>
+          <p:cNvSpPr>
+            <a:spLocks noGrp="1"/>
+          </p:cNvSpPr>
+          <p:nvPr>
+            <p:ph type="body" sz="half" idx="15"/>
+          </p:nvPr>
+        </p:nvSpPr>
+        <p:spPr>
+          <a:xfrm>
+            <a:off x="489475" y="2667000"/>
+            <a:ext cx="2196084" cy="3589338"/>
+          </a:xfrm>
+        </p:spPr>
+        <p:txBody>
+          <a:bodyPr anchor="t">
+            <a:normAutofit/>
+          </a:bodyPr>
+          <a:lstStyle>
+            <a:lvl1pPr marL="0" indent="0">
+              <a:buNone/>
+              <a:defRPr sz="1400"/>
+            </a:lvl1pPr>
+            <a:lvl2pPr marL="457200" indent="0">
+              <a:buNone/>
+              <a:defRPr sz="1200"/>
+            </a:lvl2pPr>
+            <a:lvl3pPr marL="914400" indent="0">
+              <a:buNone/>
+              <a:defRPr sz="1000"/>
+            </a:lvl3pPr>
+            <a:lvl4pPr marL="1371600" indent="0">
+              <a:buNone/>
+              <a:defRPr sz="900"/>
+            </a:lvl4pPr>
+            <a:lvl5pPr marL="1828800" indent="0">
+              <a:buNone/>
+              <a:defRPr sz="900"/>
+            </a:lvl5pPr>
+            <a:lvl6pPr marL="2286000" indent="0">
+              <a:buNone/>
+              <a:defRPr sz="900"/>
+            </a:lvl6pPr>
+            <a:lvl7pPr marL="2743200" indent="0">
+              <a:buNone/>
+              <a:defRPr sz="900"/>
+            </a:lvl7pPr>
+            <a:lvl8pPr marL="3200400" indent="0">
+              <a:buNone/>
+              <a:defRPr sz="900"/>
+            </a:lvl8pPr>
+            <a:lvl9pPr marL="3657600" indent="0">
+              <a:buNone/>
+              <a:defRPr sz="900"/>
+            </a:lvl9pPr>
+          </a:lstStyle>
+          <a:p>
+            <a:pPr lvl="0"/>
+            <a:r>
+              <a:rPr lang="en-US" smtClean="0"/>
+              <a:t>Click to edit Master text styles</a:t>
+            </a:r>
+          </a:p>
+        </p:txBody>
+      </p:sp>
+      <p:sp>
+        <p:nvSpPr>
+          <p:cNvPr id="5" name="Text Placeholder 4"/>
+          <p:cNvSpPr>
+            <a:spLocks noGrp="1"/>
+          </p:cNvSpPr>
+          <p:nvPr>
+            <p:ph type="body" sz="quarter" idx="3"/>
+          </p:nvPr>
+        </p:nvSpPr>
+        <p:spPr>
+          <a:xfrm>
+            <a:off x="2913504" y="1981200"/>
+            <a:ext cx="2202754" cy="576262"/>
+          </a:xfrm>
+        </p:spPr>
+        <p:txBody>
+          <a:bodyPr anchor="b">
+            <a:noAutofit/>
+          </a:bodyPr>
+          <a:lstStyle>
+            <a:lvl1pPr marL="0" indent="0">
+              <a:buNone/>
+              <a:defRPr sz="2400" b="0">
+                <a:solidFill>
+                  <a:schemeClr val="bg2">
+                    <a:lumMod val="40000"/>
+                    <a:lumOff val="60000"/>
+                  </a:schemeClr>
+                </a:solidFill>
+              </a:defRPr>
+            </a:lvl1pPr>
+            <a:lvl2pPr marL="457200" indent="0">
+              <a:buNone/>
+              <a:defRPr sz="2000" b="1"/>
+            </a:lvl2pPr>
+            <a:lvl3pPr marL="914400" indent="0">
+              <a:buNone/>
+              <a:defRPr sz="1800" b="1"/>
+            </a:lvl3pPr>
+            <a:lvl4pPr marL="1371600" indent="0">
+              <a:buNone/>
+              <a:defRPr sz="1600" b="1"/>
+            </a:lvl4pPr>
+            <a:lvl5pPr marL="1828800" indent="0">
+              <a:buNone/>
+              <a:defRPr sz="1600" b="1"/>
+            </a:lvl5pPr>
+            <a:lvl6pPr marL="2286000" indent="0">
+              <a:buNone/>
+              <a:defRPr sz="1600" b="1"/>
+            </a:lvl6pPr>
+            <a:lvl7pPr marL="2743200" indent="0">
+              <a:buNone/>
+              <a:defRPr sz="1600" b="1"/>
+            </a:lvl7pPr>
+            <a:lvl8pPr marL="3200400" indent="0">
+              <a:buNone/>
+              <a:defRPr sz="1600" b="1"/>
+            </a:lvl8pPr>
+            <a:lvl9pPr marL="3657600" indent="0">
+              <a:buNone/>
+              <a:defRPr sz="1600" b="1"/>
+            </a:lvl9pPr>
+          </a:lstStyle>
+          <a:p>
+            <a:pPr lvl="0"/>
+            <a:r>
+              <a:rPr lang="en-US" smtClean="0"/>
+              <a:t>Click to edit Master text styles</a:t>
+            </a:r>
+          </a:p>
+        </p:txBody>
+      </p:sp>
+      <p:sp>
+        <p:nvSpPr>
+          <p:cNvPr id="19" name="Text Placeholder 3"/>
+          <p:cNvSpPr>
+            <a:spLocks noGrp="1"/>
+          </p:cNvSpPr>
+          <p:nvPr>
+            <p:ph type="body" sz="half" idx="16"/>
+          </p:nvPr>
+        </p:nvSpPr>
+        <p:spPr>
+          <a:xfrm>
+            <a:off x="2905586" y="2667000"/>
+            <a:ext cx="2210671" cy="3589338"/>
+          </a:xfrm>
+        </p:spPr>
+        <p:txBody>
+          <a:bodyPr anchor="t">
+            <a:normAutofit/>
+          </a:bodyPr>
+          <a:lstStyle>
+            <a:lvl1pPr marL="0" indent="0">
+              <a:buNone/>
+              <a:defRPr sz="1400"/>
+            </a:lvl1pPr>
+            <a:lvl2pPr marL="457200" indent="0">
+              <a:buNone/>
+              <a:defRPr sz="1200"/>
+            </a:lvl2pPr>
+            <a:lvl3pPr marL="914400" indent="0">
+              <a:buNone/>
+              <a:defRPr sz="1000"/>
+            </a:lvl3pPr>
+            <a:lvl4pPr marL="1371600" indent="0">
+              <a:buNone/>
+              <a:defRPr sz="900"/>
+            </a:lvl4pPr>
+            <a:lvl5pPr marL="1828800" indent="0">
+              <a:buNone/>
+              <a:defRPr sz="900"/>
+            </a:lvl5pPr>
+            <a:lvl6pPr marL="2286000" indent="0">
+              <a:buNone/>
+              <a:defRPr sz="900"/>
+            </a:lvl6pPr>
+            <a:lvl7pPr marL="2743200" indent="0">
+              <a:buNone/>
+              <a:defRPr sz="900"/>
+            </a:lvl7pPr>
+            <a:lvl8pPr marL="3200400" indent="0">
+              <a:buNone/>
+              <a:defRPr sz="900"/>
+            </a:lvl8pPr>
+            <a:lvl9pPr marL="3657600" indent="0">
+              <a:buNone/>
+              <a:defRPr sz="900"/>
+            </a:lvl9pPr>
+          </a:lstStyle>
+          <a:p>
+            <a:pPr lvl="0"/>
+            <a:r>
+              <a:rPr lang="en-US" smtClean="0"/>
+              <a:t>Click to edit Master text styles</a:t>
+            </a:r>
+          </a:p>
+        </p:txBody>
+      </p:sp>
+      <p:sp>
+        <p:nvSpPr>
+          <p:cNvPr id="14" name="Text Placeholder 4"/>
+          <p:cNvSpPr>
+            <a:spLocks noGrp="1"/>
+          </p:cNvSpPr>
+          <p:nvPr>
+            <p:ph type="body" sz="quarter" idx="13"/>
+          </p:nvPr>
+        </p:nvSpPr>
+        <p:spPr>
+          <a:xfrm>
+            <a:off x="5344917" y="1981200"/>
+            <a:ext cx="2199658" cy="576262"/>
+          </a:xfrm>
+        </p:spPr>
+        <p:txBody>
+          <a:bodyPr anchor="b">
+            <a:noAutofit/>
+          </a:bodyPr>
+          <a:lstStyle>
+            <a:lvl1pPr marL="0" indent="0">
+              <a:buNone/>
+              <a:defRPr sz="2400" b="0">
+                <a:solidFill>
+                  <a:schemeClr val="bg2">
+                    <a:lumMod val="40000"/>
+                    <a:lumOff val="60000"/>
+                  </a:schemeClr>
+                </a:solidFill>
+              </a:defRPr>
+            </a:lvl1pPr>
+            <a:lvl2pPr marL="457200" indent="0">
+              <a:buNone/>
+              <a:defRPr sz="2000" b="1"/>
+            </a:lvl2pPr>
+            <a:lvl3pPr marL="914400" indent="0">
+              <a:buNone/>
+              <a:defRPr sz="1800" b="1"/>
+            </a:lvl3pPr>
+            <a:lvl4pPr marL="1371600" indent="0">
+              <a:buNone/>
+              <a:defRPr sz="1600" b="1"/>
+            </a:lvl4pPr>
+            <a:lvl5pPr marL="1828800" indent="0">
+              <a:buNone/>
+              <a:defRPr sz="1600" b="1"/>
+            </a:lvl5pPr>
+            <a:lvl6pPr marL="2286000" indent="0">
+              <a:buNone/>
+              <a:defRPr sz="1600" b="1"/>
+            </a:lvl6pPr>
+            <a:lvl7pPr marL="2743200" indent="0">
+              <a:buNone/>
+              <a:defRPr sz="1600" b="1"/>
+            </a:lvl7pPr>
+            <a:lvl8pPr marL="3200400" indent="0">
+              <a:buNone/>
+              <a:defRPr sz="1600" b="1"/>
+            </a:lvl8pPr>
+            <a:lvl9pPr marL="3657600" indent="0">
+              <a:buNone/>
+              <a:defRPr sz="1600" b="1"/>
+            </a:lvl9pPr>
+          </a:lstStyle>
+          <a:p>
+            <a:pPr lvl="0"/>
+            <a:r>
+              <a:rPr lang="en-US" smtClean="0"/>
+              <a:t>Click to edit Master text styles</a:t>
+            </a:r>
+          </a:p>
+        </p:txBody>
+      </p:sp>
+      <p:sp>
+        <p:nvSpPr>
+          <p:cNvPr id="20" name="Text Placeholder 3"/>
+          <p:cNvSpPr>
+            <a:spLocks noGrp="1"/>
+          </p:cNvSpPr>
+          <p:nvPr>
+            <p:ph type="body" sz="half" idx="17"/>
+          </p:nvPr>
+        </p:nvSpPr>
+        <p:spPr>
+          <a:xfrm>
+            <a:off x="5344917" y="2667000"/>
+            <a:ext cx="2199658" cy="3589338"/>
+          </a:xfrm>
+        </p:spPr>
+        <p:txBody>
+          <a:bodyPr anchor="t">
+            <a:normAutofit/>
+          </a:bodyPr>
+          <a:lstStyle>
+            <a:lvl1pPr marL="0" indent="0">
+              <a:buNone/>
+              <a:defRPr sz="1400"/>
+            </a:lvl1pPr>
+            <a:lvl2pPr marL="457200" indent="0">
+              <a:buNone/>
+              <a:defRPr sz="1200"/>
+            </a:lvl2pPr>
+            <a:lvl3pPr marL="914400" indent="0">
+              <a:buNone/>
+              <a:defRPr sz="1000"/>
+            </a:lvl3pPr>
+            <a:lvl4pPr marL="1371600" indent="0">
+              <a:buNone/>
+              <a:defRPr sz="900"/>
+            </a:lvl4pPr>
+            <a:lvl5pPr marL="1828800" indent="0">
+              <a:buNone/>
+              <a:defRPr sz="900"/>
+            </a:lvl5pPr>
+            <a:lvl6pPr marL="2286000" indent="0">
+              <a:buNone/>
+              <a:defRPr sz="900"/>
+            </a:lvl6pPr>
+            <a:lvl7pPr marL="2743200" indent="0">
+              <a:buNone/>
+              <a:defRPr sz="900"/>
+            </a:lvl7pPr>
+            <a:lvl8pPr marL="3200400" indent="0">
+              <a:buNone/>
+              <a:defRPr sz="900"/>
+            </a:lvl8pPr>
+            <a:lvl9pPr marL="3657600" indent="0">
+              <a:buNone/>
+              <a:defRPr sz="900"/>
+            </a:lvl9pPr>
+          </a:lstStyle>
+          <a:p>
+            <a:pPr lvl="0"/>
+            <a:r>
+              <a:rPr lang="en-US" smtClean="0"/>
+              <a:t>Click to edit Master text styles</a:t>
+            </a:r>
+          </a:p>
+        </p:txBody>
+      </p:sp>
+      <p:cxnSp>
+        <p:nvCxnSpPr>
+          <p:cNvPr id="17" name="Straight Connector 16"/>
+          <p:cNvCxnSpPr/>
+          <p:nvPr/>
+        </p:nvCxnSpPr>
+        <p:spPr>
+          <a:xfrm>
+            <a:off x="2795334" y="2133600"/>
+            <a:ext cx="0" cy="3962400"/>
+          </a:xfrm>
+          <a:prstGeom prst="line">
+            <a:avLst/>
+          </a:prstGeom>
+          <a:ln w="12700" cmpd="sng">
+            <a:solidFill>
+              <a:schemeClr val="bg2">
+                <a:lumMod val="40000"/>
+                <a:lumOff val="60000"/>
+                <a:alpha val="40000"/>
+              </a:schemeClr>
+            </a:solidFill>
+          </a:ln>
+        </p:spPr>
+        <p:style>
+          <a:lnRef idx="2">
+            <a:schemeClr val="accent1"/>
+          </a:lnRef>
+          <a:fillRef idx="0">
+            <a:schemeClr val="accent1"/>
+          </a:fillRef>
+          <a:effectRef idx="1">
+            <a:schemeClr val="accent1"/>
+          </a:effectRef>
+          <a:fontRef idx="minor">
+            <a:schemeClr val="tx1"/>
+          </a:fontRef>
+        </p:style>
+      </p:cxnSp>
+      <p:cxnSp>
+        <p:nvCxnSpPr>
+          <p:cNvPr id="18" name="Straight Connector 17"/>
+          <p:cNvCxnSpPr/>
+          <p:nvPr/>
+        </p:nvCxnSpPr>
+        <p:spPr>
+          <a:xfrm>
+            <a:off x="5223030" y="2133600"/>
+            <a:ext cx="0" cy="3966882"/>
+          </a:xfrm>
+          <a:prstGeom prst="line">
+            <a:avLst/>
+          </a:prstGeom>
+          <a:ln w="12700" cmpd="sng">
+            <a:solidFill>
+              <a:schemeClr val="bg2">
+                <a:lumMod val="40000"/>
+                <a:lumOff val="60000"/>
+                <a:alpha val="40000"/>
+              </a:schemeClr>
+            </a:solidFill>
+          </a:ln>
+        </p:spPr>
+        <p:style>
+          <a:lnRef idx="2">
+            <a:schemeClr val="accent1"/>
+          </a:lnRef>
+          <a:fillRef idx="0">
+            <a:schemeClr val="accent1"/>
+          </a:fillRef>
+          <a:effectRef idx="1">
+            <a:schemeClr val="accent1"/>
+          </a:effectRef>
+          <a:fontRef idx="minor">
+            <a:schemeClr val="tx1"/>
+          </a:fontRef>
+        </p:style>
+      </p:cxnSp>
+      <p:sp>
+        <p:nvSpPr>
+          <p:cNvPr id="7" name="Date Placeholder 3"/>
+          <p:cNvSpPr>
+            <a:spLocks noGrp="1"/>
+          </p:cNvSpPr>
+          <p:nvPr>
+            <p:ph type="dt" sz="half" idx="10"/>
+          </p:nvPr>
+        </p:nvSpPr>
+        <p:spPr/>
+        <p:txBody>
+          <a:bodyPr/>
+          <a:lstStyle/>
+          <a:p>
+            <a:fld id="{1D8BD707-D9CF-40AE-B4C6-C98DA3205C09}" type="datetimeFigureOut">
+              <a:rPr lang="en-US" smtClean="0"/>
+              <a:pPr/>
+              <a:t>7/30/2025</a:t>
+            </a:fld>
+            <a:endParaRPr lang="en-US"/>
+          </a:p>
+        </p:txBody>
+      </p:sp>
+      <p:sp>
+        <p:nvSpPr>
+          <p:cNvPr id="4" name="Footer Placeholder 4"/>
+          <p:cNvSpPr>
+            <a:spLocks noGrp="1"/>
+          </p:cNvSpPr>
+          <p:nvPr>
+            <p:ph type="ftr" sz="quarter" idx="11"/>
+          </p:nvPr>
+        </p:nvSpPr>
+        <p:spPr/>
+        <p:txBody>
+          <a:bodyPr/>
+          <a:lstStyle/>
+          <a:p>
+            <a:endParaRPr lang="en-US"/>
+          </a:p>
+        </p:txBody>
+      </p:sp>
+      <p:sp>
+        <p:nvSpPr>
+          <p:cNvPr id="6" name="Slide Number Placeholder 5"/>
+          <p:cNvSpPr>
+            <a:spLocks noGrp="1"/>
+          </p:cNvSpPr>
+          <p:nvPr>
+            <p:ph type="sldNum" sz="quarter" idx="12"/>
+          </p:nvPr>
+        </p:nvSpPr>
+        <p:spPr/>
+        <p:txBody>
+          <a:bodyPr/>
+          <a:lstStyle/>
+          <a:p>
+            <a:fld id="{B6F15528-21DE-4FAA-801E-634DDDAF4B2B}" type="slidenum">
+              <a:rPr lang="en-US" smtClean="0"/>
+              <a:pPr/>
+              <a:t>‹#›</a:t>
+            </a:fld>
+            <a:endParaRPr lang="en-US"/>
+          </a:p>
+        </p:txBody>
+      </p:sp>
+    </p:spTree>
+    <p:extLst>
+      <p:ext uri="{BB962C8B-B14F-4D97-AF65-F5344CB8AC3E}">
+        <p14:creationId xmlns:p14="http://schemas.microsoft.com/office/powerpoint/2010/main" val="2348037627"/>
+      </p:ext>
+    </p:extLst>
+  </p:cSld>
+  <p:clrMapOvr>
+    <a:masterClrMapping/>
+  </p:clrMapOvr>
+</p:sldLayout>
+</file>
+
+<file path=ppt/slideLayouts/slideLayout26.xml><?xml version="1.0" encoding="utf-8"?>
+<p:sldLayout xmlns:a="http://schemas.openxmlformats.org/drawingml/2006/main" xmlns:r="http://schemas.openxmlformats.org/officeDocument/2006/relationships" xmlns:p="http://schemas.openxmlformats.org/presentationml/2006/main" preserve="1">
+  <p:cSld name="3 Picture Column">
+    <p:spTree>
+      <p:nvGrpSpPr>
+        <p:cNvPr id="1" name=""/>
+        <p:cNvGrpSpPr/>
+        <p:nvPr/>
+      </p:nvGrpSpPr>
+      <p:grpSpPr>
+        <a:xfrm>
+          <a:off x="0" y="0"/>
+          <a:ext cx="0" cy="0"/>
+          <a:chOff x="0" y="0"/>
+          <a:chExt cx="0" cy="0"/>
+        </a:xfrm>
+      </p:grpSpPr>
+      <p:sp>
+        <p:nvSpPr>
+          <p:cNvPr id="2" name="Title 1"/>
+          <p:cNvSpPr>
+            <a:spLocks noGrp="1"/>
+          </p:cNvSpPr>
+          <p:nvPr>
+            <p:ph type="title"/>
+          </p:nvPr>
+        </p:nvSpPr>
+        <p:spPr/>
+        <p:txBody>
+          <a:bodyPr/>
+          <a:lstStyle>
+            <a:lvl1pPr>
+              <a:defRPr sz="4200"/>
+            </a:lvl1pPr>
+          </a:lstStyle>
+          <a:p>
+            <a:r>
+              <a:rPr lang="en-US" smtClean="0"/>
+              <a:t>Click to edit Master title style</a:t>
+            </a:r>
+            <a:endParaRPr lang="en-US" dirty="0"/>
+          </a:p>
+        </p:txBody>
+      </p:sp>
+      <p:sp>
+        <p:nvSpPr>
+          <p:cNvPr id="3" name="Text Placeholder 2"/>
+          <p:cNvSpPr>
+            <a:spLocks noGrp="1"/>
+          </p:cNvSpPr>
+          <p:nvPr>
+            <p:ph type="body" idx="1"/>
+          </p:nvPr>
+        </p:nvSpPr>
+        <p:spPr>
+          <a:xfrm>
+            <a:off x="489475" y="4250949"/>
+            <a:ext cx="2205612" cy="576262"/>
+          </a:xfrm>
+        </p:spPr>
+        <p:txBody>
+          <a:bodyPr anchor="b">
+            <a:noAutofit/>
+          </a:bodyPr>
+          <a:lstStyle>
+            <a:lvl1pPr marL="0" indent="0">
+              <a:buNone/>
+              <a:defRPr sz="2400" b="0">
+                <a:solidFill>
+                  <a:schemeClr val="bg2">
+                    <a:lumMod val="40000"/>
+                    <a:lumOff val="60000"/>
+                  </a:schemeClr>
+                </a:solidFill>
+              </a:defRPr>
+            </a:lvl1pPr>
+            <a:lvl2pPr marL="457200" indent="0">
+              <a:buNone/>
+              <a:defRPr sz="2000" b="1"/>
+            </a:lvl2pPr>
+            <a:lvl3pPr marL="914400" indent="0">
+              <a:buNone/>
+              <a:defRPr sz="1800" b="1"/>
+            </a:lvl3pPr>
+            <a:lvl4pPr marL="1371600" indent="0">
+              <a:buNone/>
+              <a:defRPr sz="1600" b="1"/>
+            </a:lvl4pPr>
+            <a:lvl5pPr marL="1828800" indent="0">
+              <a:buNone/>
+              <a:defRPr sz="1600" b="1"/>
+            </a:lvl5pPr>
+            <a:lvl6pPr marL="2286000" indent="0">
+              <a:buNone/>
+              <a:defRPr sz="1600" b="1"/>
+            </a:lvl6pPr>
+            <a:lvl7pPr marL="2743200" indent="0">
+              <a:buNone/>
+              <a:defRPr sz="1600" b="1"/>
+            </a:lvl7pPr>
+            <a:lvl8pPr marL="3200400" indent="0">
+              <a:buNone/>
+              <a:defRPr sz="1600" b="1"/>
+            </a:lvl8pPr>
+            <a:lvl9pPr marL="3657600" indent="0">
+              <a:buNone/>
+              <a:defRPr sz="1600" b="1"/>
+            </a:lvl9pPr>
+          </a:lstStyle>
+          <a:p>
+            <a:pPr lvl="0"/>
+            <a:r>
+              <a:rPr lang="en-US" smtClean="0"/>
+              <a:t>Click to edit Master text styles</a:t>
+            </a:r>
+          </a:p>
+        </p:txBody>
+      </p:sp>
+      <p:sp>
+        <p:nvSpPr>
+          <p:cNvPr id="29" name="Picture Placeholder 2"/>
+          <p:cNvSpPr>
+            <a:spLocks noGrp="1" noChangeAspect="1"/>
+          </p:cNvSpPr>
+          <p:nvPr>
+            <p:ph type="pic" idx="15"/>
+          </p:nvPr>
+        </p:nvSpPr>
+        <p:spPr>
+          <a:xfrm>
+            <a:off x="489475" y="2209800"/>
+            <a:ext cx="2205612" cy="1524000"/>
+          </a:xfrm>
+          <a:prstGeom prst="roundRect">
+            <a:avLst>
+              <a:gd name="adj" fmla="val 1858"/>
+            </a:avLst>
+          </a:prstGeom>
+          <a:effectLst>
+            <a:outerShdw blurRad="50800" dist="50800" dir="5400000" algn="tl" rotWithShape="0">
+              <a:srgbClr val="000000">
+                <a:alpha val="43000"/>
+              </a:srgbClr>
+            </a:outerShdw>
+          </a:effectLst>
+        </p:spPr>
+        <p:txBody>
+          <a:bodyPr anchor="t">
+            <a:normAutofit/>
+          </a:bodyPr>
+          <a:lstStyle>
+            <a:lvl1pPr marL="0" indent="0" algn="ctr">
+              <a:buNone/>
+              <a:defRPr sz="1600"/>
+            </a:lvl1pPr>
+            <a:lvl2pPr marL="457200" indent="0">
+              <a:buNone/>
+              <a:defRPr sz="1600"/>
+            </a:lvl2pPr>
+            <a:lvl3pPr marL="914400" indent="0">
+              <a:buNone/>
+              <a:defRPr sz="1600"/>
+            </a:lvl3pPr>
+            <a:lvl4pPr marL="1371600" indent="0">
+              <a:buNone/>
+              <a:defRPr sz="1600"/>
+            </a:lvl4pPr>
+            <a:lvl5pPr marL="1828800" indent="0">
+              <a:buNone/>
+              <a:defRPr sz="1600"/>
+            </a:lvl5pPr>
+            <a:lvl6pPr marL="2286000" indent="0">
+              <a:buNone/>
+              <a:defRPr sz="1600"/>
+            </a:lvl6pPr>
+            <a:lvl7pPr marL="2743200" indent="0">
+              <a:buNone/>
+              <a:defRPr sz="1600"/>
+            </a:lvl7pPr>
+            <a:lvl8pPr marL="3200400" indent="0">
+              <a:buNone/>
+              <a:defRPr sz="1600"/>
+            </a:lvl8pPr>
+            <a:lvl9pPr marL="3657600" indent="0">
+              <a:buNone/>
+              <a:defRPr sz="1600"/>
+            </a:lvl9pPr>
+          </a:lstStyle>
+          <a:p>
+            <a:r>
+              <a:rPr lang="en-US" smtClean="0"/>
+              <a:t>Click icon to add picture</a:t>
+            </a:r>
+            <a:endParaRPr lang="en-US" dirty="0"/>
+          </a:p>
+        </p:txBody>
+      </p:sp>
+      <p:sp>
+        <p:nvSpPr>
+          <p:cNvPr id="22" name="Text Placeholder 3"/>
+          <p:cNvSpPr>
+            <a:spLocks noGrp="1"/>
+          </p:cNvSpPr>
+          <p:nvPr>
+            <p:ph type="body" sz="half" idx="18"/>
+          </p:nvPr>
+        </p:nvSpPr>
+        <p:spPr>
+          <a:xfrm>
+            <a:off x="489475" y="4827212"/>
+            <a:ext cx="2205612" cy="659189"/>
+          </a:xfrm>
+        </p:spPr>
+        <p:txBody>
+          <a:bodyPr anchor="t">
+            <a:normAutofit/>
+          </a:bodyPr>
+          <a:lstStyle>
+            <a:lvl1pPr marL="0" indent="0">
+              <a:buNone/>
+              <a:defRPr sz="1400"/>
+            </a:lvl1pPr>
+            <a:lvl2pPr marL="457200" indent="0">
+              <a:buNone/>
+              <a:defRPr sz="1200"/>
+            </a:lvl2pPr>
+            <a:lvl3pPr marL="914400" indent="0">
+              <a:buNone/>
+              <a:defRPr sz="1000"/>
+            </a:lvl3pPr>
+            <a:lvl4pPr marL="1371600" indent="0">
+              <a:buNone/>
+              <a:defRPr sz="900"/>
+            </a:lvl4pPr>
+            <a:lvl5pPr marL="1828800" indent="0">
+              <a:buNone/>
+              <a:defRPr sz="900"/>
+            </a:lvl5pPr>
+            <a:lvl6pPr marL="2286000" indent="0">
+              <a:buNone/>
+              <a:defRPr sz="900"/>
+            </a:lvl6pPr>
+            <a:lvl7pPr marL="2743200" indent="0">
+              <a:buNone/>
+              <a:defRPr sz="900"/>
+            </a:lvl7pPr>
+            <a:lvl8pPr marL="3200400" indent="0">
+              <a:buNone/>
+              <a:defRPr sz="900"/>
+            </a:lvl8pPr>
+            <a:lvl9pPr marL="3657600" indent="0">
+              <a:buNone/>
+              <a:defRPr sz="900"/>
+            </a:lvl9pPr>
+          </a:lstStyle>
+          <a:p>
+            <a:pPr lvl="0"/>
+            <a:r>
+              <a:rPr lang="en-US" smtClean="0"/>
+              <a:t>Click to edit Master text styles</a:t>
+            </a:r>
+          </a:p>
+        </p:txBody>
+      </p:sp>
+      <p:sp>
+        <p:nvSpPr>
+          <p:cNvPr id="5" name="Text Placeholder 4"/>
+          <p:cNvSpPr>
+            <a:spLocks noGrp="1"/>
+          </p:cNvSpPr>
+          <p:nvPr>
+            <p:ph type="body" sz="quarter" idx="3"/>
+          </p:nvPr>
+        </p:nvSpPr>
+        <p:spPr>
+          <a:xfrm>
+            <a:off x="2917792" y="4250949"/>
+            <a:ext cx="2198466" cy="576262"/>
+          </a:xfrm>
+        </p:spPr>
+        <p:txBody>
+          <a:bodyPr anchor="b">
+            <a:noAutofit/>
+          </a:bodyPr>
+          <a:lstStyle>
+            <a:lvl1pPr marL="0" indent="0">
+              <a:buNone/>
+              <a:defRPr sz="2400" b="0">
+                <a:solidFill>
+                  <a:schemeClr val="bg2">
+                    <a:lumMod val="40000"/>
+                    <a:lumOff val="60000"/>
+                  </a:schemeClr>
+                </a:solidFill>
+              </a:defRPr>
+            </a:lvl1pPr>
+            <a:lvl2pPr marL="457200" indent="0">
+              <a:buNone/>
+              <a:defRPr sz="2000" b="1"/>
+            </a:lvl2pPr>
+            <a:lvl3pPr marL="914400" indent="0">
+              <a:buNone/>
+              <a:defRPr sz="1800" b="1"/>
+            </a:lvl3pPr>
+            <a:lvl4pPr marL="1371600" indent="0">
+              <a:buNone/>
+              <a:defRPr sz="1600" b="1"/>
+            </a:lvl4pPr>
+            <a:lvl5pPr marL="1828800" indent="0">
+              <a:buNone/>
+              <a:defRPr sz="1600" b="1"/>
+            </a:lvl5pPr>
+            <a:lvl6pPr marL="2286000" indent="0">
+              <a:buNone/>
+              <a:defRPr sz="1600" b="1"/>
+            </a:lvl6pPr>
+            <a:lvl7pPr marL="2743200" indent="0">
+              <a:buNone/>
+              <a:defRPr sz="1600" b="1"/>
+            </a:lvl7pPr>
+            <a:lvl8pPr marL="3200400" indent="0">
+              <a:buNone/>
+              <a:defRPr sz="1600" b="1"/>
+            </a:lvl8pPr>
+            <a:lvl9pPr marL="3657600" indent="0">
+              <a:buNone/>
+              <a:defRPr sz="1600" b="1"/>
+            </a:lvl9pPr>
+          </a:lstStyle>
+          <a:p>
+            <a:pPr lvl="0"/>
+            <a:r>
+              <a:rPr lang="en-US" smtClean="0"/>
+              <a:t>Click to edit Master text styles</a:t>
+            </a:r>
+          </a:p>
+        </p:txBody>
+      </p:sp>
+      <p:sp>
+        <p:nvSpPr>
+          <p:cNvPr id="30" name="Picture Placeholder 2"/>
+          <p:cNvSpPr>
+            <a:spLocks noGrp="1" noChangeAspect="1"/>
+          </p:cNvSpPr>
+          <p:nvPr>
+            <p:ph type="pic" idx="21"/>
+          </p:nvPr>
+        </p:nvSpPr>
+        <p:spPr>
+          <a:xfrm>
+            <a:off x="2917791" y="2209800"/>
+            <a:ext cx="2198466" cy="1524000"/>
+          </a:xfrm>
+          <a:prstGeom prst="roundRect">
+            <a:avLst>
+              <a:gd name="adj" fmla="val 1858"/>
+            </a:avLst>
+          </a:prstGeom>
+          <a:effectLst>
+            <a:outerShdw blurRad="50800" dist="50800" dir="5400000" algn="tl" rotWithShape="0">
+              <a:srgbClr val="000000">
+                <a:alpha val="43000"/>
+              </a:srgbClr>
+            </a:outerShdw>
+          </a:effectLst>
+        </p:spPr>
+        <p:txBody>
+          <a:bodyPr anchor="t">
+            <a:normAutofit/>
+          </a:bodyPr>
+          <a:lstStyle>
+            <a:lvl1pPr marL="0" indent="0" algn="ctr">
+              <a:buNone/>
+              <a:defRPr sz="1600"/>
+            </a:lvl1pPr>
+            <a:lvl2pPr marL="457200" indent="0">
+              <a:buNone/>
+              <a:defRPr sz="1600"/>
+            </a:lvl2pPr>
+            <a:lvl3pPr marL="914400" indent="0">
+              <a:buNone/>
+              <a:defRPr sz="1600"/>
+            </a:lvl3pPr>
+            <a:lvl4pPr marL="1371600" indent="0">
+              <a:buNone/>
+              <a:defRPr sz="1600"/>
+            </a:lvl4pPr>
+            <a:lvl5pPr marL="1828800" indent="0">
+              <a:buNone/>
+              <a:defRPr sz="1600"/>
+            </a:lvl5pPr>
+            <a:lvl6pPr marL="2286000" indent="0">
+              <a:buNone/>
+              <a:defRPr sz="1600"/>
+            </a:lvl6pPr>
+            <a:lvl7pPr marL="2743200" indent="0">
+              <a:buNone/>
+              <a:defRPr sz="1600"/>
+            </a:lvl7pPr>
+            <a:lvl8pPr marL="3200400" indent="0">
+              <a:buNone/>
+              <a:defRPr sz="1600"/>
+            </a:lvl8pPr>
+            <a:lvl9pPr marL="3657600" indent="0">
+              <a:buNone/>
+              <a:defRPr sz="1600"/>
+            </a:lvl9pPr>
+          </a:lstStyle>
+          <a:p>
+            <a:r>
+              <a:rPr lang="en-US" smtClean="0"/>
+              <a:t>Click icon to add picture</a:t>
+            </a:r>
+            <a:endParaRPr lang="en-US" dirty="0"/>
+          </a:p>
+        </p:txBody>
+      </p:sp>
+      <p:sp>
+        <p:nvSpPr>
+          <p:cNvPr id="23" name="Text Placeholder 3"/>
+          <p:cNvSpPr>
+            <a:spLocks noGrp="1"/>
+          </p:cNvSpPr>
+          <p:nvPr>
+            <p:ph type="body" sz="half" idx="19"/>
+          </p:nvPr>
+        </p:nvSpPr>
+        <p:spPr>
+          <a:xfrm>
+            <a:off x="2916776" y="4827211"/>
+            <a:ext cx="2201378" cy="659189"/>
+          </a:xfrm>
+        </p:spPr>
+        <p:txBody>
+          <a:bodyPr anchor="t">
+            <a:normAutofit/>
+          </a:bodyPr>
+          <a:lstStyle>
+            <a:lvl1pPr marL="0" indent="0">
+              <a:buNone/>
+              <a:defRPr sz="1400"/>
+            </a:lvl1pPr>
+            <a:lvl2pPr marL="457200" indent="0">
+              <a:buNone/>
+              <a:defRPr sz="1200"/>
+            </a:lvl2pPr>
+            <a:lvl3pPr marL="914400" indent="0">
+              <a:buNone/>
+              <a:defRPr sz="1000"/>
+            </a:lvl3pPr>
+            <a:lvl4pPr marL="1371600" indent="0">
+              <a:buNone/>
+              <a:defRPr sz="900"/>
+            </a:lvl4pPr>
+            <a:lvl5pPr marL="1828800" indent="0">
+              <a:buNone/>
+              <a:defRPr sz="900"/>
+            </a:lvl5pPr>
+            <a:lvl6pPr marL="2286000" indent="0">
+              <a:buNone/>
+              <a:defRPr sz="900"/>
+            </a:lvl6pPr>
+            <a:lvl7pPr marL="2743200" indent="0">
+              <a:buNone/>
+              <a:defRPr sz="900"/>
+            </a:lvl7pPr>
+            <a:lvl8pPr marL="3200400" indent="0">
+              <a:buNone/>
+              <a:defRPr sz="900"/>
+            </a:lvl8pPr>
+            <a:lvl9pPr marL="3657600" indent="0">
+              <a:buNone/>
+              <a:defRPr sz="900"/>
+            </a:lvl9pPr>
+          </a:lstStyle>
+          <a:p>
+            <a:pPr lvl="0"/>
+            <a:r>
+              <a:rPr lang="en-US" smtClean="0"/>
+              <a:t>Click to edit Master text styles</a:t>
+            </a:r>
+          </a:p>
+        </p:txBody>
+      </p:sp>
+      <p:sp>
+        <p:nvSpPr>
+          <p:cNvPr id="14" name="Text Placeholder 4"/>
+          <p:cNvSpPr>
+            <a:spLocks noGrp="1"/>
+          </p:cNvSpPr>
+          <p:nvPr>
+            <p:ph type="body" sz="quarter" idx="13"/>
+          </p:nvPr>
+        </p:nvSpPr>
+        <p:spPr>
+          <a:xfrm>
+            <a:off x="5344917" y="4250949"/>
+            <a:ext cx="2199658" cy="576262"/>
+          </a:xfrm>
+        </p:spPr>
+        <p:txBody>
+          <a:bodyPr anchor="b">
+            <a:noAutofit/>
+          </a:bodyPr>
+          <a:lstStyle>
+            <a:lvl1pPr marL="0" indent="0">
+              <a:buNone/>
+              <a:defRPr sz="2400" b="0">
+                <a:solidFill>
+                  <a:schemeClr val="bg2">
+                    <a:lumMod val="40000"/>
+                    <a:lumOff val="60000"/>
+                  </a:schemeClr>
+                </a:solidFill>
+              </a:defRPr>
+            </a:lvl1pPr>
+            <a:lvl2pPr marL="457200" indent="0">
+              <a:buNone/>
+              <a:defRPr sz="2000" b="1"/>
+            </a:lvl2pPr>
+            <a:lvl3pPr marL="914400" indent="0">
+              <a:buNone/>
+              <a:defRPr sz="1800" b="1"/>
+            </a:lvl3pPr>
+            <a:lvl4pPr marL="1371600" indent="0">
+              <a:buNone/>
+              <a:defRPr sz="1600" b="1"/>
+            </a:lvl4pPr>
+            <a:lvl5pPr marL="1828800" indent="0">
+              <a:buNone/>
+              <a:defRPr sz="1600" b="1"/>
+            </a:lvl5pPr>
+            <a:lvl6pPr marL="2286000" indent="0">
+              <a:buNone/>
+              <a:defRPr sz="1600" b="1"/>
+            </a:lvl6pPr>
+            <a:lvl7pPr marL="2743200" indent="0">
+              <a:buNone/>
+              <a:defRPr sz="1600" b="1"/>
+            </a:lvl7pPr>
+            <a:lvl8pPr marL="3200400" indent="0">
+              <a:buNone/>
+              <a:defRPr sz="1600" b="1"/>
+            </a:lvl8pPr>
+            <a:lvl9pPr marL="3657600" indent="0">
+              <a:buNone/>
+              <a:defRPr sz="1600" b="1"/>
+            </a:lvl9pPr>
+          </a:lstStyle>
+          <a:p>
+            <a:pPr lvl="0"/>
+            <a:r>
+              <a:rPr lang="en-US" smtClean="0"/>
+              <a:t>Click to edit Master text styles</a:t>
+            </a:r>
+          </a:p>
+        </p:txBody>
+      </p:sp>
+      <p:sp>
+        <p:nvSpPr>
+          <p:cNvPr id="31" name="Picture Placeholder 2"/>
+          <p:cNvSpPr>
+            <a:spLocks noGrp="1" noChangeAspect="1"/>
+          </p:cNvSpPr>
+          <p:nvPr>
+            <p:ph type="pic" idx="22"/>
+          </p:nvPr>
+        </p:nvSpPr>
+        <p:spPr>
+          <a:xfrm>
+            <a:off x="5344916" y="2209800"/>
+            <a:ext cx="2199658" cy="1524000"/>
+          </a:xfrm>
+          <a:prstGeom prst="roundRect">
+            <a:avLst>
+              <a:gd name="adj" fmla="val 1858"/>
+            </a:avLst>
+          </a:prstGeom>
+          <a:effectLst>
+            <a:outerShdw blurRad="50800" dist="50800" dir="5400000" algn="tl" rotWithShape="0">
+              <a:srgbClr val="000000">
+                <a:alpha val="43000"/>
+              </a:srgbClr>
+            </a:outerShdw>
+          </a:effectLst>
+        </p:spPr>
+        <p:txBody>
+          <a:bodyPr anchor="t">
+            <a:normAutofit/>
+          </a:bodyPr>
+          <a:lstStyle>
+            <a:lvl1pPr marL="0" indent="0" algn="ctr">
+              <a:buNone/>
+              <a:defRPr sz="1600"/>
+            </a:lvl1pPr>
+            <a:lvl2pPr marL="457200" indent="0">
+              <a:buNone/>
+              <a:defRPr sz="1600"/>
+            </a:lvl2pPr>
+            <a:lvl3pPr marL="914400" indent="0">
+              <a:buNone/>
+              <a:defRPr sz="1600"/>
+            </a:lvl3pPr>
+            <a:lvl4pPr marL="1371600" indent="0">
+              <a:buNone/>
+              <a:defRPr sz="1600"/>
+            </a:lvl4pPr>
+            <a:lvl5pPr marL="1828800" indent="0">
+              <a:buNone/>
+              <a:defRPr sz="1600"/>
+            </a:lvl5pPr>
+            <a:lvl6pPr marL="2286000" indent="0">
+              <a:buNone/>
+              <a:defRPr sz="1600"/>
+            </a:lvl6pPr>
+            <a:lvl7pPr marL="2743200" indent="0">
+              <a:buNone/>
+              <a:defRPr sz="1600"/>
+            </a:lvl7pPr>
+            <a:lvl8pPr marL="3200400" indent="0">
+              <a:buNone/>
+              <a:defRPr sz="1600"/>
+            </a:lvl8pPr>
+            <a:lvl9pPr marL="3657600" indent="0">
+              <a:buNone/>
+              <a:defRPr sz="1600"/>
+            </a:lvl9pPr>
+          </a:lstStyle>
+          <a:p>
+            <a:r>
+              <a:rPr lang="en-US" smtClean="0"/>
+              <a:t>Click icon to add picture</a:t>
+            </a:r>
+            <a:endParaRPr lang="en-US" dirty="0"/>
+          </a:p>
+        </p:txBody>
+      </p:sp>
+      <p:sp>
+        <p:nvSpPr>
+          <p:cNvPr id="24" name="Text Placeholder 3"/>
+          <p:cNvSpPr>
+            <a:spLocks noGrp="1"/>
+          </p:cNvSpPr>
+          <p:nvPr>
+            <p:ph type="body" sz="half" idx="20"/>
+          </p:nvPr>
+        </p:nvSpPr>
+        <p:spPr>
+          <a:xfrm>
+            <a:off x="5344824" y="4827209"/>
+            <a:ext cx="2202571" cy="659189"/>
+          </a:xfrm>
+        </p:spPr>
+        <p:txBody>
+          <a:bodyPr anchor="t">
+            <a:normAutofit/>
+          </a:bodyPr>
+          <a:lstStyle>
+            <a:lvl1pPr marL="0" indent="0">
+              <a:buNone/>
+              <a:defRPr sz="1400"/>
+            </a:lvl1pPr>
+            <a:lvl2pPr marL="457200" indent="0">
+              <a:buNone/>
+              <a:defRPr sz="1200"/>
+            </a:lvl2pPr>
+            <a:lvl3pPr marL="914400" indent="0">
+              <a:buNone/>
+              <a:defRPr sz="1000"/>
+            </a:lvl3pPr>
+            <a:lvl4pPr marL="1371600" indent="0">
+              <a:buNone/>
+              <a:defRPr sz="900"/>
+            </a:lvl4pPr>
+            <a:lvl5pPr marL="1828800" indent="0">
+              <a:buNone/>
+              <a:defRPr sz="900"/>
+            </a:lvl5pPr>
+            <a:lvl6pPr marL="2286000" indent="0">
+              <a:buNone/>
+              <a:defRPr sz="900"/>
+            </a:lvl6pPr>
+            <a:lvl7pPr marL="2743200" indent="0">
+              <a:buNone/>
+              <a:defRPr sz="900"/>
+            </a:lvl7pPr>
+            <a:lvl8pPr marL="3200400" indent="0">
+              <a:buNone/>
+              <a:defRPr sz="900"/>
+            </a:lvl8pPr>
+            <a:lvl9pPr marL="3657600" indent="0">
+              <a:buNone/>
+              <a:defRPr sz="900"/>
+            </a:lvl9pPr>
+          </a:lstStyle>
+          <a:p>
+            <a:pPr lvl="0"/>
+            <a:r>
+              <a:rPr lang="en-US" smtClean="0"/>
+              <a:t>Click to edit Master text styles</a:t>
+            </a:r>
+          </a:p>
+        </p:txBody>
+      </p:sp>
+      <p:cxnSp>
+        <p:nvCxnSpPr>
+          <p:cNvPr id="19" name="Straight Connector 18"/>
+          <p:cNvCxnSpPr/>
+          <p:nvPr/>
+        </p:nvCxnSpPr>
+        <p:spPr>
+          <a:xfrm>
+            <a:off x="2795334" y="2133600"/>
+            <a:ext cx="0" cy="3962400"/>
+          </a:xfrm>
+          <a:prstGeom prst="line">
+            <a:avLst/>
+          </a:prstGeom>
+          <a:ln w="12700" cmpd="sng">
+            <a:solidFill>
+              <a:schemeClr val="bg2">
+                <a:lumMod val="40000"/>
+                <a:lumOff val="60000"/>
+                <a:alpha val="40000"/>
+              </a:schemeClr>
+            </a:solidFill>
+          </a:ln>
+        </p:spPr>
+        <p:style>
+          <a:lnRef idx="2">
+            <a:schemeClr val="accent1"/>
+          </a:lnRef>
+          <a:fillRef idx="0">
+            <a:schemeClr val="accent1"/>
+          </a:fillRef>
+          <a:effectRef idx="1">
+            <a:schemeClr val="accent1"/>
+          </a:effectRef>
+          <a:fontRef idx="minor">
+            <a:schemeClr val="tx1"/>
+          </a:fontRef>
+        </p:style>
+      </p:cxnSp>
+      <p:cxnSp>
+        <p:nvCxnSpPr>
+          <p:cNvPr id="20" name="Straight Connector 19"/>
+          <p:cNvCxnSpPr/>
+          <p:nvPr/>
+        </p:nvCxnSpPr>
+        <p:spPr>
+          <a:xfrm>
+            <a:off x="5223030" y="2133600"/>
+            <a:ext cx="0" cy="3966882"/>
+          </a:xfrm>
+          <a:prstGeom prst="line">
+            <a:avLst/>
+          </a:prstGeom>
+          <a:ln w="12700" cmpd="sng">
+            <a:solidFill>
+              <a:schemeClr val="bg2">
+                <a:lumMod val="40000"/>
+                <a:lumOff val="60000"/>
+                <a:alpha val="40000"/>
+              </a:schemeClr>
+            </a:solidFill>
+          </a:ln>
+        </p:spPr>
+        <p:style>
+          <a:lnRef idx="2">
+            <a:schemeClr val="accent1"/>
+          </a:lnRef>
+          <a:fillRef idx="0">
+            <a:schemeClr val="accent1"/>
+          </a:fillRef>
+          <a:effectRef idx="1">
+            <a:schemeClr val="accent1"/>
+          </a:effectRef>
+          <a:fontRef idx="minor">
+            <a:schemeClr val="tx1"/>
+          </a:fontRef>
+        </p:style>
+      </p:cxnSp>
+      <p:sp>
+        <p:nvSpPr>
+          <p:cNvPr id="7" name="Date Placeholder 3"/>
+          <p:cNvSpPr>
+            <a:spLocks noGrp="1"/>
+          </p:cNvSpPr>
+          <p:nvPr>
+            <p:ph type="dt" sz="half" idx="10"/>
+          </p:nvPr>
+        </p:nvSpPr>
+        <p:spPr/>
+        <p:txBody>
+          <a:bodyPr/>
+          <a:lstStyle/>
+          <a:p>
+            <a:fld id="{1D8BD707-D9CF-40AE-B4C6-C98DA3205C09}" type="datetimeFigureOut">
+              <a:rPr lang="en-US" smtClean="0"/>
+              <a:pPr/>
+              <a:t>7/30/2025</a:t>
+            </a:fld>
+            <a:endParaRPr lang="en-US"/>
+          </a:p>
+        </p:txBody>
+      </p:sp>
+      <p:sp>
+        <p:nvSpPr>
+          <p:cNvPr id="4" name="Footer Placeholder 4"/>
+          <p:cNvSpPr>
+            <a:spLocks noGrp="1"/>
+          </p:cNvSpPr>
+          <p:nvPr>
+            <p:ph type="ftr" sz="quarter" idx="11"/>
+          </p:nvPr>
+        </p:nvSpPr>
+        <p:spPr/>
+        <p:txBody>
+          <a:bodyPr/>
+          <a:lstStyle/>
+          <a:p>
+            <a:endParaRPr lang="en-US"/>
+          </a:p>
+        </p:txBody>
+      </p:sp>
+      <p:sp>
+        <p:nvSpPr>
+          <p:cNvPr id="6" name="Slide Number Placeholder 5"/>
+          <p:cNvSpPr>
+            <a:spLocks noGrp="1"/>
+          </p:cNvSpPr>
+          <p:nvPr>
+            <p:ph type="sldNum" sz="quarter" idx="12"/>
+          </p:nvPr>
+        </p:nvSpPr>
+        <p:spPr/>
+        <p:txBody>
+          <a:bodyPr/>
+          <a:lstStyle/>
+          <a:p>
+            <a:fld id="{B6F15528-21DE-4FAA-801E-634DDDAF4B2B}" type="slidenum">
+              <a:rPr lang="en-US" smtClean="0"/>
+              <a:pPr/>
+              <a:t>‹#›</a:t>
+            </a:fld>
+            <a:endParaRPr lang="en-US"/>
+          </a:p>
+        </p:txBody>
+      </p:sp>
+    </p:spTree>
+    <p:extLst>
+      <p:ext uri="{BB962C8B-B14F-4D97-AF65-F5344CB8AC3E}">
+        <p14:creationId xmlns:p14="http://schemas.microsoft.com/office/powerpoint/2010/main" val="2488511648"/>
+      </p:ext>
+    </p:extLst>
+  </p:cSld>
+  <p:clrMapOvr>
+    <a:masterClrMapping/>
+  </p:clrMapOvr>
+</p:sldLayout>
+</file>
+
+<file path=ppt/slideLayouts/slideLayout27.xml><?xml version="1.0" encoding="utf-8"?>
+<p:sldLayout xmlns:a="http://schemas.openxmlformats.org/drawingml/2006/main" xmlns:r="http://schemas.openxmlformats.org/officeDocument/2006/relationships" xmlns:p="http://schemas.openxmlformats.org/presentationml/2006/main" type="vertTx" preserve="1">
+  <p:cSld name="Title and Vertical Text">
+    <p:spTree>
+      <p:nvGrpSpPr>
+        <p:cNvPr id="1" name=""/>
+        <p:cNvGrpSpPr/>
+        <p:nvPr/>
+      </p:nvGrpSpPr>
+      <p:grpSpPr>
+        <a:xfrm>
+          <a:off x="0" y="0"/>
+          <a:ext cx="0" cy="0"/>
+          <a:chOff x="0" y="0"/>
+          <a:chExt cx="0" cy="0"/>
+        </a:xfrm>
+      </p:grpSpPr>
+      <p:sp>
+        <p:nvSpPr>
+          <p:cNvPr id="2" name="Title 1"/>
+          <p:cNvSpPr>
+            <a:spLocks noGrp="1"/>
+          </p:cNvSpPr>
+          <p:nvPr>
+            <p:ph type="title"/>
+          </p:nvPr>
+        </p:nvSpPr>
+        <p:spPr/>
+        <p:txBody>
+          <a:bodyPr/>
+          <a:lstStyle/>
+          <a:p>
+            <a:r>
+              <a:rPr lang="en-US" smtClean="0"/>
+              <a:t>Click to edit Master title style</a:t>
+            </a:r>
+            <a:endParaRPr lang="en-US" dirty="0"/>
+          </a:p>
+        </p:txBody>
+      </p:sp>
+      <p:sp>
+        <p:nvSpPr>
+          <p:cNvPr id="3" name="Vertical Text Placeholder 2"/>
+          <p:cNvSpPr>
+            <a:spLocks noGrp="1"/>
+          </p:cNvSpPr>
+          <p:nvPr>
+            <p:ph type="body" orient="vert" idx="1"/>
+          </p:nvPr>
+        </p:nvSpPr>
+        <p:spPr/>
+        <p:txBody>
+          <a:bodyPr vert="eaVert" anchor="t" anchorCtr="0"/>
+          <a:lstStyle/>
+          <a:p>
+            <a:pPr lvl="0"/>
+            <a:r>
+              <a:rPr lang="en-US" smtClean="0"/>
+              <a:t>Click to edit Master text styles</a:t>
+            </a:r>
+          </a:p>
+          <a:p>
+            <a:pPr lvl="1"/>
+            <a:r>
+              <a:rPr lang="en-US" smtClean="0"/>
+              <a:t>Second level</a:t>
+            </a:r>
+          </a:p>
+          <a:p>
+            <a:pPr lvl="2"/>
+            <a:r>
+              <a:rPr lang="en-US" smtClean="0"/>
+              <a:t>Third level</a:t>
+            </a:r>
+          </a:p>
+          <a:p>
+            <a:pPr lvl="3"/>
+            <a:r>
+              <a:rPr lang="en-US" smtClean="0"/>
+              <a:t>Fourth level</a:t>
+            </a:r>
+          </a:p>
+          <a:p>
+            <a:pPr lvl="4"/>
+            <a:r>
+              <a:rPr lang="en-US" smtClean="0"/>
+              <a:t>Fifth level</a:t>
+            </a:r>
+            <a:endParaRPr lang="en-US" dirty="0"/>
+          </a:p>
+        </p:txBody>
+      </p:sp>
+      <p:sp>
+        <p:nvSpPr>
+          <p:cNvPr id="4" name="Date Placeholder 3"/>
+          <p:cNvSpPr>
+            <a:spLocks noGrp="1"/>
+          </p:cNvSpPr>
+          <p:nvPr>
+            <p:ph type="dt" sz="half" idx="10"/>
+          </p:nvPr>
+        </p:nvSpPr>
+        <p:spPr/>
+        <p:txBody>
+          <a:bodyPr/>
+          <a:lstStyle/>
+          <a:p>
+            <a:fld id="{1D8BD707-D9CF-40AE-B4C6-C98DA3205C09}" type="datetimeFigureOut">
+              <a:rPr lang="en-US" smtClean="0"/>
+              <a:pPr/>
+              <a:t>7/30/2025</a:t>
+            </a:fld>
+            <a:endParaRPr lang="en-US"/>
+          </a:p>
+        </p:txBody>
+      </p:sp>
+      <p:sp>
+        <p:nvSpPr>
+          <p:cNvPr id="5" name="Footer Placeholder 4"/>
+          <p:cNvSpPr>
+            <a:spLocks noGrp="1"/>
+          </p:cNvSpPr>
+          <p:nvPr>
+            <p:ph type="ftr" sz="quarter" idx="11"/>
+          </p:nvPr>
+        </p:nvSpPr>
+        <p:spPr/>
+        <p:txBody>
+          <a:bodyPr/>
+          <a:lstStyle/>
+          <a:p>
+            <a:endParaRPr lang="en-US"/>
+          </a:p>
+        </p:txBody>
+      </p:sp>
+      <p:sp>
+        <p:nvSpPr>
+          <p:cNvPr id="6" name="Slide Number Placeholder 5"/>
+          <p:cNvSpPr>
+            <a:spLocks noGrp="1"/>
+          </p:cNvSpPr>
+          <p:nvPr>
+            <p:ph type="sldNum" sz="quarter" idx="12"/>
+          </p:nvPr>
+        </p:nvSpPr>
+        <p:spPr/>
+        <p:txBody>
+          <a:bodyPr/>
+          <a:lstStyle/>
+          <a:p>
+            <a:fld id="{B6F15528-21DE-4FAA-801E-634DDDAF4B2B}" type="slidenum">
+              <a:rPr lang="en-US" smtClean="0"/>
+              <a:pPr/>
+              <a:t>‹#›</a:t>
+            </a:fld>
+            <a:endParaRPr lang="en-US"/>
+          </a:p>
+        </p:txBody>
+      </p:sp>
+    </p:spTree>
+    <p:extLst>
+      <p:ext uri="{BB962C8B-B14F-4D97-AF65-F5344CB8AC3E}">
+        <p14:creationId xmlns:p14="http://schemas.microsoft.com/office/powerpoint/2010/main" val="772967457"/>
+      </p:ext>
+    </p:extLst>
+  </p:cSld>
+  <p:clrMapOvr>
+    <a:masterClrMapping/>
+  </p:clrMapOvr>
+</p:sldLayout>
+</file>
+
+<file path=ppt/slideLayouts/slideLayout28.xml><?xml version="1.0" encoding="utf-8"?>
+<p:sldLayout xmlns:a="http://schemas.openxmlformats.org/drawingml/2006/main" xmlns:r="http://schemas.openxmlformats.org/officeDocument/2006/relationships" xmlns:p="http://schemas.openxmlformats.org/presentationml/2006/main" type="vertTitleAndTx" preserve="1">
+  <p:cSld name="Vertical Title and Text">
+    <p:spTree>
+      <p:nvGrpSpPr>
+        <p:cNvPr id="1" name=""/>
+        <p:cNvGrpSpPr/>
+        <p:nvPr/>
+      </p:nvGrpSpPr>
+      <p:grpSpPr>
+        <a:xfrm>
+          <a:off x="0" y="0"/>
+          <a:ext cx="0" cy="0"/>
+          <a:chOff x="0" y="0"/>
+          <a:chExt cx="0" cy="0"/>
+        </a:xfrm>
+      </p:grpSpPr>
+      <p:sp>
+        <p:nvSpPr>
+          <p:cNvPr id="2" name="Vertical Title 1"/>
+          <p:cNvSpPr>
+            <a:spLocks noGrp="1"/>
+          </p:cNvSpPr>
+          <p:nvPr>
+            <p:ph type="title" orient="vert"/>
+          </p:nvPr>
+        </p:nvSpPr>
+        <p:spPr>
+          <a:xfrm>
+            <a:off x="6229782" y="430214"/>
+            <a:ext cx="1314793" cy="5826125"/>
+          </a:xfrm>
+        </p:spPr>
+        <p:txBody>
+          <a:bodyPr vert="eaVert" anchor="b" anchorCtr="0"/>
+          <a:lstStyle/>
+          <a:p>
+            <a:r>
+              <a:rPr lang="en-US" smtClean="0"/>
+              <a:t>Click to edit Master title style</a:t>
+            </a:r>
+            <a:endParaRPr lang="en-US" dirty="0"/>
+          </a:p>
+        </p:txBody>
+      </p:sp>
+      <p:sp>
+        <p:nvSpPr>
+          <p:cNvPr id="3" name="Vertical Text Placeholder 2"/>
+          <p:cNvSpPr>
+            <a:spLocks noGrp="1"/>
+          </p:cNvSpPr>
+          <p:nvPr>
+            <p:ph type="body" orient="vert" idx="1"/>
+          </p:nvPr>
+        </p:nvSpPr>
+        <p:spPr>
+          <a:xfrm>
+            <a:off x="489475" y="773205"/>
+            <a:ext cx="5568812" cy="5483134"/>
+          </a:xfrm>
+        </p:spPr>
+        <p:txBody>
+          <a:bodyPr vert="eaVert"/>
+          <a:lstStyle/>
+          <a:p>
+            <a:pPr lvl="0"/>
+            <a:r>
+              <a:rPr lang="en-US" smtClean="0"/>
+              <a:t>Click to edit Master text styles</a:t>
+            </a:r>
+          </a:p>
+          <a:p>
+            <a:pPr lvl="1"/>
+            <a:r>
+              <a:rPr lang="en-US" smtClean="0"/>
+              <a:t>Second level</a:t>
+            </a:r>
+          </a:p>
+          <a:p>
+            <a:pPr lvl="2"/>
+            <a:r>
+              <a:rPr lang="en-US" smtClean="0"/>
+              <a:t>Third level</a:t>
+            </a:r>
+          </a:p>
+          <a:p>
+            <a:pPr lvl="3"/>
+            <a:r>
+              <a:rPr lang="en-US" smtClean="0"/>
+              <a:t>Fourth level</a:t>
+            </a:r>
+          </a:p>
+          <a:p>
+            <a:pPr lvl="4"/>
+            <a:r>
+              <a:rPr lang="en-US" smtClean="0"/>
+              <a:t>Fifth level</a:t>
+            </a:r>
+            <a:endParaRPr lang="en-US" dirty="0"/>
+          </a:p>
+        </p:txBody>
+      </p:sp>
+      <p:sp>
+        <p:nvSpPr>
+          <p:cNvPr id="4" name="Date Placeholder 3"/>
+          <p:cNvSpPr>
+            <a:spLocks noGrp="1"/>
+          </p:cNvSpPr>
+          <p:nvPr>
+            <p:ph type="dt" sz="half" idx="10"/>
+          </p:nvPr>
+        </p:nvSpPr>
+        <p:spPr/>
+        <p:txBody>
+          <a:bodyPr/>
+          <a:lstStyle/>
+          <a:p>
+            <a:fld id="{1D8BD707-D9CF-40AE-B4C6-C98DA3205C09}" type="datetimeFigureOut">
+              <a:rPr lang="en-US" smtClean="0"/>
+              <a:pPr/>
+              <a:t>7/30/2025</a:t>
+            </a:fld>
+            <a:endParaRPr lang="en-US"/>
+          </a:p>
+        </p:txBody>
+      </p:sp>
+      <p:sp>
+        <p:nvSpPr>
+          <p:cNvPr id="5" name="Footer Placeholder 4"/>
+          <p:cNvSpPr>
+            <a:spLocks noGrp="1"/>
+          </p:cNvSpPr>
+          <p:nvPr>
+            <p:ph type="ftr" sz="quarter" idx="11"/>
+          </p:nvPr>
+        </p:nvSpPr>
+        <p:spPr/>
+        <p:txBody>
+          <a:bodyPr/>
+          <a:lstStyle/>
+          <a:p>
+            <a:endParaRPr lang="en-US"/>
+          </a:p>
+        </p:txBody>
+      </p:sp>
+      <p:sp>
+        <p:nvSpPr>
+          <p:cNvPr id="6" name="Slide Number Placeholder 5"/>
+          <p:cNvSpPr>
+            <a:spLocks noGrp="1"/>
+          </p:cNvSpPr>
+          <p:nvPr>
+            <p:ph type="sldNum" sz="quarter" idx="12"/>
+          </p:nvPr>
+        </p:nvSpPr>
+        <p:spPr/>
+        <p:txBody>
+          <a:bodyPr/>
+          <a:lstStyle/>
+          <a:p>
+            <a:fld id="{B6F15528-21DE-4FAA-801E-634DDDAF4B2B}" type="slidenum">
+              <a:rPr lang="en-US" smtClean="0"/>
+              <a:pPr/>
+              <a:t>‹#›</a:t>
+            </a:fld>
+            <a:endParaRPr lang="en-US"/>
+          </a:p>
+        </p:txBody>
+      </p:sp>
+    </p:spTree>
+    <p:extLst>
+      <p:ext uri="{BB962C8B-B14F-4D97-AF65-F5344CB8AC3E}">
+        <p14:creationId xmlns:p14="http://schemas.microsoft.com/office/powerpoint/2010/main" val="421134516"/>
+      </p:ext>
+    </p:extLst>
   </p:cSld>
   <p:clrMapOvr>
     <a:masterClrMapping/>
@@ -1056,7 +6191,7 @@
             <a:fld id="{1D8BD707-D9CF-40AE-B4C6-C98DA3205C09}" type="datetimeFigureOut">
               <a:rPr lang="en-US" smtClean="0"/>
               <a:pPr/>
-              <a:t>7/2/2025</a:t>
+              <a:t>7/30/2025</a:t>
             </a:fld>
             <a:endParaRPr lang="en-US"/>
           </a:p>
@@ -1341,7 +6476,7 @@
             <a:fld id="{1D8BD707-D9CF-40AE-B4C6-C98DA3205C09}" type="datetimeFigureOut">
               <a:rPr lang="en-US" smtClean="0"/>
               <a:pPr/>
-              <a:t>7/2/2025</a:t>
+              <a:t>7/30/2025</a:t>
             </a:fld>
             <a:endParaRPr lang="en-US"/>
           </a:p>
@@ -1760,7 +6895,7 @@
             <a:fld id="{1D8BD707-D9CF-40AE-B4C6-C98DA3205C09}" type="datetimeFigureOut">
               <a:rPr lang="en-US" smtClean="0"/>
               <a:pPr/>
-              <a:t>7/2/2025</a:t>
+              <a:t>7/30/2025</a:t>
             </a:fld>
             <a:endParaRPr lang="en-US"/>
           </a:p>
@@ -1875,7 +7010,7 @@
             <a:fld id="{1D8BD707-D9CF-40AE-B4C6-C98DA3205C09}" type="datetimeFigureOut">
               <a:rPr lang="en-US" smtClean="0"/>
               <a:pPr/>
-              <a:t>7/2/2025</a:t>
+              <a:t>7/30/2025</a:t>
             </a:fld>
             <a:endParaRPr lang="en-US"/>
           </a:p>
@@ -1967,7 +7102,7 @@
             <a:fld id="{1D8BD707-D9CF-40AE-B4C6-C98DA3205C09}" type="datetimeFigureOut">
               <a:rPr lang="en-US" smtClean="0"/>
               <a:pPr/>
-              <a:t>7/2/2025</a:t>
+              <a:t>7/30/2025</a:t>
             </a:fld>
             <a:endParaRPr lang="en-US"/>
           </a:p>
@@ -2241,7 +7376,7 @@
             <a:fld id="{1D8BD707-D9CF-40AE-B4C6-C98DA3205C09}" type="datetimeFigureOut">
               <a:rPr lang="en-US" smtClean="0"/>
               <a:pPr/>
-              <a:t>7/2/2025</a:t>
+              <a:t>7/30/2025</a:t>
             </a:fld>
             <a:endParaRPr lang="en-US"/>
           </a:p>
@@ -2491,7 +7626,7 @@
             <a:fld id="{1D8BD707-D9CF-40AE-B4C6-C98DA3205C09}" type="datetimeFigureOut">
               <a:rPr lang="en-US" smtClean="0"/>
               <a:pPr/>
-              <a:t>7/2/2025</a:t>
+              <a:t>7/30/2025</a:t>
             </a:fld>
             <a:endParaRPr lang="en-US"/>
           </a:p>
@@ -2701,7 +7836,7 @@
             <a:fld id="{1D8BD707-D9CF-40AE-B4C6-C98DA3205C09}" type="datetimeFigureOut">
               <a:rPr lang="en-US" smtClean="0"/>
               <a:pPr/>
-              <a:t>7/2/2025</a:t>
+              <a:t>7/30/2025</a:t>
             </a:fld>
             <a:endParaRPr lang="en-US"/>
           </a:p>
@@ -3055,6 +8190,1023 @@
 </p:sldMaster>
 </file>
 
+<file path=ppt/slideMasters/slideMaster2.xml><?xml version="1.0" encoding="utf-8"?>
+<p:sldMaster xmlns:a="http://schemas.openxmlformats.org/drawingml/2006/main" xmlns:r="http://schemas.openxmlformats.org/officeDocument/2006/relationships" xmlns:p="http://schemas.openxmlformats.org/presentationml/2006/main">
+  <p:cSld>
+    <p:bg>
+      <p:bgRef idx="1003">
+        <a:schemeClr val="bg2"/>
+      </p:bgRef>
+    </p:bg>
+    <p:spTree>
+      <p:nvGrpSpPr>
+        <p:cNvPr id="1" name=""/>
+        <p:cNvGrpSpPr/>
+        <p:nvPr/>
+      </p:nvGrpSpPr>
+      <p:grpSpPr>
+        <a:xfrm>
+          <a:off x="0" y="0"/>
+          <a:ext cx="0" cy="0"/>
+          <a:chOff x="0" y="0"/>
+          <a:chExt cx="0" cy="0"/>
+        </a:xfrm>
+      </p:grpSpPr>
+      <p:sp>
+        <p:nvSpPr>
+          <p:cNvPr id="22" name="Oval 21"/>
+          <p:cNvSpPr/>
+          <p:nvPr/>
+        </p:nvSpPr>
+        <p:spPr>
+          <a:xfrm>
+            <a:off x="6299432" y="1676400"/>
+            <a:ext cx="2819400" cy="2819400"/>
+          </a:xfrm>
+          <a:prstGeom prst="ellipse">
+            <a:avLst/>
+          </a:prstGeom>
+          <a:gradFill flip="none" rotWithShape="1">
+            <a:gsLst>
+              <a:gs pos="0">
+                <a:schemeClr val="bg2">
+                  <a:lumMod val="60000"/>
+                  <a:lumOff val="40000"/>
+                  <a:alpha val="7000"/>
+                </a:schemeClr>
+              </a:gs>
+              <a:gs pos="69000">
+                <a:schemeClr val="bg2">
+                  <a:lumMod val="60000"/>
+                  <a:lumOff val="40000"/>
+                  <a:alpha val="0"/>
+                </a:schemeClr>
+              </a:gs>
+              <a:gs pos="36000">
+                <a:schemeClr val="bg2">
+                  <a:lumMod val="60000"/>
+                  <a:lumOff val="40000"/>
+                  <a:alpha val="6000"/>
+                </a:schemeClr>
+              </a:gs>
+            </a:gsLst>
+            <a:path path="circle">
+              <a:fillToRect l="50000" t="50000" r="50000" b="50000"/>
+            </a:path>
+            <a:tileRect/>
+          </a:gradFill>
+          <a:ln>
+            <a:noFill/>
+          </a:ln>
+          <a:effectLst/>
+        </p:spPr>
+        <p:style>
+          <a:lnRef idx="1">
+            <a:schemeClr val="accent1"/>
+          </a:lnRef>
+          <a:fillRef idx="3">
+            <a:schemeClr val="accent1"/>
+          </a:fillRef>
+          <a:effectRef idx="2">
+            <a:schemeClr val="accent1"/>
+          </a:effectRef>
+          <a:fontRef idx="minor">
+            <a:schemeClr val="lt1"/>
+          </a:fontRef>
+        </p:style>
+      </p:sp>
+      <p:sp>
+        <p:nvSpPr>
+          <p:cNvPr id="23" name="Oval 22"/>
+          <p:cNvSpPr/>
+          <p:nvPr/>
+        </p:nvSpPr>
+        <p:spPr>
+          <a:xfrm>
+            <a:off x="5689832" y="-457200"/>
+            <a:ext cx="1600200" cy="1600200"/>
+          </a:xfrm>
+          <a:prstGeom prst="ellipse">
+            <a:avLst/>
+          </a:prstGeom>
+          <a:gradFill flip="none" rotWithShape="1">
+            <a:gsLst>
+              <a:gs pos="0">
+                <a:schemeClr val="bg2">
+                  <a:lumMod val="60000"/>
+                  <a:lumOff val="40000"/>
+                  <a:alpha val="14000"/>
+                </a:schemeClr>
+              </a:gs>
+              <a:gs pos="73000">
+                <a:schemeClr val="bg2">
+                  <a:lumMod val="60000"/>
+                  <a:lumOff val="40000"/>
+                  <a:alpha val="0"/>
+                </a:schemeClr>
+              </a:gs>
+              <a:gs pos="36000">
+                <a:schemeClr val="bg2">
+                  <a:lumMod val="60000"/>
+                  <a:lumOff val="40000"/>
+                  <a:alpha val="7000"/>
+                </a:schemeClr>
+              </a:gs>
+            </a:gsLst>
+            <a:path path="circle">
+              <a:fillToRect l="50000" t="50000" r="50000" b="50000"/>
+            </a:path>
+            <a:tileRect/>
+          </a:gradFill>
+          <a:ln>
+            <a:noFill/>
+          </a:ln>
+          <a:effectLst/>
+        </p:spPr>
+        <p:style>
+          <a:lnRef idx="1">
+            <a:schemeClr val="accent1"/>
+          </a:lnRef>
+          <a:fillRef idx="3">
+            <a:schemeClr val="accent1"/>
+          </a:fillRef>
+          <a:effectRef idx="2">
+            <a:schemeClr val="accent1"/>
+          </a:effectRef>
+          <a:fontRef idx="minor">
+            <a:schemeClr val="lt1"/>
+          </a:fontRef>
+        </p:style>
+      </p:sp>
+      <p:sp>
+        <p:nvSpPr>
+          <p:cNvPr id="24" name="Oval 23"/>
+          <p:cNvSpPr/>
+          <p:nvPr/>
+        </p:nvSpPr>
+        <p:spPr>
+          <a:xfrm>
+            <a:off x="6299432" y="6096000"/>
+            <a:ext cx="990600" cy="990600"/>
+          </a:xfrm>
+          <a:prstGeom prst="ellipse">
+            <a:avLst/>
+          </a:prstGeom>
+          <a:gradFill flip="none" rotWithShape="1">
+            <a:gsLst>
+              <a:gs pos="0">
+                <a:schemeClr val="bg2">
+                  <a:lumMod val="60000"/>
+                  <a:lumOff val="40000"/>
+                  <a:alpha val="9000"/>
+                </a:schemeClr>
+              </a:gs>
+              <a:gs pos="66000">
+                <a:schemeClr val="bg2">
+                  <a:lumMod val="60000"/>
+                  <a:lumOff val="40000"/>
+                  <a:alpha val="0"/>
+                </a:schemeClr>
+              </a:gs>
+              <a:gs pos="36000">
+                <a:schemeClr val="bg2">
+                  <a:lumMod val="60000"/>
+                  <a:lumOff val="40000"/>
+                  <a:alpha val="5000"/>
+                </a:schemeClr>
+              </a:gs>
+            </a:gsLst>
+            <a:path path="circle">
+              <a:fillToRect l="50000" t="50000" r="50000" b="50000"/>
+            </a:path>
+            <a:tileRect/>
+          </a:gradFill>
+          <a:ln>
+            <a:noFill/>
+          </a:ln>
+          <a:effectLst/>
+        </p:spPr>
+        <p:style>
+          <a:lnRef idx="1">
+            <a:schemeClr val="accent1"/>
+          </a:lnRef>
+          <a:fillRef idx="3">
+            <a:schemeClr val="accent1"/>
+          </a:fillRef>
+          <a:effectRef idx="2">
+            <a:schemeClr val="accent1"/>
+          </a:effectRef>
+          <a:fontRef idx="minor">
+            <a:schemeClr val="lt1"/>
+          </a:fontRef>
+        </p:style>
+      </p:sp>
+      <p:sp>
+        <p:nvSpPr>
+          <p:cNvPr id="20" name="Oval 19"/>
+          <p:cNvSpPr/>
+          <p:nvPr/>
+        </p:nvSpPr>
+        <p:spPr>
+          <a:xfrm>
+            <a:off x="-153988" y="2667000"/>
+            <a:ext cx="4191000" cy="4191000"/>
+          </a:xfrm>
+          <a:prstGeom prst="ellipse">
+            <a:avLst/>
+          </a:prstGeom>
+          <a:gradFill flip="none" rotWithShape="1">
+            <a:gsLst>
+              <a:gs pos="0">
+                <a:schemeClr val="bg2">
+                  <a:lumMod val="60000"/>
+                  <a:lumOff val="40000"/>
+                  <a:alpha val="11000"/>
+                </a:schemeClr>
+              </a:gs>
+              <a:gs pos="75000">
+                <a:schemeClr val="bg2">
+                  <a:lumMod val="60000"/>
+                  <a:lumOff val="40000"/>
+                  <a:alpha val="0"/>
+                </a:schemeClr>
+              </a:gs>
+              <a:gs pos="36000">
+                <a:schemeClr val="bg2">
+                  <a:lumMod val="60000"/>
+                  <a:lumOff val="40000"/>
+                  <a:alpha val="10000"/>
+                </a:schemeClr>
+              </a:gs>
+            </a:gsLst>
+            <a:path path="circle">
+              <a:fillToRect l="50000" t="50000" r="50000" b="50000"/>
+            </a:path>
+            <a:tileRect/>
+          </a:gradFill>
+          <a:ln>
+            <a:noFill/>
+          </a:ln>
+          <a:effectLst/>
+        </p:spPr>
+        <p:style>
+          <a:lnRef idx="1">
+            <a:schemeClr val="accent1"/>
+          </a:lnRef>
+          <a:fillRef idx="3">
+            <a:schemeClr val="accent1"/>
+          </a:fillRef>
+          <a:effectRef idx="2">
+            <a:schemeClr val="accent1"/>
+          </a:effectRef>
+          <a:fontRef idx="minor">
+            <a:schemeClr val="lt1"/>
+          </a:fontRef>
+        </p:style>
+      </p:sp>
+      <p:sp>
+        <p:nvSpPr>
+          <p:cNvPr id="21" name="Oval 20"/>
+          <p:cNvSpPr/>
+          <p:nvPr/>
+        </p:nvSpPr>
+        <p:spPr>
+          <a:xfrm>
+            <a:off x="-839788" y="2895600"/>
+            <a:ext cx="2362200" cy="2362200"/>
+          </a:xfrm>
+          <a:prstGeom prst="ellipse">
+            <a:avLst/>
+          </a:prstGeom>
+          <a:gradFill flip="none" rotWithShape="1">
+            <a:gsLst>
+              <a:gs pos="0">
+                <a:schemeClr val="bg2">
+                  <a:lumMod val="60000"/>
+                  <a:lumOff val="40000"/>
+                  <a:alpha val="8000"/>
+                </a:schemeClr>
+              </a:gs>
+              <a:gs pos="72000">
+                <a:schemeClr val="bg2">
+                  <a:lumMod val="60000"/>
+                  <a:lumOff val="40000"/>
+                  <a:alpha val="0"/>
+                </a:schemeClr>
+              </a:gs>
+              <a:gs pos="36000">
+                <a:schemeClr val="bg2">
+                  <a:lumMod val="60000"/>
+                  <a:lumOff val="40000"/>
+                  <a:alpha val="8000"/>
+                </a:schemeClr>
+              </a:gs>
+            </a:gsLst>
+            <a:path path="circle">
+              <a:fillToRect l="50000" t="50000" r="50000" b="50000"/>
+            </a:path>
+            <a:tileRect/>
+          </a:gradFill>
+          <a:ln>
+            <a:noFill/>
+          </a:ln>
+          <a:effectLst/>
+        </p:spPr>
+        <p:style>
+          <a:lnRef idx="1">
+            <a:schemeClr val="accent1"/>
+          </a:lnRef>
+          <a:fillRef idx="3">
+            <a:schemeClr val="accent1"/>
+          </a:fillRef>
+          <a:effectRef idx="2">
+            <a:schemeClr val="accent1"/>
+          </a:effectRef>
+          <a:fontRef idx="minor">
+            <a:schemeClr val="lt1"/>
+          </a:fontRef>
+        </p:style>
+      </p:sp>
+      <p:sp>
+        <p:nvSpPr>
+          <p:cNvPr id="19" name="Rectangle 18"/>
+          <p:cNvSpPr/>
+          <p:nvPr/>
+        </p:nvSpPr>
+        <p:spPr>
+          <a:xfrm>
+            <a:off x="7745644" y="0"/>
+            <a:ext cx="685800" cy="1099458"/>
+          </a:xfrm>
+          <a:prstGeom prst="rect">
+            <a:avLst/>
+          </a:prstGeom>
+          <a:solidFill>
+            <a:schemeClr val="accent1"/>
+          </a:solidFill>
+          <a:ln>
+            <a:noFill/>
+          </a:ln>
+        </p:spPr>
+        <p:style>
+          <a:lnRef idx="1">
+            <a:schemeClr val="accent1"/>
+          </a:lnRef>
+          <a:fillRef idx="3">
+            <a:schemeClr val="accent1"/>
+          </a:fillRef>
+          <a:effectRef idx="2">
+            <a:schemeClr val="accent1"/>
+          </a:effectRef>
+          <a:fontRef idx="minor">
+            <a:schemeClr val="lt1"/>
+          </a:fontRef>
+        </p:style>
+      </p:sp>
+      <p:sp>
+        <p:nvSpPr>
+          <p:cNvPr id="2" name="Title Placeholder 1"/>
+          <p:cNvSpPr>
+            <a:spLocks noGrp="1"/>
+          </p:cNvSpPr>
+          <p:nvPr>
+            <p:ph type="title"/>
+          </p:nvPr>
+        </p:nvSpPr>
+        <p:spPr>
+          <a:xfrm>
+            <a:off x="484710" y="452718"/>
+            <a:ext cx="7055380" cy="1400530"/>
+          </a:xfrm>
+          <a:prstGeom prst="rect">
+            <a:avLst/>
+          </a:prstGeom>
+        </p:spPr>
+        <p:txBody>
+          <a:bodyPr vert="horz" lIns="91440" tIns="45720" rIns="91440" bIns="45720" rtlCol="0" anchor="t">
+            <a:noAutofit/>
+          </a:bodyPr>
+          <a:lstStyle/>
+          <a:p>
+            <a:r>
+              <a:rPr lang="en-US" smtClean="0"/>
+              <a:t>Click to edit Master title style</a:t>
+            </a:r>
+            <a:endParaRPr lang="en-US" dirty="0"/>
+          </a:p>
+        </p:txBody>
+      </p:sp>
+      <p:sp>
+        <p:nvSpPr>
+          <p:cNvPr id="3" name="Text Placeholder 2"/>
+          <p:cNvSpPr>
+            <a:spLocks noGrp="1"/>
+          </p:cNvSpPr>
+          <p:nvPr>
+            <p:ph type="body" idx="1"/>
+          </p:nvPr>
+        </p:nvSpPr>
+        <p:spPr>
+          <a:xfrm>
+            <a:off x="827700" y="2052925"/>
+            <a:ext cx="6711654" cy="4195481"/>
+          </a:xfrm>
+          <a:prstGeom prst="rect">
+            <a:avLst/>
+          </a:prstGeom>
+        </p:spPr>
+        <p:txBody>
+          <a:bodyPr vert="horz" lIns="91440" tIns="45720" rIns="91440" bIns="45720" rtlCol="0">
+            <a:normAutofit/>
+          </a:bodyPr>
+          <a:lstStyle/>
+          <a:p>
+            <a:pPr lvl="0"/>
+            <a:r>
+              <a:rPr lang="en-US" smtClean="0"/>
+              <a:t>Click to edit Master text styles</a:t>
+            </a:r>
+          </a:p>
+          <a:p>
+            <a:pPr lvl="1"/>
+            <a:r>
+              <a:rPr lang="en-US" smtClean="0"/>
+              <a:t>Second level</a:t>
+            </a:r>
+          </a:p>
+          <a:p>
+            <a:pPr lvl="2"/>
+            <a:r>
+              <a:rPr lang="en-US" smtClean="0"/>
+              <a:t>Third level</a:t>
+            </a:r>
+          </a:p>
+          <a:p>
+            <a:pPr lvl="3"/>
+            <a:r>
+              <a:rPr lang="en-US" smtClean="0"/>
+              <a:t>Fourth level</a:t>
+            </a:r>
+          </a:p>
+          <a:p>
+            <a:pPr lvl="4"/>
+            <a:r>
+              <a:rPr lang="en-US" smtClean="0"/>
+              <a:t>Fifth level</a:t>
+            </a:r>
+            <a:endParaRPr lang="en-US" dirty="0"/>
+          </a:p>
+        </p:txBody>
+      </p:sp>
+      <p:sp>
+        <p:nvSpPr>
+          <p:cNvPr id="4" name="Date Placeholder 3"/>
+          <p:cNvSpPr>
+            <a:spLocks noGrp="1"/>
+          </p:cNvSpPr>
+          <p:nvPr>
+            <p:ph type="dt" sz="half" idx="2"/>
+          </p:nvPr>
+        </p:nvSpPr>
+        <p:spPr>
+          <a:xfrm rot="5400000">
+            <a:off x="7494989" y="1828771"/>
+            <a:ext cx="990599" cy="228659"/>
+          </a:xfrm>
+          <a:prstGeom prst="rect">
+            <a:avLst/>
+          </a:prstGeom>
+        </p:spPr>
+        <p:txBody>
+          <a:bodyPr vert="horz" lIns="91440" tIns="45720" rIns="91440" bIns="45720" rtlCol="0" anchor="t"/>
+          <a:lstStyle>
+            <a:lvl1pPr algn="l">
+              <a:defRPr sz="1100" b="0" i="0">
+                <a:solidFill>
+                  <a:schemeClr val="tx1">
+                    <a:tint val="75000"/>
+                    <a:alpha val="60000"/>
+                  </a:schemeClr>
+                </a:solidFill>
+              </a:defRPr>
+            </a:lvl1pPr>
+          </a:lstStyle>
+          <a:p>
+            <a:fld id="{1D8BD707-D9CF-40AE-B4C6-C98DA3205C09}" type="datetimeFigureOut">
+              <a:rPr lang="en-US" smtClean="0"/>
+              <a:pPr/>
+              <a:t>7/30/2025</a:t>
+            </a:fld>
+            <a:endParaRPr lang="en-US"/>
+          </a:p>
+        </p:txBody>
+      </p:sp>
+      <p:sp>
+        <p:nvSpPr>
+          <p:cNvPr id="5" name="Footer Placeholder 4"/>
+          <p:cNvSpPr>
+            <a:spLocks noGrp="1"/>
+          </p:cNvSpPr>
+          <p:nvPr>
+            <p:ph type="ftr" sz="quarter" idx="3"/>
+          </p:nvPr>
+        </p:nvSpPr>
+        <p:spPr>
+          <a:xfrm rot="5400000">
+            <a:off x="6233335" y="3263371"/>
+            <a:ext cx="3859795" cy="228660"/>
+          </a:xfrm>
+          <a:prstGeom prst="rect">
+            <a:avLst/>
+          </a:prstGeom>
+        </p:spPr>
+        <p:txBody>
+          <a:bodyPr vert="horz" lIns="91440" tIns="45720" rIns="91440" bIns="45720" rtlCol="0" anchor="b"/>
+          <a:lstStyle>
+            <a:lvl1pPr algn="l">
+              <a:defRPr sz="1100" b="0" i="0">
+                <a:solidFill>
+                  <a:schemeClr val="tx1">
+                    <a:tint val="75000"/>
+                    <a:alpha val="60000"/>
+                  </a:schemeClr>
+                </a:solidFill>
+              </a:defRPr>
+            </a:lvl1pPr>
+          </a:lstStyle>
+          <a:p>
+            <a:endParaRPr lang="en-US"/>
+          </a:p>
+        </p:txBody>
+      </p:sp>
+      <p:sp>
+        <p:nvSpPr>
+          <p:cNvPr id="6" name="Slide Number Placeholder 5"/>
+          <p:cNvSpPr>
+            <a:spLocks noGrp="1"/>
+          </p:cNvSpPr>
+          <p:nvPr>
+            <p:ph type="sldNum" sz="quarter" idx="4"/>
+          </p:nvPr>
+        </p:nvSpPr>
+        <p:spPr bwMode="gray">
+          <a:xfrm>
+            <a:off x="7766431" y="295736"/>
+            <a:ext cx="628813" cy="767687"/>
+          </a:xfrm>
+          <a:prstGeom prst="rect">
+            <a:avLst/>
+          </a:prstGeom>
+        </p:spPr>
+        <p:txBody>
+          <a:bodyPr vert="horz" lIns="91440" tIns="45720" rIns="91440" bIns="45720" rtlCol="0" anchor="b"/>
+          <a:lstStyle>
+            <a:lvl1pPr algn="ctr">
+              <a:defRPr sz="2801" b="0" i="0">
+                <a:solidFill>
+                  <a:schemeClr val="tx1">
+                    <a:tint val="75000"/>
+                  </a:schemeClr>
+                </a:solidFill>
+              </a:defRPr>
+            </a:lvl1pPr>
+          </a:lstStyle>
+          <a:p>
+            <a:fld id="{B6F15528-21DE-4FAA-801E-634DDDAF4B2B}" type="slidenum">
+              <a:rPr lang="en-US" smtClean="0"/>
+              <a:pPr/>
+              <a:t>‹#›</a:t>
+            </a:fld>
+            <a:endParaRPr lang="en-US"/>
+          </a:p>
+        </p:txBody>
+      </p:sp>
+    </p:spTree>
+    <p:extLst>
+      <p:ext uri="{BB962C8B-B14F-4D97-AF65-F5344CB8AC3E}">
+        <p14:creationId xmlns:p14="http://schemas.microsoft.com/office/powerpoint/2010/main" val="2307809255"/>
+      </p:ext>
+    </p:extLst>
+  </p:cSld>
+  <p:clrMap bg1="dk1" tx1="lt1" bg2="dk2" tx2="lt2" accent1="accent1" accent2="accent2" accent3="accent3" accent4="accent4" accent5="accent5" accent6="accent6" hlink="hlink" folHlink="folHlink"/>
+  <p:sldLayoutIdLst>
+    <p:sldLayoutId id="2147483661" r:id="rId1"/>
+    <p:sldLayoutId id="2147483662" r:id="rId2"/>
+    <p:sldLayoutId id="2147483663" r:id="rId3"/>
+    <p:sldLayoutId id="2147483664" r:id="rId4"/>
+    <p:sldLayoutId id="2147483665" r:id="rId5"/>
+    <p:sldLayoutId id="2147483666" r:id="rId6"/>
+    <p:sldLayoutId id="2147483667" r:id="rId7"/>
+    <p:sldLayoutId id="2147483668" r:id="rId8"/>
+    <p:sldLayoutId id="2147483669" r:id="rId9"/>
+    <p:sldLayoutId id="2147483670" r:id="rId10"/>
+    <p:sldLayoutId id="2147483671" r:id="rId11"/>
+    <p:sldLayoutId id="2147483672" r:id="rId12"/>
+    <p:sldLayoutId id="2147483673" r:id="rId13"/>
+    <p:sldLayoutId id="2147483674" r:id="rId14"/>
+    <p:sldLayoutId id="2147483675" r:id="rId15"/>
+    <p:sldLayoutId id="2147483676" r:id="rId16"/>
+    <p:sldLayoutId id="2147483677" r:id="rId17"/>
+  </p:sldLayoutIdLst>
+  <p:txStyles>
+    <p:titleStyle>
+      <a:lvl1pPr algn="l" defTabSz="457207" rtl="0" eaLnBrk="1" latinLnBrk="0" hangingPunct="1">
+        <a:spcBef>
+          <a:spcPct val="0"/>
+        </a:spcBef>
+        <a:buNone/>
+        <a:defRPr sz="4200" b="0" i="0" kern="1200">
+          <a:solidFill>
+            <a:schemeClr val="tx2"/>
+          </a:solidFill>
+          <a:latin typeface="+mj-lt"/>
+          <a:ea typeface="+mj-ea"/>
+          <a:cs typeface="+mj-cs"/>
+        </a:defRPr>
+      </a:lvl1pPr>
+      <a:lvl2pPr eaLnBrk="1" hangingPunct="1">
+        <a:defRPr>
+          <a:solidFill>
+            <a:schemeClr val="tx2"/>
+          </a:solidFill>
+        </a:defRPr>
+      </a:lvl2pPr>
+      <a:lvl3pPr eaLnBrk="1" hangingPunct="1">
+        <a:defRPr>
+          <a:solidFill>
+            <a:schemeClr val="tx2"/>
+          </a:solidFill>
+        </a:defRPr>
+      </a:lvl3pPr>
+      <a:lvl4pPr eaLnBrk="1" hangingPunct="1">
+        <a:defRPr>
+          <a:solidFill>
+            <a:schemeClr val="tx2"/>
+          </a:solidFill>
+        </a:defRPr>
+      </a:lvl4pPr>
+      <a:lvl5pPr eaLnBrk="1" hangingPunct="1">
+        <a:defRPr>
+          <a:solidFill>
+            <a:schemeClr val="tx2"/>
+          </a:solidFill>
+        </a:defRPr>
+      </a:lvl5pPr>
+      <a:lvl6pPr eaLnBrk="1" hangingPunct="1">
+        <a:defRPr>
+          <a:solidFill>
+            <a:schemeClr val="tx2"/>
+          </a:solidFill>
+        </a:defRPr>
+      </a:lvl6pPr>
+      <a:lvl7pPr eaLnBrk="1" hangingPunct="1">
+        <a:defRPr>
+          <a:solidFill>
+            <a:schemeClr val="tx2"/>
+          </a:solidFill>
+        </a:defRPr>
+      </a:lvl7pPr>
+      <a:lvl8pPr eaLnBrk="1" hangingPunct="1">
+        <a:defRPr>
+          <a:solidFill>
+            <a:schemeClr val="tx2"/>
+          </a:solidFill>
+        </a:defRPr>
+      </a:lvl8pPr>
+      <a:lvl9pPr eaLnBrk="1" hangingPunct="1">
+        <a:defRPr>
+          <a:solidFill>
+            <a:schemeClr val="tx2"/>
+          </a:solidFill>
+        </a:defRPr>
+      </a:lvl9pPr>
+    </p:titleStyle>
+    <p:bodyStyle>
+      <a:lvl1pPr marL="342906" indent="-342906" algn="l" defTabSz="457207" rtl="0" eaLnBrk="1" latinLnBrk="0" hangingPunct="1">
+        <a:spcBef>
+          <a:spcPts val="1000"/>
+        </a:spcBef>
+        <a:spcAft>
+          <a:spcPts val="0"/>
+        </a:spcAft>
+        <a:buClr>
+          <a:schemeClr val="bg2">
+            <a:lumMod val="40000"/>
+            <a:lumOff val="60000"/>
+          </a:schemeClr>
+        </a:buClr>
+        <a:buSzPct val="80000"/>
+        <a:buFont typeface="Wingdings 3" charset="2"/>
+        <a:buChar char=""/>
+        <a:defRPr sz="2000" b="0" i="0" kern="1200">
+          <a:solidFill>
+            <a:schemeClr val="tx1"/>
+          </a:solidFill>
+          <a:latin typeface="+mj-lt"/>
+          <a:ea typeface="+mj-ea"/>
+          <a:cs typeface="+mj-cs"/>
+        </a:defRPr>
+      </a:lvl1pPr>
+      <a:lvl2pPr marL="742962" indent="-285755" algn="l" defTabSz="457207" rtl="0" eaLnBrk="1" latinLnBrk="0" hangingPunct="1">
+        <a:spcBef>
+          <a:spcPts val="1000"/>
+        </a:spcBef>
+        <a:spcAft>
+          <a:spcPts val="0"/>
+        </a:spcAft>
+        <a:buClr>
+          <a:schemeClr val="bg2">
+            <a:lumMod val="40000"/>
+            <a:lumOff val="60000"/>
+          </a:schemeClr>
+        </a:buClr>
+        <a:buSzPct val="80000"/>
+        <a:buFont typeface="Wingdings 3" charset="2"/>
+        <a:buChar char=""/>
+        <a:defRPr sz="1800" b="0" i="0" kern="1200">
+          <a:solidFill>
+            <a:schemeClr val="tx1"/>
+          </a:solidFill>
+          <a:latin typeface="+mj-lt"/>
+          <a:ea typeface="+mj-ea"/>
+          <a:cs typeface="+mj-cs"/>
+        </a:defRPr>
+      </a:lvl2pPr>
+      <a:lvl3pPr marL="1143020" indent="-228604" algn="l" defTabSz="457207" rtl="0" eaLnBrk="1" latinLnBrk="0" hangingPunct="1">
+        <a:spcBef>
+          <a:spcPts val="1000"/>
+        </a:spcBef>
+        <a:spcAft>
+          <a:spcPts val="0"/>
+        </a:spcAft>
+        <a:buClr>
+          <a:schemeClr val="bg2">
+            <a:lumMod val="40000"/>
+            <a:lumOff val="60000"/>
+          </a:schemeClr>
+        </a:buClr>
+        <a:buSzPct val="80000"/>
+        <a:buFont typeface="Wingdings 3" charset="2"/>
+        <a:buChar char=""/>
+        <a:defRPr sz="1600" b="0" i="0" kern="1200">
+          <a:solidFill>
+            <a:schemeClr val="tx1"/>
+          </a:solidFill>
+          <a:latin typeface="+mj-lt"/>
+          <a:ea typeface="+mj-ea"/>
+          <a:cs typeface="+mj-cs"/>
+        </a:defRPr>
+      </a:lvl3pPr>
+      <a:lvl4pPr marL="1600227" indent="-228604" algn="l" defTabSz="457207" rtl="0" eaLnBrk="1" latinLnBrk="0" hangingPunct="1">
+        <a:spcBef>
+          <a:spcPts val="1000"/>
+        </a:spcBef>
+        <a:spcAft>
+          <a:spcPts val="0"/>
+        </a:spcAft>
+        <a:buClr>
+          <a:schemeClr val="bg2">
+            <a:lumMod val="40000"/>
+            <a:lumOff val="60000"/>
+          </a:schemeClr>
+        </a:buClr>
+        <a:buSzPct val="80000"/>
+        <a:buFont typeface="Wingdings 3" charset="2"/>
+        <a:buChar char=""/>
+        <a:defRPr sz="1400" b="0" i="0" kern="1200">
+          <a:solidFill>
+            <a:schemeClr val="tx1"/>
+          </a:solidFill>
+          <a:latin typeface="+mj-lt"/>
+          <a:ea typeface="+mj-ea"/>
+          <a:cs typeface="+mj-cs"/>
+        </a:defRPr>
+      </a:lvl4pPr>
+      <a:lvl5pPr marL="2057434" indent="-228604" algn="l" defTabSz="457207" rtl="0" eaLnBrk="1" latinLnBrk="0" hangingPunct="1">
+        <a:spcBef>
+          <a:spcPts val="1000"/>
+        </a:spcBef>
+        <a:spcAft>
+          <a:spcPts val="0"/>
+        </a:spcAft>
+        <a:buClr>
+          <a:schemeClr val="bg2">
+            <a:lumMod val="40000"/>
+            <a:lumOff val="60000"/>
+          </a:schemeClr>
+        </a:buClr>
+        <a:buSzPct val="80000"/>
+        <a:buFont typeface="Wingdings 3" charset="2"/>
+        <a:buChar char=""/>
+        <a:defRPr sz="1400" b="0" i="0" kern="1200">
+          <a:solidFill>
+            <a:schemeClr val="tx1"/>
+          </a:solidFill>
+          <a:latin typeface="+mj-lt"/>
+          <a:ea typeface="+mj-ea"/>
+          <a:cs typeface="+mj-cs"/>
+        </a:defRPr>
+      </a:lvl5pPr>
+      <a:lvl6pPr marL="2514642" indent="-228604" algn="l" defTabSz="457207" rtl="0" eaLnBrk="1" latinLnBrk="0" hangingPunct="1">
+        <a:spcBef>
+          <a:spcPts val="1000"/>
+        </a:spcBef>
+        <a:spcAft>
+          <a:spcPts val="0"/>
+        </a:spcAft>
+        <a:buClr>
+          <a:schemeClr val="bg2">
+            <a:lumMod val="40000"/>
+            <a:lumOff val="60000"/>
+          </a:schemeClr>
+        </a:buClr>
+        <a:buSzPct val="80000"/>
+        <a:buFont typeface="Wingdings 3" charset="2"/>
+        <a:buChar char=""/>
+        <a:defRPr sz="1400" b="0" i="0" kern="1200">
+          <a:solidFill>
+            <a:schemeClr val="tx1"/>
+          </a:solidFill>
+          <a:latin typeface="+mj-lt"/>
+          <a:ea typeface="+mj-ea"/>
+          <a:cs typeface="+mj-cs"/>
+        </a:defRPr>
+      </a:lvl6pPr>
+      <a:lvl7pPr marL="2971849" indent="-228604" algn="l" defTabSz="457207" rtl="0" eaLnBrk="1" latinLnBrk="0" hangingPunct="1">
+        <a:spcBef>
+          <a:spcPts val="1000"/>
+        </a:spcBef>
+        <a:spcAft>
+          <a:spcPts val="0"/>
+        </a:spcAft>
+        <a:buClr>
+          <a:schemeClr val="bg2">
+            <a:lumMod val="40000"/>
+            <a:lumOff val="60000"/>
+          </a:schemeClr>
+        </a:buClr>
+        <a:buSzPct val="80000"/>
+        <a:buFont typeface="Wingdings 3" charset="2"/>
+        <a:buChar char=""/>
+        <a:defRPr sz="1400" b="0" i="0" kern="1200">
+          <a:solidFill>
+            <a:schemeClr val="tx1"/>
+          </a:solidFill>
+          <a:latin typeface="+mj-lt"/>
+          <a:ea typeface="+mj-ea"/>
+          <a:cs typeface="+mj-cs"/>
+        </a:defRPr>
+      </a:lvl7pPr>
+      <a:lvl8pPr marL="3429057" indent="-228604" algn="l" defTabSz="457207" rtl="0" eaLnBrk="1" latinLnBrk="0" hangingPunct="1">
+        <a:spcBef>
+          <a:spcPts val="1000"/>
+        </a:spcBef>
+        <a:spcAft>
+          <a:spcPts val="0"/>
+        </a:spcAft>
+        <a:buClr>
+          <a:schemeClr val="bg2">
+            <a:lumMod val="40000"/>
+            <a:lumOff val="60000"/>
+          </a:schemeClr>
+        </a:buClr>
+        <a:buSzPct val="80000"/>
+        <a:buFont typeface="Wingdings 3" charset="2"/>
+        <a:buChar char=""/>
+        <a:defRPr sz="1400" b="0" i="0" kern="1200">
+          <a:solidFill>
+            <a:schemeClr val="tx1"/>
+          </a:solidFill>
+          <a:latin typeface="+mj-lt"/>
+          <a:ea typeface="+mj-ea"/>
+          <a:cs typeface="+mj-cs"/>
+        </a:defRPr>
+      </a:lvl8pPr>
+      <a:lvl9pPr marL="3886264" indent="-228604" algn="l" defTabSz="457207" rtl="0" eaLnBrk="1" latinLnBrk="0" hangingPunct="1">
+        <a:spcBef>
+          <a:spcPts val="1000"/>
+        </a:spcBef>
+        <a:spcAft>
+          <a:spcPts val="0"/>
+        </a:spcAft>
+        <a:buClr>
+          <a:schemeClr val="bg2">
+            <a:lumMod val="40000"/>
+            <a:lumOff val="60000"/>
+          </a:schemeClr>
+        </a:buClr>
+        <a:buSzPct val="80000"/>
+        <a:buFont typeface="Wingdings 3" charset="2"/>
+        <a:buChar char=""/>
+        <a:defRPr sz="1400" b="0" i="0" kern="1200">
+          <a:solidFill>
+            <a:schemeClr val="tx1"/>
+          </a:solidFill>
+          <a:latin typeface="+mj-lt"/>
+          <a:ea typeface="+mj-ea"/>
+          <a:cs typeface="+mj-cs"/>
+        </a:defRPr>
+      </a:lvl9pPr>
+    </p:bodyStyle>
+    <p:otherStyle>
+      <a:defPPr>
+        <a:defRPr lang="en-US"/>
+      </a:defPPr>
+      <a:lvl1pPr marL="0" algn="l" defTabSz="457207" rtl="0" eaLnBrk="1" latinLnBrk="0" hangingPunct="1">
+        <a:defRPr sz="1800" kern="1200">
+          <a:solidFill>
+            <a:schemeClr val="tx1"/>
+          </a:solidFill>
+          <a:latin typeface="+mn-lt"/>
+          <a:ea typeface="+mn-ea"/>
+          <a:cs typeface="+mn-cs"/>
+        </a:defRPr>
+      </a:lvl1pPr>
+      <a:lvl2pPr marL="457207" algn="l" defTabSz="457207" rtl="0" eaLnBrk="1" latinLnBrk="0" hangingPunct="1">
+        <a:defRPr sz="1800" kern="1200">
+          <a:solidFill>
+            <a:schemeClr val="tx1"/>
+          </a:solidFill>
+          <a:latin typeface="+mn-lt"/>
+          <a:ea typeface="+mn-ea"/>
+          <a:cs typeface="+mn-cs"/>
+        </a:defRPr>
+      </a:lvl2pPr>
+      <a:lvl3pPr marL="914415" algn="l" defTabSz="457207" rtl="0" eaLnBrk="1" latinLnBrk="0" hangingPunct="1">
+        <a:defRPr sz="1800" kern="1200">
+          <a:solidFill>
+            <a:schemeClr val="tx1"/>
+          </a:solidFill>
+          <a:latin typeface="+mn-lt"/>
+          <a:ea typeface="+mn-ea"/>
+          <a:cs typeface="+mn-cs"/>
+        </a:defRPr>
+      </a:lvl3pPr>
+      <a:lvl4pPr marL="1371622" algn="l" defTabSz="457207" rtl="0" eaLnBrk="1" latinLnBrk="0" hangingPunct="1">
+        <a:defRPr sz="1800" kern="1200">
+          <a:solidFill>
+            <a:schemeClr val="tx1"/>
+          </a:solidFill>
+          <a:latin typeface="+mn-lt"/>
+          <a:ea typeface="+mn-ea"/>
+          <a:cs typeface="+mn-cs"/>
+        </a:defRPr>
+      </a:lvl4pPr>
+      <a:lvl5pPr marL="1828831" algn="l" defTabSz="457207" rtl="0" eaLnBrk="1" latinLnBrk="0" hangingPunct="1">
+        <a:defRPr sz="1800" kern="1200">
+          <a:solidFill>
+            <a:schemeClr val="tx1"/>
+          </a:solidFill>
+          <a:latin typeface="+mn-lt"/>
+          <a:ea typeface="+mn-ea"/>
+          <a:cs typeface="+mn-cs"/>
+        </a:defRPr>
+      </a:lvl5pPr>
+      <a:lvl6pPr marL="2286038" algn="l" defTabSz="457207" rtl="0" eaLnBrk="1" latinLnBrk="0" hangingPunct="1">
+        <a:defRPr sz="1800" kern="1200">
+          <a:solidFill>
+            <a:schemeClr val="tx1"/>
+          </a:solidFill>
+          <a:latin typeface="+mn-lt"/>
+          <a:ea typeface="+mn-ea"/>
+          <a:cs typeface="+mn-cs"/>
+        </a:defRPr>
+      </a:lvl6pPr>
+      <a:lvl7pPr marL="2743246" algn="l" defTabSz="457207" rtl="0" eaLnBrk="1" latinLnBrk="0" hangingPunct="1">
+        <a:defRPr sz="1800" kern="1200">
+          <a:solidFill>
+            <a:schemeClr val="tx1"/>
+          </a:solidFill>
+          <a:latin typeface="+mn-lt"/>
+          <a:ea typeface="+mn-ea"/>
+          <a:cs typeface="+mn-cs"/>
+        </a:defRPr>
+      </a:lvl7pPr>
+      <a:lvl8pPr marL="3200453" algn="l" defTabSz="457207" rtl="0" eaLnBrk="1" latinLnBrk="0" hangingPunct="1">
+        <a:defRPr sz="1800" kern="1200">
+          <a:solidFill>
+            <a:schemeClr val="tx1"/>
+          </a:solidFill>
+          <a:latin typeface="+mn-lt"/>
+          <a:ea typeface="+mn-ea"/>
+          <a:cs typeface="+mn-cs"/>
+        </a:defRPr>
+      </a:lvl8pPr>
+      <a:lvl9pPr marL="3657661" algn="l" defTabSz="457207" rtl="0" eaLnBrk="1" latinLnBrk="0" hangingPunct="1">
+        <a:defRPr sz="1800" kern="1200">
+          <a:solidFill>
+            <a:schemeClr val="tx1"/>
+          </a:solidFill>
+          <a:latin typeface="+mn-lt"/>
+          <a:ea typeface="+mn-ea"/>
+          <a:cs typeface="+mn-cs"/>
+        </a:defRPr>
+      </a:lvl9pPr>
+    </p:otherStyle>
+  </p:txStyles>
+</p:sldMaster>
+</file>
+
 <file path=ppt/slides/slide1.xml><?xml version="1.0" encoding="utf-8"?>
 <p:sld xmlns:a="http://schemas.openxmlformats.org/drawingml/2006/main" xmlns:r="http://schemas.openxmlformats.org/officeDocument/2006/relationships" xmlns:p="http://schemas.openxmlformats.org/presentationml/2006/main">
   <p:cSld>
@@ -3190,65 +9342,163 @@
         <p:spPr/>
         <p:txBody>
           <a:bodyPr>
-            <a:normAutofit fontScale="92500" lnSpcReduction="20000"/>
+            <a:normAutofit fontScale="77500" lnSpcReduction="20000"/>
           </a:bodyPr>
           <a:lstStyle/>
           <a:p>
             <a:r>
+              <a:rPr lang="en-US" b="1" dirty="0"/>
+              <a:t>Structured Development Process</a:t>
+            </a:r>
+          </a:p>
+          <a:p>
+            <a:pPr lvl="1"/>
+            <a:r>
+              <a:rPr lang="en-US" dirty="0"/>
+              <a:t>Promotes </a:t>
+            </a:r>
+            <a:r>
+              <a:rPr lang="en-US" b="1" dirty="0"/>
+              <a:t>modular</a:t>
+            </a:r>
+            <a:r>
+              <a:rPr lang="en-US" dirty="0"/>
+              <a:t>, </a:t>
+            </a:r>
+            <a:r>
+              <a:rPr lang="en-US" b="1" dirty="0"/>
+              <a:t>scalable</a:t>
+            </a:r>
+            <a:r>
+              <a:rPr lang="en-US" dirty="0"/>
+              <a:t>, and </a:t>
+            </a:r>
+            <a:r>
+              <a:rPr lang="en-US" b="1" dirty="0"/>
+              <a:t>reusable</a:t>
+            </a:r>
+            <a:r>
+              <a:rPr lang="en-US" dirty="0"/>
+              <a:t> code.</a:t>
+            </a:r>
+          </a:p>
+          <a:p>
+            <a:pPr lvl="1"/>
+            <a:r>
+              <a:rPr lang="en-US" dirty="0"/>
+              <a:t>Follows defined </a:t>
+            </a:r>
+            <a:r>
+              <a:rPr lang="en-US" b="1" dirty="0"/>
+              <a:t>development methodologies</a:t>
+            </a:r>
+            <a:r>
+              <a:rPr lang="en-US" dirty="0"/>
+              <a:t> (Agile, Waterfall, etc.).</a:t>
+            </a:r>
+          </a:p>
+          <a:p>
+            <a:r>
               <a:rPr lang="en-US" b="1" dirty="0" smtClean="0"/>
-              <a:t>Enhanced </a:t>
+              <a:t>Improved </a:t>
             </a:r>
             <a:r>
               <a:rPr lang="en-US" b="1" dirty="0"/>
-              <a:t>Security</a:t>
+              <a:t>Collaboration</a:t>
             </a:r>
           </a:p>
           <a:p>
             <a:pPr lvl="1"/>
             <a:r>
               <a:rPr lang="en-US" dirty="0"/>
-              <a:t>Includes practices like input validation, authentication, authorization, and encryption.</a:t>
+              <a:t>Bridges the gap between </a:t>
+            </a:r>
+            <a:r>
+              <a:rPr lang="en-US" b="1" dirty="0"/>
+              <a:t>designers</a:t>
+            </a:r>
+            <a:r>
+              <a:rPr lang="en-US" dirty="0"/>
+              <a:t>, </a:t>
+            </a:r>
+            <a:r>
+              <a:rPr lang="en-US" b="1" dirty="0"/>
+              <a:t>developers</a:t>
+            </a:r>
+            <a:r>
+              <a:rPr lang="en-US" dirty="0"/>
+              <a:t>, and </a:t>
+            </a:r>
+            <a:r>
+              <a:rPr lang="en-US" b="1" dirty="0"/>
+              <a:t>stakeholders</a:t>
+            </a:r>
+            <a:r>
+              <a:rPr lang="en-US" dirty="0"/>
+              <a:t>.</a:t>
+            </a:r>
+          </a:p>
+          <a:p>
+            <a:pPr lvl="1"/>
+            <a:r>
+              <a:rPr lang="en-US" dirty="0"/>
+              <a:t>Encourages better </a:t>
+            </a:r>
+            <a:r>
+              <a:rPr lang="en-US" b="1" dirty="0"/>
+              <a:t>communication</a:t>
+            </a:r>
+            <a:r>
+              <a:rPr lang="en-US" dirty="0"/>
+              <a:t> through documentation and standards.</a:t>
             </a:r>
           </a:p>
           <a:p>
             <a:r>
               <a:rPr lang="en-US" b="1" dirty="0" smtClean="0"/>
-              <a:t>Maintainability </a:t>
+              <a:t>Quality </a:t>
             </a:r>
             <a:r>
               <a:rPr lang="en-US" b="1" dirty="0"/>
-              <a:t>&amp; Scalability</a:t>
+              <a:t>Assurance</a:t>
             </a:r>
           </a:p>
           <a:p>
             <a:pPr lvl="1"/>
             <a:r>
               <a:rPr lang="en-US" dirty="0"/>
-              <a:t>Easier to update, debug, and scale applications over time.</a:t>
+              <a:t>Emphasizes </a:t>
+            </a:r>
+            <a:r>
+              <a:rPr lang="en-US" b="1" dirty="0"/>
+              <a:t>testing</a:t>
+            </a:r>
+            <a:r>
+              <a:rPr lang="en-US" dirty="0"/>
+              <a:t>, </a:t>
+            </a:r>
+            <a:r>
+              <a:rPr lang="en-US" b="1" dirty="0"/>
+              <a:t>validation</a:t>
+            </a:r>
+            <a:r>
+              <a:rPr lang="en-US" dirty="0"/>
+              <a:t>, and </a:t>
+            </a:r>
+            <a:r>
+              <a:rPr lang="en-US" b="1" dirty="0"/>
+              <a:t>performance optimization</a:t>
+            </a:r>
+            <a:r>
+              <a:rPr lang="en-US" dirty="0"/>
+              <a:t>.</a:t>
             </a:r>
           </a:p>
           <a:p>
             <a:pPr lvl="1"/>
             <a:r>
               <a:rPr lang="en-US" dirty="0"/>
-              <a:t>Use of design patterns and frameworks improves adaptability.</a:t>
-            </a:r>
-          </a:p>
-          <a:p>
-            <a:r>
-              <a:rPr lang="en-US" b="1" dirty="0" smtClean="0"/>
-              <a:t>Better </a:t>
-            </a:r>
-            <a:r>
-              <a:rPr lang="en-US" b="1" dirty="0"/>
-              <a:t>User Experience (UX)</a:t>
-            </a:r>
-          </a:p>
-          <a:p>
-            <a:pPr lvl="1"/>
-            <a:r>
-              <a:rPr lang="en-US" dirty="0"/>
-              <a:t>Incorporates UI/UX principles, accessibility standards, and responsive design.</a:t>
+              <a:t>Reduces bugs and improves reliability.</a:t>
             </a:r>
           </a:p>
           <a:p>
@@ -3259,7 +9509,7 @@
     </p:spTree>
     <p:extLst>
       <p:ext uri="{BB962C8B-B14F-4D97-AF65-F5344CB8AC3E}">
-        <p14:creationId xmlns:p14="http://schemas.microsoft.com/office/powerpoint/2010/main" val="3367198076"/>
+        <p14:creationId xmlns:p14="http://schemas.microsoft.com/office/powerpoint/2010/main" val="902697418"/>
       </p:ext>
     </p:extLst>
   </p:cSld>
@@ -3305,23 +9555,13 @@
         </p:nvSpPr>
         <p:spPr/>
         <p:txBody>
-          <a:bodyPr>
-            <a:normAutofit fontScale="90000"/>
-          </a:bodyPr>
+          <a:bodyPr/>
           <a:lstStyle/>
           <a:p>
             <a:r>
               <a:rPr lang="en-US" dirty="0"/>
-              <a:t>Classification of Web </a:t>
-            </a:r>
-            <a:r>
-              <a:rPr lang="en-US" dirty="0" smtClean="0"/>
-              <a:t>Applications</a:t>
-            </a:r>
-            <a:br>
-              <a:rPr lang="en-US" dirty="0" smtClean="0"/>
-            </a:br>
-            <a:endParaRPr lang="en-US" dirty="0"/>
+              <a:t>Benefits of Web Engineering</a:t>
+            </a:r>
           </a:p>
         </p:txBody>
       </p:sp>
@@ -3343,60 +9583,60 @@
           <a:lstStyle/>
           <a:p>
             <a:r>
+              <a:rPr lang="en-US" b="1" dirty="0" smtClean="0"/>
+              <a:t>Enhanced </a:t>
+            </a:r>
+            <a:r>
               <a:rPr lang="en-US" b="1" dirty="0"/>
-              <a:t>Static Web Applications</a:t>
+              <a:t>Security</a:t>
             </a:r>
           </a:p>
           <a:p>
             <a:pPr lvl="1"/>
             <a:r>
               <a:rPr lang="en-US" dirty="0"/>
-              <a:t>Deliver fixed content to the user.</a:t>
+              <a:t>Includes practices like input validation, authentication, authorization, and encryption.</a:t>
+            </a:r>
+          </a:p>
+          <a:p>
+            <a:r>
+              <a:rPr lang="en-US" b="1" dirty="0" smtClean="0"/>
+              <a:t>Maintainability </a:t>
+            </a:r>
+            <a:r>
+              <a:rPr lang="en-US" b="1" dirty="0"/>
+              <a:t>&amp; Scalability</a:t>
             </a:r>
           </a:p>
           <a:p>
             <a:pPr lvl="1"/>
             <a:r>
-              <a:rPr lang="en-US" dirty="0" smtClean="0"/>
-              <a:t>Simple </a:t>
-            </a:r>
-            <a:r>
               <a:rPr lang="en-US" dirty="0"/>
-              <a:t>HTML pages with no or minimal interactivity.</a:t>
+              <a:t>Easier to update, debug, and scale applications over time.</a:t>
             </a:r>
           </a:p>
           <a:p>
             <a:pPr lvl="1"/>
             <a:r>
               <a:rPr lang="en-US" dirty="0"/>
-              <a:t>Example: Company brochure sites, informational pages.</a:t>
-            </a:r>
-          </a:p>
-          <a:p>
+              <a:t>Use of design patterns and frameworks improves adaptability.</a:t>
+            </a:r>
+          </a:p>
+          <a:p>
+            <a:r>
+              <a:rPr lang="en-US" b="1" dirty="0" smtClean="0"/>
+              <a:t>Better </a:t>
+            </a:r>
             <a:r>
               <a:rPr lang="en-US" b="1" dirty="0"/>
-              <a:t>2. Dynamic Web Applications</a:t>
+              <a:t>User Experience (UX)</a:t>
             </a:r>
           </a:p>
           <a:p>
             <a:pPr lvl="1"/>
             <a:r>
               <a:rPr lang="en-US" dirty="0"/>
-              <a:t>Content is generated in real-time based on user interaction or data.</a:t>
-            </a:r>
-          </a:p>
-          <a:p>
-            <a:pPr lvl="1"/>
-            <a:r>
-              <a:rPr lang="en-US" dirty="0"/>
-              <a:t>Uses server-side scripting (e.g., PHP, ASP.NET, Node.js).</a:t>
-            </a:r>
-          </a:p>
-          <a:p>
-            <a:pPr lvl="1"/>
-            <a:r>
-              <a:rPr lang="en-US" dirty="0"/>
-              <a:t>Example: News portals, blogs.</a:t>
+              <a:t>Incorporates UI/UX principles, accessibility standards, and responsive design.</a:t>
             </a:r>
           </a:p>
           <a:p>
@@ -3407,7 +9647,7 @@
     </p:spTree>
     <p:extLst>
       <p:ext uri="{BB962C8B-B14F-4D97-AF65-F5344CB8AC3E}">
-        <p14:creationId xmlns:p14="http://schemas.microsoft.com/office/powerpoint/2010/main" val="283211985"/>
+        <p14:creationId xmlns:p14="http://schemas.microsoft.com/office/powerpoint/2010/main" val="3367198076"/>
       </p:ext>
     </p:extLst>
   </p:cSld>
@@ -3486,105 +9726,65 @@
         <p:spPr/>
         <p:txBody>
           <a:bodyPr>
-            <a:normAutofit fontScale="77500" lnSpcReduction="20000"/>
+            <a:normAutofit fontScale="92500" lnSpcReduction="20000"/>
           </a:bodyPr>
           <a:lstStyle/>
           <a:p>
             <a:r>
               <a:rPr lang="en-US" b="1" dirty="0"/>
-              <a:t>E-commerce Web Applications</a:t>
+              <a:t>Static Web Applications</a:t>
             </a:r>
           </a:p>
           <a:p>
             <a:pPr lvl="1"/>
             <a:r>
               <a:rPr lang="en-US" dirty="0"/>
-              <a:t>Facilitate online buying and selling of goods and services.</a:t>
+              <a:t>Deliver fixed content to the user.</a:t>
             </a:r>
           </a:p>
           <a:p>
             <a:pPr lvl="1"/>
             <a:r>
+              <a:rPr lang="en-US" dirty="0" smtClean="0"/>
+              <a:t>Simple </a:t>
+            </a:r>
+            <a:r>
               <a:rPr lang="en-US" dirty="0"/>
-              <a:t>Support payment processing, product catalogs, shopping carts.</a:t>
+              <a:t>HTML pages with no or minimal interactivity.</a:t>
             </a:r>
           </a:p>
           <a:p>
             <a:pPr lvl="1"/>
             <a:r>
               <a:rPr lang="en-US" dirty="0"/>
-              <a:t>Example: Amazon, eBay.</a:t>
-            </a:r>
-          </a:p>
-          <a:p>
-            <a:r>
-              <a:rPr lang="en-US" b="1" dirty="0" smtClean="0"/>
-              <a:t>Portal </a:t>
-            </a:r>
+              <a:t>Example: Company brochure sites, informational pages.</a:t>
+            </a:r>
+          </a:p>
+          <a:p>
             <a:r>
               <a:rPr lang="en-US" b="1" dirty="0"/>
-              <a:t>Web Applications</a:t>
+              <a:t>2. Dynamic Web Applications</a:t>
             </a:r>
           </a:p>
           <a:p>
             <a:pPr lvl="1"/>
             <a:r>
               <a:rPr lang="en-US" dirty="0"/>
-              <a:t>Provide a single point of access to a variety of information and services.</a:t>
+              <a:t>Content is generated in real-time based on user interaction or data.</a:t>
             </a:r>
           </a:p>
           <a:p>
             <a:pPr lvl="1"/>
             <a:r>
               <a:rPr lang="en-US" dirty="0"/>
-              <a:t>Often integrate multiple systems and databases.</a:t>
+              <a:t>Uses server-side scripting (e.g., PHP, ASP.NET, Node.js).</a:t>
             </a:r>
           </a:p>
           <a:p>
             <a:pPr lvl="1"/>
             <a:r>
               <a:rPr lang="en-US" dirty="0"/>
-              <a:t>Example: Yahoo!, MSN, government portals.</a:t>
-            </a:r>
-          </a:p>
-          <a:p>
-            <a:r>
-              <a:rPr lang="en-US" b="1" dirty="0" smtClean="0"/>
-              <a:t>Content </a:t>
-            </a:r>
-            <a:r>
-              <a:rPr lang="en-US" b="1" dirty="0"/>
-              <a:t>Management Systems (CMS)</a:t>
-            </a:r>
-          </a:p>
-          <a:p>
-            <a:pPr lvl="1"/>
-            <a:r>
-              <a:rPr lang="en-US" dirty="0"/>
-              <a:t>Allow users to create, edit, and manage website content without technical knowledge.</a:t>
-            </a:r>
-          </a:p>
-          <a:p>
-            <a:pPr lvl="1"/>
-            <a:r>
-              <a:rPr lang="en-US" dirty="0"/>
-              <a:t>Example: </a:t>
-            </a:r>
-            <a:r>
-              <a:rPr lang="en-US" dirty="0" err="1"/>
-              <a:t>WordPress</a:t>
-            </a:r>
-            <a:r>
-              <a:rPr lang="en-US" dirty="0"/>
-              <a:t>, </a:t>
-            </a:r>
-            <a:r>
-              <a:rPr lang="en-US" dirty="0" err="1"/>
-              <a:t>Joomla</a:t>
-            </a:r>
-            <a:r>
-              <a:rPr lang="en-US" dirty="0"/>
-              <a:t>.</a:t>
+              <a:t>Example: News portals, blogs.</a:t>
             </a:r>
           </a:p>
           <a:p>
@@ -3595,7 +9795,7 @@
     </p:spTree>
     <p:extLst>
       <p:ext uri="{BB962C8B-B14F-4D97-AF65-F5344CB8AC3E}">
-        <p14:creationId xmlns:p14="http://schemas.microsoft.com/office/powerpoint/2010/main" val="1328190805"/>
+        <p14:creationId xmlns:p14="http://schemas.microsoft.com/office/powerpoint/2010/main" val="283211985"/>
       </p:ext>
     </p:extLst>
   </p:cSld>
@@ -3674,6 +9874,265 @@
         <p:spPr/>
         <p:txBody>
           <a:bodyPr>
+            <a:normAutofit fontScale="70000" lnSpcReduction="20000"/>
+          </a:bodyPr>
+          <a:lstStyle/>
+          <a:p>
+            <a:r>
+              <a:rPr lang="en-US" b="1" dirty="0"/>
+              <a:t>E-commerce Web Applications</a:t>
+            </a:r>
+          </a:p>
+          <a:p>
+            <a:pPr lvl="1"/>
+            <a:r>
+              <a:rPr lang="en-US" dirty="0"/>
+              <a:t>Facilitate online buying and selling of goods and services.</a:t>
+            </a:r>
+          </a:p>
+          <a:p>
+            <a:pPr lvl="1"/>
+            <a:r>
+              <a:rPr lang="en-US" dirty="0"/>
+              <a:t>Support payment processing, product catalogs, shopping carts.</a:t>
+            </a:r>
+          </a:p>
+          <a:p>
+            <a:pPr lvl="1"/>
+            <a:r>
+              <a:rPr lang="en-US" dirty="0"/>
+              <a:t>Example: Amazon, eBay.</a:t>
+            </a:r>
+          </a:p>
+          <a:p>
+            <a:r>
+              <a:rPr lang="en-US" b="1" dirty="0" smtClean="0"/>
+              <a:t>Portal </a:t>
+            </a:r>
+            <a:r>
+              <a:rPr lang="en-US" b="1" dirty="0"/>
+              <a:t>Web Applications</a:t>
+            </a:r>
+          </a:p>
+          <a:p>
+            <a:pPr lvl="1"/>
+            <a:r>
+              <a:rPr lang="en-US" dirty="0"/>
+              <a:t>Provide a single point of access to a variety of information and services.</a:t>
+            </a:r>
+          </a:p>
+          <a:p>
+            <a:pPr lvl="1"/>
+            <a:r>
+              <a:rPr lang="en-US" dirty="0"/>
+              <a:t>Often integrate multiple systems and databases.</a:t>
+            </a:r>
+          </a:p>
+          <a:p>
+            <a:pPr lvl="1"/>
+            <a:r>
+              <a:rPr lang="en-US" dirty="0"/>
+              <a:t>Example: Yahoo!, MSN, government portals</a:t>
+            </a:r>
+            <a:r>
+              <a:rPr lang="en-US" dirty="0" smtClean="0"/>
+              <a:t>.</a:t>
+            </a:r>
+          </a:p>
+          <a:p>
+            <a:pPr lvl="0"/>
+            <a:r>
+              <a:rPr lang="en-US" sz="2600" dirty="0">
+                <a:solidFill>
+                  <a:srgbClr val="FF0000"/>
+                </a:solidFill>
+                <a:latin typeface="Times New Roman" panose="02020603050405020304" pitchFamily="18" charset="0"/>
+                <a:cs typeface="Times New Roman" panose="02020603050405020304" pitchFamily="18" charset="0"/>
+              </a:rPr>
+              <a:t>Provide access to </a:t>
+            </a:r>
+            <a:r>
+              <a:rPr lang="en-US" sz="2600" b="1" dirty="0">
+                <a:solidFill>
+                  <a:srgbClr val="FF0000"/>
+                </a:solidFill>
+                <a:latin typeface="Times New Roman" panose="02020603050405020304" pitchFamily="18" charset="0"/>
+                <a:cs typeface="Times New Roman" panose="02020603050405020304" pitchFamily="18" charset="0"/>
+              </a:rPr>
+              <a:t>different services</a:t>
+            </a:r>
+            <a:r>
+              <a:rPr lang="en-US" sz="2600" dirty="0">
+                <a:solidFill>
+                  <a:srgbClr val="FF0000"/>
+                </a:solidFill>
+                <a:latin typeface="Times New Roman" panose="02020603050405020304" pitchFamily="18" charset="0"/>
+                <a:cs typeface="Times New Roman" panose="02020603050405020304" pitchFamily="18" charset="0"/>
+              </a:rPr>
+              <a:t> from one place.</a:t>
+            </a:r>
+          </a:p>
+          <a:p>
+            <a:pPr lvl="0"/>
+            <a:r>
+              <a:rPr lang="en-US" sz="2600" dirty="0">
+                <a:solidFill>
+                  <a:srgbClr val="FF0000"/>
+                </a:solidFill>
+                <a:latin typeface="Times New Roman" panose="02020603050405020304" pitchFamily="18" charset="0"/>
+                <a:cs typeface="Times New Roman" panose="02020603050405020304" pitchFamily="18" charset="0"/>
+              </a:rPr>
+              <a:t>Often integrates databases and external </a:t>
+            </a:r>
+            <a:r>
+              <a:rPr lang="en-US" sz="2600">
+                <a:solidFill>
+                  <a:srgbClr val="FF0000"/>
+                </a:solidFill>
+                <a:latin typeface="Times New Roman" panose="02020603050405020304" pitchFamily="18" charset="0"/>
+                <a:cs typeface="Times New Roman" panose="02020603050405020304" pitchFamily="18" charset="0"/>
+              </a:rPr>
+              <a:t>systems</a:t>
+            </a:r>
+            <a:r>
+              <a:rPr lang="en-US" sz="2600" smtClean="0">
+                <a:solidFill>
+                  <a:srgbClr val="FF0000"/>
+                </a:solidFill>
+                <a:latin typeface="Times New Roman" panose="02020603050405020304" pitchFamily="18" charset="0"/>
+                <a:cs typeface="Times New Roman" panose="02020603050405020304" pitchFamily="18" charset="0"/>
+              </a:rPr>
+              <a:t>.</a:t>
+            </a:r>
+            <a:endParaRPr lang="en-US" dirty="0"/>
+          </a:p>
+          <a:p>
+            <a:r>
+              <a:rPr lang="en-US" b="1" dirty="0" smtClean="0"/>
+              <a:t>Content </a:t>
+            </a:r>
+            <a:r>
+              <a:rPr lang="en-US" b="1" dirty="0"/>
+              <a:t>Management Systems (CMS)</a:t>
+            </a:r>
+          </a:p>
+          <a:p>
+            <a:pPr lvl="1"/>
+            <a:r>
+              <a:rPr lang="en-US" dirty="0"/>
+              <a:t>Allow users to create, edit, and manage website content without technical knowledge.</a:t>
+            </a:r>
+          </a:p>
+          <a:p>
+            <a:pPr lvl="1"/>
+            <a:r>
+              <a:rPr lang="en-US" dirty="0"/>
+              <a:t>Example: </a:t>
+            </a:r>
+            <a:r>
+              <a:rPr lang="en-US" dirty="0" err="1"/>
+              <a:t>WordPress</a:t>
+            </a:r>
+            <a:r>
+              <a:rPr lang="en-US" dirty="0"/>
+              <a:t>, </a:t>
+            </a:r>
+            <a:r>
+              <a:rPr lang="en-US" dirty="0" err="1"/>
+              <a:t>Joomla</a:t>
+            </a:r>
+            <a:r>
+              <a:rPr lang="en-US" dirty="0"/>
+              <a:t>.</a:t>
+            </a:r>
+          </a:p>
+          <a:p>
+            <a:endParaRPr lang="en-US" dirty="0"/>
+          </a:p>
+        </p:txBody>
+      </p:sp>
+    </p:spTree>
+    <p:extLst>
+      <p:ext uri="{BB962C8B-B14F-4D97-AF65-F5344CB8AC3E}">
+        <p14:creationId xmlns:p14="http://schemas.microsoft.com/office/powerpoint/2010/main" val="1328190805"/>
+      </p:ext>
+    </p:extLst>
+  </p:cSld>
+  <p:clrMapOvr>
+    <a:masterClrMapping/>
+  </p:clrMapOvr>
+  <p:timing>
+    <p:tnLst>
+      <p:par>
+        <p:cTn id="1" dur="indefinite" restart="never" nodeType="tmRoot"/>
+      </p:par>
+    </p:tnLst>
+  </p:timing>
+</p:sld>
+</file>
+
+<file path=ppt/slides/slide14.xml><?xml version="1.0" encoding="utf-8"?>
+<p:sld xmlns:a="http://schemas.openxmlformats.org/drawingml/2006/main" xmlns:r="http://schemas.openxmlformats.org/officeDocument/2006/relationships" xmlns:p="http://schemas.openxmlformats.org/presentationml/2006/main">
+  <p:cSld>
+    <p:spTree>
+      <p:nvGrpSpPr>
+        <p:cNvPr id="1" name=""/>
+        <p:cNvGrpSpPr/>
+        <p:nvPr/>
+      </p:nvGrpSpPr>
+      <p:grpSpPr>
+        <a:xfrm>
+          <a:off x="0" y="0"/>
+          <a:ext cx="0" cy="0"/>
+          <a:chOff x="0" y="0"/>
+          <a:chExt cx="0" cy="0"/>
+        </a:xfrm>
+      </p:grpSpPr>
+      <p:sp>
+        <p:nvSpPr>
+          <p:cNvPr id="2" name="Title 1"/>
+          <p:cNvSpPr>
+            <a:spLocks noGrp="1"/>
+          </p:cNvSpPr>
+          <p:nvPr>
+            <p:ph type="title"/>
+          </p:nvPr>
+        </p:nvSpPr>
+        <p:spPr/>
+        <p:txBody>
+          <a:bodyPr>
+            <a:normAutofit fontScale="90000"/>
+          </a:bodyPr>
+          <a:lstStyle/>
+          <a:p>
+            <a:r>
+              <a:rPr lang="en-US" dirty="0"/>
+              <a:t>Classification of Web </a:t>
+            </a:r>
+            <a:r>
+              <a:rPr lang="en-US" dirty="0" smtClean="0"/>
+              <a:t>Applications</a:t>
+            </a:r>
+            <a:br>
+              <a:rPr lang="en-US" dirty="0" smtClean="0"/>
+            </a:br>
+            <a:endParaRPr lang="en-US" dirty="0"/>
+          </a:p>
+        </p:txBody>
+      </p:sp>
+      <p:sp>
+        <p:nvSpPr>
+          <p:cNvPr id="3" name="Content Placeholder 2"/>
+          <p:cNvSpPr>
+            <a:spLocks noGrp="1"/>
+          </p:cNvSpPr>
+          <p:nvPr>
+            <p:ph idx="1"/>
+          </p:nvPr>
+        </p:nvSpPr>
+        <p:spPr/>
+        <p:txBody>
+          <a:bodyPr>
             <a:normAutofit fontScale="85000" lnSpcReduction="20000"/>
           </a:bodyPr>
           <a:lstStyle/>
@@ -3808,7 +10267,7 @@
 </p:sld>
 </file>
 
-<file path=ppt/slides/slide14.xml><?xml version="1.0" encoding="utf-8"?>
+<file path=ppt/slides/slide15.xml><?xml version="1.0" encoding="utf-8"?>
 <p:sld xmlns:a="http://schemas.openxmlformats.org/drawingml/2006/main" xmlns:r="http://schemas.openxmlformats.org/officeDocument/2006/relationships" xmlns:p="http://schemas.openxmlformats.org/presentationml/2006/main">
   <p:cSld>
     <p:spTree>
@@ -4267,7 +10726,7 @@
         </p:spPr>
         <p:txBody>
           <a:bodyPr>
-            <a:normAutofit/>
+            <a:normAutofit lnSpcReduction="10000"/>
           </a:bodyPr>
           <a:lstStyle/>
           <a:p>
@@ -4291,8 +10750,44 @@
             <a:pPr lvl="1"/>
             <a:r>
               <a:rPr lang="en-US" sz="2400" dirty="0"/>
-              <a:t>Coordinating these requires systematic engineering methods to ensure smooth interoperability.</a:t>
-            </a:r>
+              <a:t>Coordinating these requires systematic engineering methods to ensure smooth interoperability</a:t>
+            </a:r>
+            <a:r>
+              <a:rPr lang="en-US" sz="2400" dirty="0" smtClean="0"/>
+              <a:t>.</a:t>
+            </a:r>
+          </a:p>
+          <a:p>
+            <a:pPr lvl="1"/>
+            <a:r>
+              <a:rPr lang="en-US" sz="2400" dirty="0">
+                <a:solidFill>
+                  <a:srgbClr val="00B0F0"/>
+                </a:solidFill>
+              </a:rPr>
+              <a:t>Coordination among these components needs </a:t>
+            </a:r>
+            <a:r>
+              <a:rPr lang="en-US" sz="2400" b="1" dirty="0">
+                <a:solidFill>
+                  <a:srgbClr val="00B0F0"/>
+                </a:solidFill>
+              </a:rPr>
+              <a:t>systematic engineering practices</a:t>
+            </a:r>
+            <a:r>
+              <a:rPr lang="en-US" sz="2400" dirty="0">
+                <a:solidFill>
+                  <a:srgbClr val="00B0F0"/>
+                </a:solidFill>
+              </a:rPr>
+              <a:t> for smooth operation.</a:t>
+            </a:r>
+            <a:endParaRPr lang="en-US" sz="2400" dirty="0">
+              <a:solidFill>
+                <a:srgbClr val="00B0F0"/>
+              </a:solidFill>
+            </a:endParaRPr>
           </a:p>
           <a:p>
             <a:r>
@@ -4416,8 +10911,25 @@
             <a:pPr lvl="1"/>
             <a:r>
               <a:rPr lang="en-US" sz="2400" dirty="0"/>
-              <a:t>Without proper engineering, maintaining code, fixing bugs, and upgrading features can become overwhelming.</a:t>
-            </a:r>
+              <a:t>Without proper engineering, maintaining code, fixing bugs, and upgrading features can become </a:t>
+            </a:r>
+            <a:r>
+              <a:rPr lang="en-US" sz="1050" dirty="0" smtClean="0"/>
+              <a:t>overwhelming</a:t>
+            </a:r>
+            <a:r>
+              <a:rPr lang="en-US" sz="2400" dirty="0" smtClean="0"/>
+              <a:t>/</a:t>
+            </a:r>
+            <a:r>
+              <a:rPr lang="en-US" sz="2400" dirty="0" err="1" smtClean="0"/>
+              <a:t>dificult</a:t>
+            </a:r>
+            <a:r>
+              <a:rPr lang="en-US" sz="2400" dirty="0" smtClean="0"/>
+              <a:t>.</a:t>
+            </a:r>
+            <a:endParaRPr lang="en-US" sz="2400" dirty="0"/>
           </a:p>
           <a:p>
             <a:pPr lvl="1"/>
@@ -4637,21 +11149,16 @@
             <p:ph type="title"/>
           </p:nvPr>
         </p:nvSpPr>
-        <p:spPr/>
-        <p:txBody>
-          <a:bodyPr>
-            <a:normAutofit fontScale="90000"/>
-          </a:bodyPr>
-          <a:lstStyle/>
-          <a:p>
-            <a:r>
-              <a:rPr lang="en-US" dirty="0"/>
-              <a:t>Challenges in Web </a:t>
-            </a:r>
-            <a:r>
-              <a:rPr lang="en-US" dirty="0" smtClean="0"/>
-              <a:t>Application Development</a:t>
-            </a:r>
+        <p:spPr>
+          <a:xfrm flipV="1">
+            <a:off x="484710" y="152400"/>
+            <a:ext cx="7055380" cy="300318"/>
+          </a:xfrm>
+        </p:spPr>
+        <p:txBody>
+          <a:bodyPr/>
+          <a:lstStyle/>
+          <a:p>
             <a:endParaRPr lang="en-US" dirty="0"/>
           </a:p>
         </p:txBody>
@@ -4666,7 +11173,12 @@
             <p:ph idx="1"/>
           </p:nvPr>
         </p:nvSpPr>
-        <p:spPr/>
+        <p:spPr>
+          <a:xfrm>
+            <a:off x="827700" y="685801"/>
+            <a:ext cx="6711654" cy="5562606"/>
+          </a:xfrm>
+        </p:spPr>
         <p:txBody>
           <a:bodyPr>
             <a:normAutofit fontScale="92500" lnSpcReduction="20000"/>
@@ -4674,59 +11186,114 @@
           <a:lstStyle/>
           <a:p>
             <a:r>
+              <a:rPr lang="en-US" b="1" dirty="0">
+                <a:solidFill>
+                  <a:srgbClr val="FF0000"/>
+                </a:solidFill>
+              </a:rPr>
+              <a:t>Cross-Platform and Cross-Browser </a:t>
+            </a:r>
+            <a:r>
+              <a:rPr lang="en-US" b="1" dirty="0" smtClean="0">
+                <a:solidFill>
+                  <a:srgbClr val="FF0000"/>
+                </a:solidFill>
+              </a:rPr>
+              <a:t>Compatibility</a:t>
+            </a:r>
+            <a:endParaRPr lang="en-US" b="1" dirty="0"/>
+          </a:p>
+          <a:p>
+            <a:r>
+              <a:rPr lang="en-US" dirty="0"/>
+              <a:t>A web app should work properly on </a:t>
+            </a:r>
+            <a:r>
               <a:rPr lang="en-US" b="1" dirty="0"/>
-              <a:t>Diverse Technology Stack</a:t>
-            </a:r>
-          </a:p>
-          <a:p>
-            <a:pPr lvl="1"/>
+              <a:t>all types of devices</a:t>
+            </a:r>
             <a:r>
               <a:rPr lang="en-US" dirty="0"/>
-              <a:t>Must handle </a:t>
+              <a:t> (like computers, tablets, phones).</a:t>
+            </a:r>
+          </a:p>
+          <a:p>
+            <a:r>
+              <a:rPr lang="en-US" dirty="0"/>
+              <a:t>It should also work well in </a:t>
             </a:r>
             <a:r>
               <a:rPr lang="en-US" b="1" dirty="0"/>
-              <a:t>HTML/CSS/JavaScript</a:t>
+              <a:t>different browsers</a:t>
             </a:r>
             <a:r>
               <a:rPr lang="en-US" dirty="0"/>
-              <a:t>, frameworks (React, Angular), backend (Node.js, </a:t>
-            </a:r>
-            <a:r>
-              <a:rPr lang="en-US" dirty="0" err="1"/>
-              <a:t>Django</a:t>
-            </a:r>
+              <a:t> (like Chrome, Firefox, Safari, Edge).</a:t>
+            </a:r>
+          </a:p>
+          <a:p>
             <a:r>
               <a:rPr lang="en-US" dirty="0"/>
-              <a:t>), APIs, databases, and more.</a:t>
-            </a:r>
-          </a:p>
-          <a:p>
-            <a:r>
-              <a:rPr lang="en-US" b="1" dirty="0" smtClean="0"/>
-              <a:t>Rapid </a:t>
+              <a:t>This is called </a:t>
             </a:r>
             <a:r>
               <a:rPr lang="en-US" b="1" dirty="0"/>
-              <a:t>Technological Evolution</a:t>
-            </a:r>
-          </a:p>
-          <a:p>
-            <a:pPr lvl="1"/>
+              <a:t>cross-platform</a:t>
+            </a:r>
             <a:r>
               <a:rPr lang="en-US" dirty="0"/>
-              <a:t>New frameworks, standards, and tools are introduced constantly.</a:t>
-            </a:r>
-          </a:p>
-          <a:p>
-            <a:pPr lvl="1"/>
+              <a:t> (different devices) and </a:t>
+            </a:r>
+            <a:r>
+              <a:rPr lang="en-US" b="1" dirty="0"/>
+              <a:t>cross-browser</a:t>
+            </a:r>
             <a:r>
               <a:rPr lang="en-US" dirty="0"/>
-              <a:t>Requires continuous </a:t>
+              <a:t> (different browsers) compatibility.</a:t>
+            </a:r>
+          </a:p>
+          <a:p>
+            <a:r>
+              <a:rPr lang="en-US" dirty="0"/>
+              <a:t>Web engineering ensures that the app looks and works the </a:t>
             </a:r>
             <a:r>
               <a:rPr lang="en-US" b="1" dirty="0"/>
-              <a:t>learning and adaptation</a:t>
+              <a:t>same everywhere</a:t>
+            </a:r>
+            <a:r>
+              <a:rPr lang="en-US" dirty="0" smtClean="0"/>
+              <a:t>.</a:t>
+            </a:r>
+          </a:p>
+          <a:p>
+            <a:r>
+              <a:rPr lang="en-US" b="1" dirty="0">
+                <a:solidFill>
+                  <a:srgbClr val="FF0000"/>
+                </a:solidFill>
+              </a:rPr>
+              <a:t>Scalability and </a:t>
+            </a:r>
+            <a:r>
+              <a:rPr lang="en-US" b="1" dirty="0" smtClean="0">
+                <a:solidFill>
+                  <a:srgbClr val="FF0000"/>
+                </a:solidFill>
+              </a:rPr>
+              <a:t>Performance</a:t>
+            </a:r>
+            <a:endParaRPr lang="en-US" b="1" dirty="0"/>
+          </a:p>
+          <a:p>
+            <a:r>
+              <a:rPr lang="en-US" dirty="0"/>
+              <a:t>When more people start using a web app, it must handle </a:t>
+            </a:r>
+            <a:r>
+              <a:rPr lang="en-US" b="1" dirty="0"/>
+              <a:t>more users and more data</a:t>
             </a:r>
             <a:r>
               <a:rPr lang="en-US" dirty="0"/>
@@ -4735,20 +11302,58 @@
           </a:p>
           <a:p>
             <a:r>
-              <a:rPr lang="en-US" b="1" dirty="0" smtClean="0"/>
-              <a:t>Cross-Platform </a:t>
+              <a:rPr lang="en-US" dirty="0"/>
+              <a:t>This is called </a:t>
             </a:r>
             <a:r>
               <a:rPr lang="en-US" b="1" dirty="0"/>
-              <a:t>and Cross-Browser Compatibility</a:t>
-            </a:r>
-          </a:p>
-          <a:p>
-            <a:pPr lvl="1"/>
+              <a:t>scalability</a:t>
+            </a:r>
             <a:r>
               <a:rPr lang="en-US" dirty="0"/>
-              <a:t>Ensuring consistent behavior across devices, browsers, and screen sizes can be complex.</a:t>
-            </a:r>
+              <a:t> – the ability to grow without problems.</a:t>
+            </a:r>
+          </a:p>
+          <a:p>
+            <a:r>
+              <a:rPr lang="en-US" b="1" dirty="0"/>
+              <a:t>Performance</a:t>
+            </a:r>
+            <a:r>
+              <a:rPr lang="en-US" dirty="0"/>
+              <a:t> means the app should stay </a:t>
+            </a:r>
+            <a:r>
+              <a:rPr lang="en-US" b="1" dirty="0"/>
+              <a:t>fast and smooth</a:t>
+            </a:r>
+            <a:r>
+              <a:rPr lang="en-US" dirty="0"/>
+              <a:t>, even with many users.</a:t>
+            </a:r>
+          </a:p>
+          <a:p>
+            <a:r>
+              <a:rPr lang="en-US" dirty="0"/>
+              <a:t>Web engineering helps design systems that can </a:t>
+            </a:r>
+            <a:r>
+              <a:rPr lang="en-US" b="1" dirty="0"/>
+              <a:t>scale up</a:t>
+            </a:r>
+            <a:r>
+              <a:rPr lang="en-US" dirty="0"/>
+              <a:t> and run </a:t>
+            </a:r>
+            <a:r>
+              <a:rPr lang="en-US" b="1" dirty="0"/>
+              <a:t>efficiently</a:t>
+            </a:r>
+            <a:r>
+              <a:rPr lang="en-US" dirty="0" smtClean="0"/>
+              <a:t>.</a:t>
+            </a:r>
+            <a:endParaRPr lang="en-US" b="1" dirty="0"/>
           </a:p>
           <a:p>
             <a:endParaRPr lang="en-US" dirty="0"/>
@@ -4758,20 +11363,13 @@
     </p:spTree>
     <p:extLst>
       <p:ext uri="{BB962C8B-B14F-4D97-AF65-F5344CB8AC3E}">
-        <p14:creationId xmlns:p14="http://schemas.microsoft.com/office/powerpoint/2010/main" val="3013445832"/>
+        <p14:creationId xmlns:p14="http://schemas.microsoft.com/office/powerpoint/2010/main" val="461232155"/>
       </p:ext>
     </p:extLst>
   </p:cSld>
   <p:clrMapOvr>
     <a:masterClrMapping/>
   </p:clrMapOvr>
-  <p:timing>
-    <p:tnLst>
-      <p:par>
-        <p:cTn id="1" dur="indefinite" restart="never" nodeType="tmRoot"/>
-      </p:par>
-    </p:tnLst>
-  </p:timing>
 </p:sld>
 </file>
 
@@ -4834,63 +11432,88 @@
         <p:spPr/>
         <p:txBody>
           <a:bodyPr>
-            <a:normAutofit/>
+            <a:normAutofit fontScale="92500" lnSpcReduction="20000"/>
           </a:bodyPr>
           <a:lstStyle/>
           <a:p>
             <a:r>
               <a:rPr lang="en-US" b="1" dirty="0"/>
-              <a:t>Integration Complexity</a:t>
+              <a:t>Diverse Technology Stack</a:t>
             </a:r>
           </a:p>
           <a:p>
             <a:pPr lvl="1"/>
             <a:r>
               <a:rPr lang="en-US" dirty="0"/>
-              <a:t>Must interact with third-party APIs, legacy systems, cloud services, and microservices.</a:t>
-            </a:r>
-          </a:p>
-          <a:p>
+              <a:t>Must handle </a:t>
+            </a:r>
             <a:r>
               <a:rPr lang="en-US" b="1" dirty="0"/>
-              <a:t>Fast Development Cycles</a:t>
+              <a:t>HTML/CSS/JavaScript</a:t>
+            </a:r>
+            <a:r>
+              <a:rPr lang="en-US" dirty="0"/>
+              <a:t>, frameworks (React, Angular), backend (Node.js, </a:t>
+            </a:r>
+            <a:r>
+              <a:rPr lang="en-US" dirty="0" err="1"/>
+              <a:t>Django</a:t>
+            </a:r>
+            <a:r>
+              <a:rPr lang="en-US" dirty="0"/>
+              <a:t>), APIs, databases, and more.</a:t>
+            </a:r>
+          </a:p>
+          <a:p>
+            <a:r>
+              <a:rPr lang="en-US" b="1" dirty="0" smtClean="0"/>
+              <a:t>Rapid </a:t>
+            </a:r>
+            <a:r>
+              <a:rPr lang="en-US" b="1" dirty="0"/>
+              <a:t>Technological Evolution</a:t>
             </a:r>
           </a:p>
           <a:p>
             <a:pPr lvl="1"/>
             <a:r>
               <a:rPr lang="en-US" dirty="0"/>
-              <a:t>Agile environments demand </a:t>
+              <a:t>New frameworks, standards, and tools are introduced constantly.</a:t>
+            </a:r>
+          </a:p>
+          <a:p>
+            <a:pPr lvl="1"/>
+            <a:r>
+              <a:rPr lang="en-US" dirty="0"/>
+              <a:t>Requires continuous </a:t>
             </a:r>
             <a:r>
               <a:rPr lang="en-US" b="1" dirty="0"/>
-              <a:t>frequent updates</a:t>
+              <a:t>learning and adaptation</a:t>
             </a:r>
             <a:r>
               <a:rPr lang="en-US" dirty="0"/>
-              <a:t>, </a:t>
+              <a:t>.</a:t>
+            </a:r>
+          </a:p>
+          <a:p>
+            <a:r>
+              <a:rPr lang="en-US" b="1" dirty="0" smtClean="0"/>
+              <a:t>Cross-Platform </a:t>
             </a:r>
             <a:r>
               <a:rPr lang="en-US" b="1" dirty="0"/>
-              <a:t>continuous integration</a:t>
-            </a:r>
+              <a:t>and Cross-Browser Compatibility</a:t>
+            </a:r>
+          </a:p>
+          <a:p>
+            <a:pPr lvl="1"/>
             <a:r>
               <a:rPr lang="en-US" dirty="0"/>
-              <a:t>, and </a:t>
-            </a:r>
-            <a:r>
-              <a:rPr lang="en-US" b="1" dirty="0"/>
-              <a:t>deployment</a:t>
-            </a:r>
-            <a:r>
-              <a:rPr lang="en-US" dirty="0"/>
-              <a:t> without compromising quality.</a:t>
-            </a:r>
-          </a:p>
-          <a:p>
-            <a:pPr marL="0" indent="0">
-              <a:buNone/>
-            </a:pPr>
+              <a:t>Ensuring consistent behavior across devices, browsers, and screen sizes can be complex.</a:t>
+            </a:r>
+          </a:p>
+          <a:p>
             <a:endParaRPr lang="en-US" dirty="0"/>
           </a:p>
         </p:txBody>
@@ -4898,7 +11521,7 @@
     </p:spTree>
     <p:extLst>
       <p:ext uri="{BB962C8B-B14F-4D97-AF65-F5344CB8AC3E}">
-        <p14:creationId xmlns:p14="http://schemas.microsoft.com/office/powerpoint/2010/main" val="445591218"/>
+        <p14:creationId xmlns:p14="http://schemas.microsoft.com/office/powerpoint/2010/main" val="3013445832"/>
       </p:ext>
     </p:extLst>
   </p:cSld>
@@ -4944,13 +11567,20 @@
         </p:nvSpPr>
         <p:spPr/>
         <p:txBody>
-          <a:bodyPr/>
+          <a:bodyPr>
+            <a:normAutofit fontScale="90000"/>
+          </a:bodyPr>
           <a:lstStyle/>
           <a:p>
             <a:r>
               <a:rPr lang="en-US" dirty="0"/>
-              <a:t>Benefits of Web Engineering</a:t>
-            </a:r>
+              <a:t>Challenges in Web </a:t>
+            </a:r>
+            <a:r>
+              <a:rPr lang="en-US" dirty="0" smtClean="0"/>
+              <a:t>Application Development</a:t>
+            </a:r>
+            <a:endParaRPr lang="en-US" dirty="0"/>
           </a:p>
         </p:txBody>
       </p:sp>
@@ -4967,24 +11597,37 @@
         <p:spPr/>
         <p:txBody>
           <a:bodyPr>
-            <a:normAutofit fontScale="77500" lnSpcReduction="20000"/>
+            <a:normAutofit/>
           </a:bodyPr>
           <a:lstStyle/>
           <a:p>
             <a:r>
               <a:rPr lang="en-US" b="1" dirty="0"/>
-              <a:t>Structured Development Process</a:t>
+              <a:t>Integration Complexity</a:t>
             </a:r>
           </a:p>
           <a:p>
             <a:pPr lvl="1"/>
             <a:r>
               <a:rPr lang="en-US" dirty="0"/>
-              <a:t>Promotes </a:t>
-            </a:r>
+              <a:t>Must interact with third-party APIs, legacy systems, cloud services, and microservices.</a:t>
+            </a:r>
+          </a:p>
+          <a:p>
             <a:r>
               <a:rPr lang="en-US" b="1" dirty="0"/>
-              <a:t>modular</a:t>
+              <a:t>Fast Development Cycles</a:t>
+            </a:r>
+          </a:p>
+          <a:p>
+            <a:pPr lvl="1"/>
+            <a:r>
+              <a:rPr lang="en-US" dirty="0"/>
+              <a:t>Agile environments demand </a:t>
+            </a:r>
+            <a:r>
+              <a:rPr lang="en-US" b="1" dirty="0"/>
+              <a:t>frequent updates</a:t>
             </a:r>
             <a:r>
               <a:rPr lang="en-US" dirty="0"/>
@@ -4992,7 +11635,7 @@
             </a:r>
             <a:r>
               <a:rPr lang="en-US" b="1" dirty="0"/>
-              <a:t>scalable</a:t>
+              <a:t>continuous integration</a:t>
             </a:r>
             <a:r>
               <a:rPr lang="en-US" dirty="0"/>
@@ -5000,133 +11643,17 @@
             </a:r>
             <a:r>
               <a:rPr lang="en-US" b="1" dirty="0"/>
-              <a:t>reusable</a:t>
+              <a:t>deployment</a:t>
             </a:r>
             <a:r>
               <a:rPr lang="en-US" dirty="0"/>
-              <a:t> code.</a:t>
-            </a:r>
-          </a:p>
-          <a:p>
-            <a:pPr lvl="1"/>
-            <a:r>
-              <a:rPr lang="en-US" dirty="0"/>
-              <a:t>Follows defined </a:t>
-            </a:r>
-            <a:r>
-              <a:rPr lang="en-US" b="1" dirty="0"/>
-              <a:t>development methodologies</a:t>
-            </a:r>
-            <a:r>
-              <a:rPr lang="en-US" dirty="0"/>
-              <a:t> (Agile, Waterfall, etc.).</a:t>
-            </a:r>
-          </a:p>
-          <a:p>
-            <a:r>
-              <a:rPr lang="en-US" b="1" dirty="0" smtClean="0"/>
-              <a:t>Improved </a:t>
-            </a:r>
-            <a:r>
-              <a:rPr lang="en-US" b="1" dirty="0"/>
-              <a:t>Collaboration</a:t>
-            </a:r>
-          </a:p>
-          <a:p>
-            <a:pPr lvl="1"/>
-            <a:r>
-              <a:rPr lang="en-US" dirty="0"/>
-              <a:t>Bridges the gap between </a:t>
-            </a:r>
-            <a:r>
-              <a:rPr lang="en-US" b="1" dirty="0"/>
-              <a:t>designers</a:t>
-            </a:r>
-            <a:r>
-              <a:rPr lang="en-US" dirty="0"/>
-              <a:t>, </a:t>
-            </a:r>
-            <a:r>
-              <a:rPr lang="en-US" b="1" dirty="0"/>
-              <a:t>developers</a:t>
-            </a:r>
-            <a:r>
-              <a:rPr lang="en-US" dirty="0"/>
-              <a:t>, and </a:t>
-            </a:r>
-            <a:r>
-              <a:rPr lang="en-US" b="1" dirty="0"/>
-              <a:t>stakeholders</a:t>
-            </a:r>
-            <a:r>
-              <a:rPr lang="en-US" dirty="0"/>
-              <a:t>.</a:t>
-            </a:r>
-          </a:p>
-          <a:p>
-            <a:pPr lvl="1"/>
-            <a:r>
-              <a:rPr lang="en-US" dirty="0"/>
-              <a:t>Encourages better </a:t>
-            </a:r>
-            <a:r>
-              <a:rPr lang="en-US" b="1" dirty="0"/>
-              <a:t>communication</a:t>
-            </a:r>
-            <a:r>
-              <a:rPr lang="en-US" dirty="0"/>
-              <a:t> through documentation and standards.</a:t>
-            </a:r>
-          </a:p>
-          <a:p>
-            <a:r>
-              <a:rPr lang="en-US" b="1" dirty="0" smtClean="0"/>
-              <a:t>Quality </a:t>
-            </a:r>
-            <a:r>
-              <a:rPr lang="en-US" b="1" dirty="0"/>
-              <a:t>Assurance</a:t>
-            </a:r>
-          </a:p>
-          <a:p>
-            <a:pPr lvl="1"/>
-            <a:r>
-              <a:rPr lang="en-US" dirty="0"/>
-              <a:t>Emphasizes </a:t>
-            </a:r>
-            <a:r>
-              <a:rPr lang="en-US" b="1" dirty="0"/>
-              <a:t>testing</a:t>
-            </a:r>
-            <a:r>
-              <a:rPr lang="en-US" dirty="0"/>
-              <a:t>, </a:t>
-            </a:r>
-            <a:r>
-              <a:rPr lang="en-US" b="1" dirty="0"/>
-              <a:t>validation</a:t>
-            </a:r>
-            <a:r>
-              <a:rPr lang="en-US" dirty="0"/>
-              <a:t>, and </a:t>
-            </a:r>
-            <a:r>
-              <a:rPr lang="en-US" b="1" dirty="0"/>
-              <a:t>performance optimization</a:t>
-            </a:r>
-            <a:r>
-              <a:rPr lang="en-US" dirty="0"/>
-              <a:t>.</a:t>
-            </a:r>
-          </a:p>
-          <a:p>
-            <a:pPr lvl="1"/>
-            <a:r>
-              <a:rPr lang="en-US" dirty="0"/>
-              <a:t>Reduces bugs and improves reliability.</a:t>
-            </a:r>
-          </a:p>
-          <a:p>
+              <a:t> without compromising quality.</a:t>
+            </a:r>
+          </a:p>
+          <a:p>
+            <a:pPr marL="0" indent="0">
+              <a:buNone/>
+            </a:pPr>
             <a:endParaRPr lang="en-US" dirty="0"/>
           </a:p>
         </p:txBody>
@@ -5134,7 +11661,7 @@
     </p:spTree>
     <p:extLst>
       <p:ext uri="{BB962C8B-B14F-4D97-AF65-F5344CB8AC3E}">
-        <p14:creationId xmlns:p14="http://schemas.microsoft.com/office/powerpoint/2010/main" val="902697418"/>
+        <p14:creationId xmlns:p14="http://schemas.microsoft.com/office/powerpoint/2010/main" val="445591218"/>
       </p:ext>
     </p:extLst>
   </p:cSld>
@@ -5432,4 +11959,270 @@
   <a:objectDefaults/>
   <a:extraClrSchemeLst/>
 </a:theme>
+</file>
+
+<file path=ppt/theme/theme2.xml><?xml version="1.0" encoding="utf-8"?>
+<a:theme xmlns:a="http://schemas.openxmlformats.org/drawingml/2006/main" name="Ion">
+  <a:themeElements>
+    <a:clrScheme name="Ion">
+      <a:dk1>
+        <a:sysClr val="windowText" lastClr="000000"/>
+      </a:dk1>
+      <a:lt1>
+        <a:sysClr val="window" lastClr="FFFFFF"/>
+      </a:lt1>
+      <a:dk2>
+        <a:srgbClr val="1E5155"/>
+      </a:dk2>
+      <a:lt2>
+        <a:srgbClr val="EBEBEB"/>
+      </a:lt2>
+      <a:accent1>
+        <a:srgbClr val="B01513"/>
+      </a:accent1>
+      <a:accent2>
+        <a:srgbClr val="EA6312"/>
+      </a:accent2>
+      <a:accent3>
+        <a:srgbClr val="E6B729"/>
+      </a:accent3>
+      <a:accent4>
+        <a:srgbClr val="6AAC90"/>
+      </a:accent4>
+      <a:accent5>
+        <a:srgbClr val="5F9C9D"/>
+      </a:accent5>
+      <a:accent6>
+        <a:srgbClr val="9E5E9B"/>
+      </a:accent6>
+      <a:hlink>
+        <a:srgbClr val="58C1BA"/>
+      </a:hlink>
+      <a:folHlink>
+        <a:srgbClr val="9DD0CB"/>
+      </a:folHlink>
+    </a:clrScheme>
+    <a:fontScheme name="Ion">
+      <a:majorFont>
+        <a:latin typeface="Century Gothic" panose="020B0502020202020204"/>
+        <a:ea typeface=""/>
+        <a:cs typeface=""/>
+        <a:font script="Jpan" typeface="メイリオ"/>
+        <a:font script="Hang" typeface="맑은 고딕"/>
+        <a:font script="Hans" typeface="宋体"/>
+        <a:font script="Hant" typeface="新細明體"/>
+        <a:font script="Arab" typeface="Times New Roman"/>
+        <a:font script="Hebr" typeface="Times New Roman"/>
+        <a:font script="Thai" typeface="Angsana New"/>
+        <a:font script="Ethi" typeface="Nyala"/>
+        <a:font script="Beng" typeface="Vrinda"/>
+        <a:font script="Gujr" typeface="Shruti"/>
+        <a:font script="Khmr" typeface="MoolBoran"/>
+        <a:font script="Knda" typeface="Tunga"/>
+        <a:font script="Guru" typeface="Raavi"/>
+        <a:font script="Cans" typeface="Euphemia"/>
+        <a:font script="Cher" typeface="Plantagenet Cherokee"/>
+        <a:font script="Yiii" typeface="Microsoft Yi Baiti"/>
+        <a:font script="Tibt" typeface="Microsoft Himalaya"/>
+        <a:font script="Thaa" typeface="MV Boli"/>
+        <a:font script="Deva" typeface="Mangal"/>
+        <a:font script="Telu" typeface="Gautami"/>
+        <a:font script="Taml" typeface="Latha"/>
+        <a:font script="Syrc" typeface="Estrangelo Edessa"/>
+        <a:font script="Orya" typeface="Kalinga"/>
+        <a:font script="Mlym" typeface="Kartika"/>
+        <a:font script="Laoo" typeface="DokChampa"/>
+        <a:font script="Sinh" typeface="Iskoola Pota"/>
+        <a:font script="Mong" typeface="Mongolian Baiti"/>
+        <a:font script="Viet" typeface="Times New Roman"/>
+        <a:font script="Uigh" typeface="Microsoft Uighur"/>
+        <a:font script="Geor" typeface="Sylfaen"/>
+      </a:majorFont>
+      <a:minorFont>
+        <a:latin typeface="Century Gothic" panose="020B0502020202020204"/>
+        <a:ea typeface=""/>
+        <a:cs typeface=""/>
+        <a:font script="Jpan" typeface="メイリオ"/>
+        <a:font script="Hang" typeface="맑은 고딕"/>
+        <a:font script="Hans" typeface="宋体"/>
+        <a:font script="Hant" typeface="新細明體"/>
+        <a:font script="Arab" typeface="Arial"/>
+        <a:font script="Hebr" typeface="Arial"/>
+        <a:font script="Thai" typeface="Cordia New"/>
+        <a:font script="Ethi" typeface="Nyala"/>
+        <a:font script="Beng" typeface="Vrinda"/>
+        <a:font script="Gujr" typeface="Shruti"/>
+        <a:font script="Khmr" typeface="DaunPenh"/>
+        <a:font script="Knda" typeface="Tunga"/>
+        <a:font script="Guru" typeface="Raavi"/>
+        <a:font script="Cans" typeface="Euphemia"/>
+        <a:font script="Cher" typeface="Plantagenet Cherokee"/>
+        <a:font script="Yiii" typeface="Microsoft Yi Baiti"/>
+        <a:font script="Tibt" typeface="Microsoft Himalaya"/>
+        <a:font script="Thaa" typeface="MV Boli"/>
+        <a:font script="Deva" typeface="Mangal"/>
+        <a:font script="Telu" typeface="Gautami"/>
+        <a:font script="Taml" typeface="Latha"/>
+        <a:font script="Syrc" typeface="Estrangelo Edessa"/>
+        <a:font script="Orya" typeface="Kalinga"/>
+        <a:font script="Mlym" typeface="Kartika"/>
+        <a:font script="Laoo" typeface="DokChampa"/>
+        <a:font script="Sinh" typeface="Iskoola Pota"/>
+        <a:font script="Mong" typeface="Mongolian Baiti"/>
+        <a:font script="Viet" typeface="Arial"/>
+        <a:font script="Uigh" typeface="Microsoft Uighur"/>
+        <a:font script="Geor" typeface="Sylfaen"/>
+      </a:minorFont>
+    </a:fontScheme>
+    <a:fmtScheme name="Ion">
+      <a:fillStyleLst>
+        <a:solidFill>
+          <a:schemeClr val="phClr"/>
+        </a:solidFill>
+        <a:gradFill rotWithShape="1">
+          <a:gsLst>
+            <a:gs pos="0">
+              <a:schemeClr val="phClr">
+                <a:tint val="64000"/>
+                <a:lumMod val="118000"/>
+              </a:schemeClr>
+            </a:gs>
+            <a:gs pos="100000">
+              <a:schemeClr val="phClr">
+                <a:tint val="92000"/>
+                <a:alpha val="100000"/>
+                <a:lumMod val="110000"/>
+              </a:schemeClr>
+            </a:gs>
+          </a:gsLst>
+          <a:lin ang="5400000" scaled="0"/>
+        </a:gradFill>
+        <a:gradFill rotWithShape="1">
+          <a:gsLst>
+            <a:gs pos="0">
+              <a:schemeClr val="phClr">
+                <a:tint val="98000"/>
+                <a:lumMod val="114000"/>
+              </a:schemeClr>
+            </a:gs>
+            <a:gs pos="100000">
+              <a:schemeClr val="phClr">
+                <a:shade val="90000"/>
+                <a:lumMod val="84000"/>
+              </a:schemeClr>
+            </a:gs>
+          </a:gsLst>
+          <a:lin ang="5400000" scaled="0"/>
+        </a:gradFill>
+      </a:fillStyleLst>
+      <a:lnStyleLst>
+        <a:ln w="9525" cap="rnd" cmpd="sng" algn="ctr">
+          <a:solidFill>
+            <a:schemeClr val="phClr"/>
+          </a:solidFill>
+          <a:prstDash val="solid"/>
+        </a:ln>
+        <a:ln w="19050" cap="rnd" cmpd="sng" algn="ctr">
+          <a:solidFill>
+            <a:schemeClr val="phClr"/>
+          </a:solidFill>
+          <a:prstDash val="solid"/>
+        </a:ln>
+        <a:ln w="28575" cap="rnd" cmpd="sng" algn="ctr">
+          <a:solidFill>
+            <a:schemeClr val="phClr"/>
+          </a:solidFill>
+          <a:prstDash val="solid"/>
+        </a:ln>
+      </a:lnStyleLst>
+      <a:effectStyleLst>
+        <a:effectStyle>
+          <a:effectLst/>
+        </a:effectStyle>
+        <a:effectStyle>
+          <a:effectLst>
+            <a:outerShdw blurRad="38100" dist="25400" dir="5400000" rotWithShape="0">
+              <a:srgbClr val="000000">
+                <a:alpha val="45000"/>
+              </a:srgbClr>
+            </a:outerShdw>
+          </a:effectLst>
+        </a:effectStyle>
+        <a:effectStyle>
+          <a:effectLst>
+            <a:outerShdw blurRad="63500" dist="38100" dir="5400000" rotWithShape="0">
+              <a:srgbClr val="000000">
+                <a:alpha val="60000"/>
+              </a:srgbClr>
+            </a:outerShdw>
+          </a:effectLst>
+          <a:scene3d>
+            <a:camera prst="orthographicFront">
+              <a:rot lat="0" lon="0" rev="0"/>
+            </a:camera>
+            <a:lightRig rig="threePt" dir="tl"/>
+          </a:scene3d>
+          <a:sp3d prstMaterial="plastic">
+            <a:bevelT w="0" h="0"/>
+          </a:sp3d>
+        </a:effectStyle>
+      </a:effectStyleLst>
+      <a:bgFillStyleLst>
+        <a:solidFill>
+          <a:schemeClr val="phClr"/>
+        </a:solidFill>
+        <a:gradFill rotWithShape="1">
+          <a:gsLst>
+            <a:gs pos="0">
+              <a:schemeClr val="phClr">
+                <a:tint val="97000"/>
+                <a:hueMod val="88000"/>
+                <a:satMod val="130000"/>
+                <a:lumMod val="124000"/>
+              </a:schemeClr>
+            </a:gs>
+            <a:gs pos="100000">
+              <a:schemeClr val="phClr">
+                <a:tint val="96000"/>
+                <a:shade val="88000"/>
+                <a:hueMod val="108000"/>
+                <a:satMod val="164000"/>
+                <a:lumMod val="76000"/>
+              </a:schemeClr>
+            </a:gs>
+          </a:gsLst>
+          <a:path path="circle">
+            <a:fillToRect l="45000" t="65000" r="125000" b="100000"/>
+          </a:path>
+        </a:gradFill>
+        <a:blipFill rotWithShape="1">
+          <a:blip xmlns:r="http://schemas.openxmlformats.org/officeDocument/2006/relationships" r:embed="rId1">
+            <a:duotone>
+              <a:schemeClr val="phClr">
+                <a:shade val="69000"/>
+                <a:hueMod val="108000"/>
+                <a:satMod val="164000"/>
+                <a:lumMod val="74000"/>
+              </a:schemeClr>
+              <a:schemeClr val="phClr">
+                <a:tint val="96000"/>
+                <a:hueMod val="88000"/>
+                <a:satMod val="140000"/>
+                <a:lumMod val="132000"/>
+              </a:schemeClr>
+            </a:duotone>
+          </a:blip>
+          <a:stretch/>
+        </a:blipFill>
+      </a:bgFillStyleLst>
+    </a:fmtScheme>
+  </a:themeElements>
+  <a:objectDefaults/>
+  <a:extraClrSchemeLst/>
+  <a:extLst>
+    <a:ext uri="{05A4C25C-085E-4340-85A3-A5531E510DB2}">
+      <thm15:themeFamily xmlns:thm15="http://schemas.microsoft.com/office/thememl/2012/main" name="Ion" id="{B8441ADB-2E43-4AF7-B97A-BD870242C6A8}" vid="{292E63A9-BB86-4E3D-B92A-7223C6510D2E}"/>
+    </a:ext>
+  </a:extLst>
+</a:theme>
 </file>